--- a/JavaScript/javascript_01.pptx
+++ b/JavaScript/javascript_01.pptx
@@ -29,25 +29,33 @@
     <p:sldId id="341" r:id="rId23"/>
     <p:sldId id="342" r:id="rId24"/>
     <p:sldId id="343" r:id="rId25"/>
-    <p:sldId id="319" r:id="rId26"/>
+    <p:sldId id="344" r:id="rId26"/>
+    <p:sldId id="346" r:id="rId27"/>
+    <p:sldId id="345" r:id="rId28"/>
+    <p:sldId id="347" r:id="rId29"/>
+    <p:sldId id="348" r:id="rId30"/>
+    <p:sldId id="349" r:id="rId31"/>
+    <p:sldId id="350" r:id="rId32"/>
+    <p:sldId id="351" r:id="rId33"/>
+    <p:sldId id="319" r:id="rId34"/>
   </p:sldIdLst>
   <p:sldSz cx="18288000" cy="10287000"/>
   <p:notesSz cx="6858000" cy="9144000"/>
   <p:embeddedFontLst>
     <p:embeddedFont>
       <p:font typeface="Calibri" panose="020F0502020204030204" pitchFamily="34" charset="0"/>
-      <p:regular r:id="rId27"/>
-      <p:bold r:id="rId28"/>
-      <p:italic r:id="rId29"/>
-      <p:boldItalic r:id="rId30"/>
+      <p:regular r:id="rId35"/>
+      <p:bold r:id="rId36"/>
+      <p:italic r:id="rId37"/>
+      <p:boldItalic r:id="rId38"/>
     </p:embeddedFont>
     <p:embeddedFont>
       <p:font typeface="Times New Roman" panose="02020603050405020304" pitchFamily="18" charset="0"/>
-      <p:regular r:id="rId31"/>
+      <p:regular r:id="rId39"/>
     </p:embeddedFont>
     <p:embeddedFont>
       <p:font typeface="標楷體" panose="03000509000000000000" pitchFamily="65" charset="-120"/>
-      <p:regular r:id="rId32"/>
+      <p:regular r:id="rId40"/>
     </p:embeddedFont>
   </p:embeddedFontLst>
   <p:defaultTextStyle>
@@ -356,7 +364,7 @@
             <a:fld id="{1D8BD707-D9CF-40AE-B4C6-C98DA3205C09}" type="datetimeFigureOut">
               <a:rPr lang="en-US" smtClean="0"/>
               <a:pPr/>
-              <a:t>12/8/2024</a:t>
+              <a:t>12/22/2024</a:t>
             </a:fld>
             <a:endParaRPr lang="en-US"/>
           </a:p>
@@ -521,7 +529,7 @@
             <a:fld id="{1D8BD707-D9CF-40AE-B4C6-C98DA3205C09}" type="datetimeFigureOut">
               <a:rPr lang="en-US" smtClean="0"/>
               <a:pPr/>
-              <a:t>12/8/2024</a:t>
+              <a:t>12/22/2024</a:t>
             </a:fld>
             <a:endParaRPr lang="en-US"/>
           </a:p>
@@ -696,7 +704,7 @@
             <a:fld id="{1D8BD707-D9CF-40AE-B4C6-C98DA3205C09}" type="datetimeFigureOut">
               <a:rPr lang="en-US" smtClean="0"/>
               <a:pPr/>
-              <a:t>12/8/2024</a:t>
+              <a:t>12/22/2024</a:t>
             </a:fld>
             <a:endParaRPr lang="en-US"/>
           </a:p>
@@ -861,7 +869,7 @@
             <a:fld id="{1D8BD707-D9CF-40AE-B4C6-C98DA3205C09}" type="datetimeFigureOut">
               <a:rPr lang="en-US" smtClean="0"/>
               <a:pPr/>
-              <a:t>12/8/2024</a:t>
+              <a:t>12/22/2024</a:t>
             </a:fld>
             <a:endParaRPr lang="en-US"/>
           </a:p>
@@ -1103,7 +1111,7 @@
             <a:fld id="{1D8BD707-D9CF-40AE-B4C6-C98DA3205C09}" type="datetimeFigureOut">
               <a:rPr lang="en-US" smtClean="0"/>
               <a:pPr/>
-              <a:t>12/8/2024</a:t>
+              <a:t>12/22/2024</a:t>
             </a:fld>
             <a:endParaRPr lang="en-US"/>
           </a:p>
@@ -1385,7 +1393,7 @@
             <a:fld id="{1D8BD707-D9CF-40AE-B4C6-C98DA3205C09}" type="datetimeFigureOut">
               <a:rPr lang="en-US" smtClean="0"/>
               <a:pPr/>
-              <a:t>12/8/2024</a:t>
+              <a:t>12/22/2024</a:t>
             </a:fld>
             <a:endParaRPr lang="en-US"/>
           </a:p>
@@ -1801,7 +1809,7 @@
             <a:fld id="{1D8BD707-D9CF-40AE-B4C6-C98DA3205C09}" type="datetimeFigureOut">
               <a:rPr lang="en-US" smtClean="0"/>
               <a:pPr/>
-              <a:t>12/8/2024</a:t>
+              <a:t>12/22/2024</a:t>
             </a:fld>
             <a:endParaRPr lang="en-US"/>
           </a:p>
@@ -1915,7 +1923,7 @@
             <a:fld id="{1D8BD707-D9CF-40AE-B4C6-C98DA3205C09}" type="datetimeFigureOut">
               <a:rPr lang="en-US" smtClean="0"/>
               <a:pPr/>
-              <a:t>12/8/2024</a:t>
+              <a:t>12/22/2024</a:t>
             </a:fld>
             <a:endParaRPr lang="en-US"/>
           </a:p>
@@ -2007,7 +2015,7 @@
             <a:fld id="{1D8BD707-D9CF-40AE-B4C6-C98DA3205C09}" type="datetimeFigureOut">
               <a:rPr lang="en-US" smtClean="0"/>
               <a:pPr/>
-              <a:t>12/8/2024</a:t>
+              <a:t>12/22/2024</a:t>
             </a:fld>
             <a:endParaRPr lang="en-US"/>
           </a:p>
@@ -2279,7 +2287,7 @@
             <a:fld id="{1D8BD707-D9CF-40AE-B4C6-C98DA3205C09}" type="datetimeFigureOut">
               <a:rPr lang="en-US" smtClean="0"/>
               <a:pPr/>
-              <a:t>12/8/2024</a:t>
+              <a:t>12/22/2024</a:t>
             </a:fld>
             <a:endParaRPr lang="en-US"/>
           </a:p>
@@ -2528,7 +2536,7 @@
             <a:fld id="{1D8BD707-D9CF-40AE-B4C6-C98DA3205C09}" type="datetimeFigureOut">
               <a:rPr lang="en-US" smtClean="0"/>
               <a:pPr/>
-              <a:t>12/8/2024</a:t>
+              <a:t>12/22/2024</a:t>
             </a:fld>
             <a:endParaRPr lang="en-US"/>
           </a:p>
@@ -2736,7 +2744,7 @@
             <a:fld id="{1D8BD707-D9CF-40AE-B4C6-C98DA3205C09}" type="datetimeFigureOut">
               <a:rPr lang="en-US" smtClean="0"/>
               <a:pPr/>
-              <a:t>12/8/2024</a:t>
+              <a:t>12/22/2024</a:t>
             </a:fld>
             <a:endParaRPr lang="en-US"/>
           </a:p>
@@ -11781,7 +11789,7 @@
         <p:spPr>
           <a:xfrm>
             <a:off x="206912" y="1785472"/>
-            <a:ext cx="8141284" cy="1088055"/>
+            <a:ext cx="8556088" cy="3397597"/>
           </a:xfrm>
           <a:prstGeom prst="rect">
             <a:avLst/>
@@ -11793,6 +11801,43 @@
           </a:bodyPr>
           <a:lstStyle/>
           <a:p>
+            <a:pPr algn="l">
+              <a:lnSpc>
+                <a:spcPts val="4480"/>
+              </a:lnSpc>
+              <a:spcBef>
+                <a:spcPct val="0"/>
+              </a:spcBef>
+            </a:pPr>
+            <a:r>
+              <a:rPr lang="en-US" altLang="zh-TW" sz="2600" dirty="0">
+                <a:latin typeface="Times New Roman" panose="02020603050405020304" pitchFamily="18" charset="0"/>
+                <a:ea typeface="標楷體" panose="03000509000000000000" pitchFamily="65" charset="-120"/>
+                <a:cs typeface="王漢宗顏楷體"/>
+                <a:sym typeface="王漢宗顏楷體"/>
+              </a:rPr>
+              <a:t>【</a:t>
+            </a:r>
+            <a:r>
+              <a:rPr lang="zh-TW" altLang="en-US" sz="2600" dirty="0">
+                <a:latin typeface="Times New Roman" panose="02020603050405020304" pitchFamily="18" charset="0"/>
+                <a:ea typeface="標楷體" panose="03000509000000000000" pitchFamily="65" charset="-120"/>
+                <a:cs typeface="王漢宗顏楷體"/>
+                <a:sym typeface="王漢宗顏楷體"/>
+              </a:rPr>
+              <a:t>執行環境的生命週期</a:t>
+            </a:r>
+            <a:r>
+              <a:rPr lang="en-US" altLang="zh-TW" sz="2600" dirty="0">
+                <a:latin typeface="Times New Roman" panose="02020603050405020304" pitchFamily="18" charset="0"/>
+                <a:ea typeface="標楷體" panose="03000509000000000000" pitchFamily="65" charset="-120"/>
+                <a:cs typeface="王漢宗顏楷體"/>
+                <a:sym typeface="王漢宗顏楷體"/>
+              </a:rPr>
+              <a:t>】</a:t>
+            </a:r>
+          </a:p>
+          <a:p>
             <a:pPr marL="457200" indent="-457200" algn="l">
               <a:lnSpc>
                 <a:spcPts val="4480"/>
@@ -11810,25 +11855,25 @@
                 <a:cs typeface="王漢宗顏楷體"/>
                 <a:sym typeface="王漢宗顏楷體"/>
               </a:rPr>
-              <a:t>設定超連結顏色：</a:t>
-            </a:r>
-            <a:r>
-              <a:rPr lang="en-US" altLang="zh-TW" sz="2600" dirty="0">
-                <a:latin typeface="Times New Roman" panose="02020603050405020304" pitchFamily="18" charset="0"/>
-                <a:ea typeface="標楷體" panose="03000509000000000000" pitchFamily="65" charset="-120"/>
-                <a:cs typeface="王漢宗顏楷體"/>
-                <a:sym typeface="王漢宗顏楷體"/>
-              </a:rPr>
-              <a:t>link-underline-</a:t>
-            </a:r>
-            <a:r>
-              <a:rPr lang="zh-TW" altLang="en-US" sz="2600" dirty="0">
-                <a:latin typeface="Times New Roman" panose="02020603050405020304" pitchFamily="18" charset="0"/>
-                <a:ea typeface="標楷體" panose="03000509000000000000" pitchFamily="65" charset="-120"/>
-                <a:cs typeface="王漢宗顏楷體"/>
-                <a:sym typeface="王漢宗顏楷體"/>
-              </a:rPr>
-              <a:t>顏色</a:t>
+              <a:t>創造階段 </a:t>
+            </a:r>
+            <a:r>
+              <a:rPr lang="en-US" altLang="zh-TW" sz="2600" dirty="0">
+                <a:latin typeface="Times New Roman" panose="02020603050405020304" pitchFamily="18" charset="0"/>
+                <a:ea typeface="標楷體" panose="03000509000000000000" pitchFamily="65" charset="-120"/>
+                <a:cs typeface="王漢宗顏楷體"/>
+                <a:sym typeface="王漢宗顏楷體"/>
+              </a:rPr>
+              <a:t>(Creation Phase)</a:t>
+            </a:r>
+            <a:r>
+              <a:rPr lang="zh-TW" altLang="en-US" sz="2600" dirty="0">
+                <a:latin typeface="Times New Roman" panose="02020603050405020304" pitchFamily="18" charset="0"/>
+                <a:ea typeface="標楷體" panose="03000509000000000000" pitchFamily="65" charset="-120"/>
+                <a:cs typeface="王漢宗顏楷體"/>
+                <a:sym typeface="王漢宗顏楷體"/>
+              </a:rPr>
+              <a:t>：</a:t>
             </a:r>
             <a:endParaRPr lang="en-US" altLang="zh-TW" sz="2600" dirty="0">
               <a:latin typeface="Times New Roman" panose="02020603050405020304" pitchFamily="18" charset="0"/>
@@ -11838,7 +11883,7 @@
             </a:endParaRPr>
           </a:p>
           <a:p>
-            <a:pPr marL="457200" indent="-457200" algn="l">
+            <a:pPr marL="914400" lvl="1" indent="-457200">
               <a:lnSpc>
                 <a:spcPts val="4480"/>
               </a:lnSpc>
@@ -11855,12 +11900,119 @@
                 <a:cs typeface="王漢宗顏楷體"/>
                 <a:sym typeface="王漢宗顏楷體"/>
               </a:rPr>
-              <a:t>設定超連結透明度</a:t>
+              <a:t>分配記憶體空間給變數和函式。</a:t>
             </a:r>
             <a:endParaRPr lang="en-US" altLang="zh-TW" sz="2600" dirty="0">
               <a:latin typeface="Times New Roman" panose="02020603050405020304" pitchFamily="18" charset="0"/>
               <a:ea typeface="標楷體" panose="03000509000000000000" pitchFamily="65" charset="-120"/>
               <a:cs typeface="王漢宗顏楷體"/>
+              <a:sym typeface="王漢宗顏楷體"/>
+            </a:endParaRPr>
+          </a:p>
+          <a:p>
+            <a:pPr marL="914400" lvl="1" indent="-457200">
+              <a:lnSpc>
+                <a:spcPts val="4480"/>
+              </a:lnSpc>
+              <a:spcBef>
+                <a:spcPct val="0"/>
+              </a:spcBef>
+              <a:buFont typeface="Wingdings" panose="05000000000000000000" pitchFamily="2" charset="2"/>
+              <a:buChar char="v"/>
+            </a:pPr>
+            <a:r>
+              <a:rPr lang="zh-TW" altLang="en-US" sz="2600" dirty="0">
+                <a:latin typeface="Times New Roman" panose="02020603050405020304" pitchFamily="18" charset="0"/>
+                <a:ea typeface="標楷體" panose="03000509000000000000" pitchFamily="65" charset="-120"/>
+                <a:sym typeface="王漢宗顏楷體"/>
+              </a:rPr>
+              <a:t>進行變數提升 </a:t>
+            </a:r>
+            <a:r>
+              <a:rPr lang="en-US" altLang="zh-TW" sz="2600" dirty="0">
+                <a:latin typeface="Times New Roman" panose="02020603050405020304" pitchFamily="18" charset="0"/>
+                <a:ea typeface="標楷體" panose="03000509000000000000" pitchFamily="65" charset="-120"/>
+                <a:sym typeface="王漢宗顏楷體"/>
+              </a:rPr>
+              <a:t>(Hoisting)</a:t>
+            </a:r>
+            <a:r>
+              <a:rPr lang="zh-TW" altLang="en-US" sz="2600" dirty="0">
+                <a:latin typeface="Times New Roman" panose="02020603050405020304" pitchFamily="18" charset="0"/>
+                <a:ea typeface="標楷體" panose="03000509000000000000" pitchFamily="65" charset="-120"/>
+                <a:sym typeface="王漢宗顏楷體"/>
+              </a:rPr>
+              <a:t>。    </a:t>
+            </a:r>
+            <a:endParaRPr lang="en-US" altLang="zh-TW" sz="2600" dirty="0">
+              <a:latin typeface="Times New Roman" panose="02020603050405020304" pitchFamily="18" charset="0"/>
+              <a:ea typeface="標楷體" panose="03000509000000000000" pitchFamily="65" charset="-120"/>
+              <a:sym typeface="王漢宗顏楷體"/>
+            </a:endParaRPr>
+          </a:p>
+          <a:p>
+            <a:pPr marL="914400" lvl="1" indent="-457200">
+              <a:lnSpc>
+                <a:spcPts val="4480"/>
+              </a:lnSpc>
+              <a:spcBef>
+                <a:spcPct val="0"/>
+              </a:spcBef>
+              <a:buFont typeface="Wingdings" panose="05000000000000000000" pitchFamily="2" charset="2"/>
+              <a:buChar char="v"/>
+            </a:pPr>
+            <a:r>
+              <a:rPr lang="zh-TW" altLang="en-US" sz="2600" dirty="0">
+                <a:latin typeface="Times New Roman" panose="02020603050405020304" pitchFamily="18" charset="0"/>
+                <a:ea typeface="標楷體" panose="03000509000000000000" pitchFamily="65" charset="-120"/>
+                <a:sym typeface="王漢宗顏楷體"/>
+              </a:rPr>
+              <a:t>建立執行環境所需的資料結構。    </a:t>
+            </a:r>
+            <a:endParaRPr lang="en-US" altLang="zh-TW" sz="2600" dirty="0">
+              <a:latin typeface="Times New Roman" panose="02020603050405020304" pitchFamily="18" charset="0"/>
+              <a:ea typeface="標楷體" panose="03000509000000000000" pitchFamily="65" charset="-120"/>
+              <a:sym typeface="王漢宗顏楷體"/>
+            </a:endParaRPr>
+          </a:p>
+          <a:p>
+            <a:pPr marL="914400" lvl="1" indent="-457200">
+              <a:lnSpc>
+                <a:spcPts val="4480"/>
+              </a:lnSpc>
+              <a:spcBef>
+                <a:spcPct val="0"/>
+              </a:spcBef>
+              <a:buFont typeface="Wingdings" panose="05000000000000000000" pitchFamily="2" charset="2"/>
+              <a:buChar char="v"/>
+            </a:pPr>
+            <a:r>
+              <a:rPr lang="zh-TW" altLang="en-US" sz="2600" dirty="0">
+                <a:latin typeface="Times New Roman" panose="02020603050405020304" pitchFamily="18" charset="0"/>
+                <a:ea typeface="標楷體" panose="03000509000000000000" pitchFamily="65" charset="-120"/>
+                <a:sym typeface="王漢宗顏楷體"/>
+              </a:rPr>
+              <a:t>將函式放入呼叫堆疊 </a:t>
+            </a:r>
+            <a:r>
+              <a:rPr lang="en-US" altLang="zh-TW" sz="2600" dirty="0">
+                <a:latin typeface="Times New Roman" panose="02020603050405020304" pitchFamily="18" charset="0"/>
+                <a:ea typeface="標楷體" panose="03000509000000000000" pitchFamily="65" charset="-120"/>
+                <a:sym typeface="王漢宗顏楷體"/>
+              </a:rPr>
+              <a:t>(Call Stack)</a:t>
+            </a:r>
+            <a:r>
+              <a:rPr lang="zh-TW" altLang="en-US" sz="2600" dirty="0">
+                <a:latin typeface="Times New Roman" panose="02020603050405020304" pitchFamily="18" charset="0"/>
+                <a:ea typeface="標楷體" panose="03000509000000000000" pitchFamily="65" charset="-120"/>
+                <a:sym typeface="王漢宗顏楷體"/>
+              </a:rPr>
+              <a:t>，等待執行。</a:t>
+            </a:r>
+            <a:endParaRPr lang="en-US" altLang="zh-TW" sz="2600" dirty="0">
+              <a:latin typeface="Times New Roman" panose="02020603050405020304" pitchFamily="18" charset="0"/>
+              <a:ea typeface="標楷體" panose="03000509000000000000" pitchFamily="65" charset="-120"/>
               <a:sym typeface="王漢宗顏楷體"/>
             </a:endParaRPr>
           </a:p>
@@ -12033,7 +12185,7 @@
               </a:spcBef>
             </a:pPr>
             <a:r>
-              <a:rPr lang="zh-TW" altLang="en-US" sz="8000" dirty="0">
+              <a:rPr lang="en-US" altLang="zh-TW" sz="8000" dirty="0">
                 <a:solidFill>
                   <a:srgbClr val="FFFFFF"/>
                 </a:solidFill>
@@ -12042,26 +12194,17 @@
                 <a:cs typeface="Times New Roman" panose="02020603050405020304" pitchFamily="18" charset="0"/>
                 <a:sym typeface="王漢宗顏楷體"/>
               </a:rPr>
-              <a:t>超連結</a:t>
-            </a:r>
-            <a:endParaRPr lang="en-US" altLang="zh-TW" sz="8000" dirty="0">
-              <a:solidFill>
-                <a:srgbClr val="FFFFFF"/>
-              </a:solidFill>
-              <a:latin typeface="Times New Roman" panose="02020603050405020304" pitchFamily="18" charset="0"/>
-              <a:ea typeface="標楷體" panose="03000509000000000000" pitchFamily="65" charset="-120"/>
-              <a:cs typeface="Times New Roman" panose="02020603050405020304" pitchFamily="18" charset="0"/>
-              <a:sym typeface="王漢宗顏楷體"/>
-            </a:endParaRPr>
+              <a:t>this</a:t>
+            </a:r>
           </a:p>
         </p:txBody>
       </p:sp>
       <p:sp>
         <p:nvSpPr>
-          <p:cNvPr id="7" name="文字方塊 6">
+          <p:cNvPr id="7" name="TextBox 10">
             <a:extLst>
               <a:ext uri="{FF2B5EF4-FFF2-40B4-BE49-F238E27FC236}">
-                <a16:creationId xmlns:a16="http://schemas.microsoft.com/office/drawing/2014/main" id="{F9B82ED9-4011-42B0-BD0E-2DBD1823CC7E}"/>
+                <a16:creationId xmlns:a16="http://schemas.microsoft.com/office/drawing/2014/main" id="{90885712-2702-43ED-B19E-20B7EC6D2B99}"/>
               </a:ext>
             </a:extLst>
           </p:cNvPr>
@@ -12070,875 +12213,194 @@
         </p:nvSpPr>
         <p:spPr>
           <a:xfrm>
-            <a:off x="16708957" y="9685054"/>
-            <a:ext cx="1277873" cy="400110"/>
+            <a:off x="181512" y="4698961"/>
+            <a:ext cx="8556088" cy="3397597"/>
           </a:xfrm>
           <a:prstGeom prst="rect">
             <a:avLst/>
           </a:prstGeom>
-          <a:noFill/>
         </p:spPr>
         <p:txBody>
-          <a:bodyPr wrap="square">
+          <a:bodyPr wrap="square" lIns="0" tIns="0" rIns="0" bIns="0" rtlCol="0" anchor="t">
             <a:spAutoFit/>
           </a:bodyPr>
           <a:lstStyle/>
           <a:p>
-            <a:r>
-              <a:rPr lang="en-US" altLang="zh-TW" sz="2000" dirty="0">
-                <a:latin typeface="Times New Roman" panose="02020603050405020304" pitchFamily="18" charset="0"/>
-                <a:ea typeface="標楷體" panose="03000509000000000000" pitchFamily="65" charset="-120"/>
-              </a:rPr>
-              <a:t>(</a:t>
-            </a:r>
-            <a:r>
-              <a:rPr lang="en-US" altLang="zh-TW" sz="2000" dirty="0">
-                <a:latin typeface="Times New Roman" panose="02020603050405020304" pitchFamily="18" charset="0"/>
-                <a:ea typeface="標楷體" panose="03000509000000000000" pitchFamily="65" charset="-120"/>
-                <a:cs typeface="王漢宗顏楷體"/>
-                <a:sym typeface="王漢宗顏楷體"/>
-              </a:rPr>
-              <a:t>Currying</a:t>
-            </a:r>
-            <a:r>
-              <a:rPr lang="en-US" altLang="zh-TW" sz="2000" dirty="0">
-                <a:latin typeface="Times New Roman" panose="02020603050405020304" pitchFamily="18" charset="0"/>
-                <a:ea typeface="標楷體" panose="03000509000000000000" pitchFamily="65" charset="-120"/>
-              </a:rPr>
-              <a:t>)</a:t>
-            </a:r>
-          </a:p>
-        </p:txBody>
-      </p:sp>
-      <p:sp>
-        <p:nvSpPr>
-          <p:cNvPr id="8" name="矩形 7">
-            <a:extLst>
-              <a:ext uri="{FF2B5EF4-FFF2-40B4-BE49-F238E27FC236}">
-                <a16:creationId xmlns:a16="http://schemas.microsoft.com/office/drawing/2014/main" id="{6F39B56E-64D4-4C56-A146-116CC87F9DBE}"/>
-              </a:ext>
-            </a:extLst>
-          </p:cNvPr>
-          <p:cNvSpPr/>
-          <p:nvPr/>
-        </p:nvSpPr>
-        <p:spPr>
-          <a:xfrm flipV="1">
-            <a:off x="8242300" y="5853917"/>
-            <a:ext cx="2209800" cy="1243445"/>
-          </a:xfrm>
-          <a:prstGeom prst="rect">
-            <a:avLst/>
-          </a:prstGeom>
-          <a:solidFill>
-            <a:srgbClr val="FFD580"/>
-          </a:solidFill>
-          <a:ln/>
-          <a:effectLst>
-            <a:outerShdw blurRad="50800" dist="38100" dir="2700000" algn="tl" rotWithShape="0">
-              <a:prstClr val="black">
-                <a:alpha val="40000"/>
-              </a:prstClr>
-            </a:outerShdw>
-          </a:effectLst>
-        </p:spPr>
-        <p:style>
-          <a:lnRef idx="1">
-            <a:schemeClr val="accent5"/>
-          </a:lnRef>
-          <a:fillRef idx="2">
-            <a:schemeClr val="accent5"/>
-          </a:fillRef>
-          <a:effectRef idx="1">
-            <a:schemeClr val="accent5"/>
-          </a:effectRef>
-          <a:fontRef idx="minor">
-            <a:schemeClr val="dk1"/>
-          </a:fontRef>
-        </p:style>
-        <p:txBody>
-          <a:bodyPr rtlCol="0" anchor="ctr"/>
-          <a:lstStyle/>
-          <a:p>
-            <a:pPr algn="ctr"/>
-            <a:endParaRPr lang="zh-TW" altLang="en-US"/>
-          </a:p>
-        </p:txBody>
-      </p:sp>
-      <p:sp>
-        <p:nvSpPr>
-          <p:cNvPr id="9" name="矩形 8">
-            <a:extLst>
-              <a:ext uri="{FF2B5EF4-FFF2-40B4-BE49-F238E27FC236}">
-                <a16:creationId xmlns:a16="http://schemas.microsoft.com/office/drawing/2014/main" id="{272304FC-8E8D-4A20-A14E-F3C98FE1FA75}"/>
-              </a:ext>
-            </a:extLst>
-          </p:cNvPr>
-          <p:cNvSpPr/>
-          <p:nvPr/>
-        </p:nvSpPr>
-        <p:spPr>
-          <a:xfrm flipV="1">
-            <a:off x="5001738" y="8828105"/>
-            <a:ext cx="2209800" cy="1243445"/>
-          </a:xfrm>
-          <a:prstGeom prst="rect">
-            <a:avLst/>
-          </a:prstGeom>
-          <a:solidFill>
-            <a:srgbClr val="ADD9ED"/>
-          </a:solidFill>
-          <a:ln/>
-          <a:effectLst>
-            <a:outerShdw blurRad="50800" dist="38100" dir="2700000" algn="tl" rotWithShape="0">
-              <a:prstClr val="black">
-                <a:alpha val="40000"/>
-              </a:prstClr>
-            </a:outerShdw>
-          </a:effectLst>
-        </p:spPr>
-        <p:style>
-          <a:lnRef idx="1">
-            <a:schemeClr val="accent5"/>
-          </a:lnRef>
-          <a:fillRef idx="2">
-            <a:schemeClr val="accent5"/>
-          </a:fillRef>
-          <a:effectRef idx="1">
-            <a:schemeClr val="accent5"/>
-          </a:effectRef>
-          <a:fontRef idx="minor">
-            <a:schemeClr val="dk1"/>
-          </a:fontRef>
-        </p:style>
-        <p:txBody>
-          <a:bodyPr rtlCol="0" anchor="ctr"/>
-          <a:lstStyle/>
-          <a:p>
-            <a:pPr algn="ctr"/>
-            <a:endParaRPr lang="zh-TW" altLang="en-US"/>
-          </a:p>
-        </p:txBody>
-      </p:sp>
-      <p:sp>
-        <p:nvSpPr>
-          <p:cNvPr id="10" name="矩形 9">
-            <a:extLst>
-              <a:ext uri="{FF2B5EF4-FFF2-40B4-BE49-F238E27FC236}">
-                <a16:creationId xmlns:a16="http://schemas.microsoft.com/office/drawing/2014/main" id="{F38F827C-6AA4-433A-9947-AC0B2582CDD1}"/>
-              </a:ext>
-            </a:extLst>
-          </p:cNvPr>
-          <p:cNvSpPr/>
-          <p:nvPr/>
-        </p:nvSpPr>
-        <p:spPr>
-          <a:xfrm flipV="1">
-            <a:off x="4859153" y="5646041"/>
-            <a:ext cx="2209800" cy="1243445"/>
-          </a:xfrm>
-          <a:prstGeom prst="rect">
-            <a:avLst/>
-          </a:prstGeom>
-          <a:solidFill>
-            <a:srgbClr val="FCDFC0"/>
-          </a:solidFill>
-          <a:ln/>
-          <a:effectLst>
-            <a:outerShdw blurRad="50800" dist="38100" dir="2700000" algn="tl" rotWithShape="0">
-              <a:prstClr val="black">
-                <a:alpha val="40000"/>
-              </a:prstClr>
-            </a:outerShdw>
-          </a:effectLst>
-        </p:spPr>
-        <p:style>
-          <a:lnRef idx="1">
-            <a:schemeClr val="accent5"/>
-          </a:lnRef>
-          <a:fillRef idx="2">
-            <a:schemeClr val="accent5"/>
-          </a:fillRef>
-          <a:effectRef idx="1">
-            <a:schemeClr val="accent5"/>
-          </a:effectRef>
-          <a:fontRef idx="minor">
-            <a:schemeClr val="dk1"/>
-          </a:fontRef>
-        </p:style>
-        <p:txBody>
-          <a:bodyPr rtlCol="0" anchor="ctr"/>
-          <a:lstStyle/>
-          <a:p>
-            <a:pPr algn="ctr"/>
-            <a:endParaRPr lang="zh-TW" altLang="en-US"/>
-          </a:p>
-        </p:txBody>
-      </p:sp>
-      <p:sp>
-        <p:nvSpPr>
-          <p:cNvPr id="11" name="矩形 10">
-            <a:extLst>
-              <a:ext uri="{FF2B5EF4-FFF2-40B4-BE49-F238E27FC236}">
-                <a16:creationId xmlns:a16="http://schemas.microsoft.com/office/drawing/2014/main" id="{564319A8-99E4-4497-98F6-258B9E7315A0}"/>
-              </a:ext>
-            </a:extLst>
-          </p:cNvPr>
-          <p:cNvSpPr/>
-          <p:nvPr/>
-        </p:nvSpPr>
-        <p:spPr>
-          <a:xfrm flipV="1">
-            <a:off x="1195779" y="8927117"/>
-            <a:ext cx="2209800" cy="1243445"/>
-          </a:xfrm>
-          <a:prstGeom prst="rect">
-            <a:avLst/>
-          </a:prstGeom>
-          <a:solidFill>
-            <a:srgbClr val="B1D5F7"/>
-          </a:solidFill>
-          <a:ln/>
-          <a:effectLst>
-            <a:outerShdw blurRad="50800" dist="38100" dir="2700000" algn="tl" rotWithShape="0">
-              <a:prstClr val="black">
-                <a:alpha val="40000"/>
-              </a:prstClr>
-            </a:outerShdw>
-          </a:effectLst>
-        </p:spPr>
-        <p:style>
-          <a:lnRef idx="1">
-            <a:schemeClr val="accent5"/>
-          </a:lnRef>
-          <a:fillRef idx="2">
-            <a:schemeClr val="accent5"/>
-          </a:fillRef>
-          <a:effectRef idx="1">
-            <a:schemeClr val="accent5"/>
-          </a:effectRef>
-          <a:fontRef idx="minor">
-            <a:schemeClr val="dk1"/>
-          </a:fontRef>
-        </p:style>
-        <p:txBody>
-          <a:bodyPr rtlCol="0" anchor="ctr"/>
-          <a:lstStyle/>
-          <a:p>
-            <a:pPr algn="ctr"/>
-            <a:endParaRPr lang="zh-TW" altLang="en-US"/>
-          </a:p>
-        </p:txBody>
-      </p:sp>
-      <p:sp>
-        <p:nvSpPr>
-          <p:cNvPr id="12" name="矩形 11">
-            <a:extLst>
-              <a:ext uri="{FF2B5EF4-FFF2-40B4-BE49-F238E27FC236}">
-                <a16:creationId xmlns:a16="http://schemas.microsoft.com/office/drawing/2014/main" id="{0CCCE3EA-4A7F-4F53-8DC9-C9EEBE3B072F}"/>
-              </a:ext>
-            </a:extLst>
-          </p:cNvPr>
-          <p:cNvSpPr/>
-          <p:nvPr/>
-        </p:nvSpPr>
-        <p:spPr>
-          <a:xfrm flipV="1">
-            <a:off x="8610600" y="8932560"/>
-            <a:ext cx="2209800" cy="1243445"/>
-          </a:xfrm>
-          <a:prstGeom prst="rect">
-            <a:avLst/>
-          </a:prstGeom>
-          <a:solidFill>
-            <a:srgbClr val="64A9F6"/>
-          </a:solidFill>
-          <a:ln/>
-          <a:effectLst>
-            <a:outerShdw blurRad="50800" dist="38100" dir="2700000" algn="tl" rotWithShape="0">
-              <a:prstClr val="black">
-                <a:alpha val="40000"/>
-              </a:prstClr>
-            </a:outerShdw>
-          </a:effectLst>
-        </p:spPr>
-        <p:style>
-          <a:lnRef idx="1">
-            <a:schemeClr val="accent5"/>
-          </a:lnRef>
-          <a:fillRef idx="2">
-            <a:schemeClr val="accent5"/>
-          </a:fillRef>
-          <a:effectRef idx="1">
-            <a:schemeClr val="accent5"/>
-          </a:effectRef>
-          <a:fontRef idx="minor">
-            <a:schemeClr val="dk1"/>
-          </a:fontRef>
-        </p:style>
-        <p:txBody>
-          <a:bodyPr rtlCol="0" anchor="ctr"/>
-          <a:lstStyle/>
-          <a:p>
-            <a:pPr algn="ctr"/>
-            <a:endParaRPr lang="zh-TW" altLang="en-US"/>
-          </a:p>
-        </p:txBody>
-      </p:sp>
-      <p:sp>
-        <p:nvSpPr>
-          <p:cNvPr id="13" name="矩形 12">
-            <a:extLst>
-              <a:ext uri="{FF2B5EF4-FFF2-40B4-BE49-F238E27FC236}">
-                <a16:creationId xmlns:a16="http://schemas.microsoft.com/office/drawing/2014/main" id="{298074B3-6956-4A34-A791-EC3C848B18A2}"/>
-              </a:ext>
-            </a:extLst>
-          </p:cNvPr>
-          <p:cNvSpPr/>
-          <p:nvPr/>
-        </p:nvSpPr>
-        <p:spPr>
-          <a:xfrm flipV="1">
-            <a:off x="1371600" y="4170177"/>
-            <a:ext cx="2209800" cy="1243445"/>
-          </a:xfrm>
-          <a:prstGeom prst="rect">
-            <a:avLst/>
-          </a:prstGeom>
-          <a:solidFill>
-            <a:srgbClr val="FCEADB"/>
-          </a:solidFill>
-          <a:ln/>
-          <a:effectLst>
-            <a:outerShdw blurRad="50800" dist="38100" dir="2700000" algn="tl" rotWithShape="0">
-              <a:prstClr val="black">
-                <a:alpha val="40000"/>
-              </a:prstClr>
-            </a:outerShdw>
-          </a:effectLst>
-        </p:spPr>
-        <p:style>
-          <a:lnRef idx="1">
-            <a:schemeClr val="accent5"/>
-          </a:lnRef>
-          <a:fillRef idx="2">
-            <a:schemeClr val="accent5"/>
-          </a:fillRef>
-          <a:effectRef idx="1">
-            <a:schemeClr val="accent5"/>
-          </a:effectRef>
-          <a:fontRef idx="minor">
-            <a:schemeClr val="dk1"/>
-          </a:fontRef>
-        </p:style>
-        <p:txBody>
-          <a:bodyPr rtlCol="0" anchor="ctr"/>
-          <a:lstStyle/>
-          <a:p>
-            <a:pPr algn="ctr"/>
-            <a:endParaRPr lang="zh-TW" altLang="en-US"/>
-          </a:p>
-        </p:txBody>
-      </p:sp>
-      <p:sp>
-        <p:nvSpPr>
-          <p:cNvPr id="14" name="矩形 13">
-            <a:extLst>
-              <a:ext uri="{FF2B5EF4-FFF2-40B4-BE49-F238E27FC236}">
-                <a16:creationId xmlns:a16="http://schemas.microsoft.com/office/drawing/2014/main" id="{1478961F-99FF-40F8-88DE-D3B4D60C22DE}"/>
-              </a:ext>
-            </a:extLst>
-          </p:cNvPr>
-          <p:cNvSpPr/>
-          <p:nvPr/>
-        </p:nvSpPr>
-        <p:spPr>
-          <a:xfrm flipV="1">
-            <a:off x="1409700" y="7266294"/>
-            <a:ext cx="2209800" cy="1243445"/>
-          </a:xfrm>
-          <a:prstGeom prst="rect">
-            <a:avLst/>
-          </a:prstGeom>
-          <a:solidFill>
-            <a:srgbClr val="E2F0D7"/>
-          </a:solidFill>
-          <a:ln/>
-          <a:effectLst>
-            <a:outerShdw blurRad="50800" dist="38100" dir="2700000" algn="tl" rotWithShape="0">
-              <a:prstClr val="black">
-                <a:alpha val="40000"/>
-              </a:prstClr>
-            </a:outerShdw>
-          </a:effectLst>
-        </p:spPr>
-        <p:style>
-          <a:lnRef idx="1">
-            <a:schemeClr val="accent5"/>
-          </a:lnRef>
-          <a:fillRef idx="2">
-            <a:schemeClr val="accent5"/>
-          </a:fillRef>
-          <a:effectRef idx="1">
-            <a:schemeClr val="accent5"/>
-          </a:effectRef>
-          <a:fontRef idx="minor">
-            <a:schemeClr val="dk1"/>
-          </a:fontRef>
-        </p:style>
-        <p:txBody>
-          <a:bodyPr rtlCol="0" anchor="ctr"/>
-          <a:lstStyle/>
-          <a:p>
-            <a:pPr algn="ctr"/>
-            <a:endParaRPr lang="zh-TW" altLang="en-US"/>
-          </a:p>
-        </p:txBody>
-      </p:sp>
-      <p:sp>
-        <p:nvSpPr>
-          <p:cNvPr id="15" name="矩形 14">
-            <a:extLst>
-              <a:ext uri="{FF2B5EF4-FFF2-40B4-BE49-F238E27FC236}">
-                <a16:creationId xmlns:a16="http://schemas.microsoft.com/office/drawing/2014/main" id="{4BC0AF2B-BD8F-4E73-815F-B89D1182CEC0}"/>
-              </a:ext>
-            </a:extLst>
-          </p:cNvPr>
-          <p:cNvSpPr/>
-          <p:nvPr/>
-        </p:nvSpPr>
-        <p:spPr>
-          <a:xfrm flipV="1">
-            <a:off x="8267700" y="7363905"/>
-            <a:ext cx="2209800" cy="1243445"/>
-          </a:xfrm>
-          <a:prstGeom prst="rect">
-            <a:avLst/>
-          </a:prstGeom>
-          <a:solidFill>
-            <a:srgbClr val="93D352"/>
-          </a:solidFill>
-          <a:ln/>
-          <a:effectLst>
-            <a:outerShdw blurRad="50800" dist="38100" dir="2700000" algn="tl" rotWithShape="0">
-              <a:prstClr val="black">
-                <a:alpha val="40000"/>
-              </a:prstClr>
-            </a:outerShdw>
-          </a:effectLst>
-        </p:spPr>
-        <p:style>
-          <a:lnRef idx="1">
-            <a:schemeClr val="accent5"/>
-          </a:lnRef>
-          <a:fillRef idx="2">
-            <a:schemeClr val="accent5"/>
-          </a:fillRef>
-          <a:effectRef idx="1">
-            <a:schemeClr val="accent5"/>
-          </a:effectRef>
-          <a:fontRef idx="minor">
-            <a:schemeClr val="dk1"/>
-          </a:fontRef>
-        </p:style>
-        <p:txBody>
-          <a:bodyPr rtlCol="0" anchor="ctr"/>
-          <a:lstStyle/>
-          <a:p>
-            <a:pPr algn="ctr"/>
-            <a:endParaRPr lang="zh-TW" altLang="en-US"/>
-          </a:p>
-        </p:txBody>
-      </p:sp>
-      <p:sp>
-        <p:nvSpPr>
-          <p:cNvPr id="16" name="矩形 15">
-            <a:extLst>
-              <a:ext uri="{FF2B5EF4-FFF2-40B4-BE49-F238E27FC236}">
-                <a16:creationId xmlns:a16="http://schemas.microsoft.com/office/drawing/2014/main" id="{7A0F2592-5E01-44CE-99C5-9F1C11110CEC}"/>
-              </a:ext>
-            </a:extLst>
-          </p:cNvPr>
-          <p:cNvSpPr/>
-          <p:nvPr/>
-        </p:nvSpPr>
-        <p:spPr>
-          <a:xfrm flipV="1">
-            <a:off x="4969741" y="7145672"/>
-            <a:ext cx="2209800" cy="1243445"/>
-          </a:xfrm>
-          <a:prstGeom prst="rect">
-            <a:avLst/>
-          </a:prstGeom>
-          <a:solidFill>
-            <a:srgbClr val="A2D3B0"/>
-          </a:solidFill>
-          <a:ln/>
-          <a:effectLst>
-            <a:outerShdw blurRad="50800" dist="38100" dir="2700000" algn="tl" rotWithShape="0">
-              <a:prstClr val="black">
-                <a:alpha val="40000"/>
-              </a:prstClr>
-            </a:outerShdw>
-          </a:effectLst>
-        </p:spPr>
-        <p:style>
-          <a:lnRef idx="1">
-            <a:schemeClr val="accent5"/>
-          </a:lnRef>
-          <a:fillRef idx="2">
-            <a:schemeClr val="accent5"/>
-          </a:fillRef>
-          <a:effectRef idx="1">
-            <a:schemeClr val="accent5"/>
-          </a:effectRef>
-          <a:fontRef idx="minor">
-            <a:schemeClr val="dk1"/>
-          </a:fontRef>
-        </p:style>
-        <p:txBody>
-          <a:bodyPr rtlCol="0" anchor="ctr"/>
-          <a:lstStyle/>
-          <a:p>
-            <a:pPr algn="ctr"/>
-            <a:endParaRPr lang="zh-TW" altLang="en-US"/>
-          </a:p>
-        </p:txBody>
-      </p:sp>
-      <p:sp>
-        <p:nvSpPr>
-          <p:cNvPr id="17" name="矩形 16">
-            <a:extLst>
-              <a:ext uri="{FF2B5EF4-FFF2-40B4-BE49-F238E27FC236}">
-                <a16:creationId xmlns:a16="http://schemas.microsoft.com/office/drawing/2014/main" id="{03F8089B-EF5E-41D6-ACDD-7715DA8C7FB3}"/>
-              </a:ext>
-            </a:extLst>
-          </p:cNvPr>
-          <p:cNvSpPr/>
-          <p:nvPr/>
-        </p:nvSpPr>
-        <p:spPr>
-          <a:xfrm flipV="1">
-            <a:off x="10447565" y="4159082"/>
-            <a:ext cx="2209800" cy="1243445"/>
-          </a:xfrm>
-          <a:prstGeom prst="rect">
-            <a:avLst/>
-          </a:prstGeom>
-          <a:solidFill>
-            <a:srgbClr val="FCC4FB"/>
-          </a:solidFill>
-          <a:ln/>
-          <a:effectLst>
-            <a:outerShdw blurRad="50800" dist="38100" dir="2700000" algn="tl" rotWithShape="0">
-              <a:prstClr val="black">
-                <a:alpha val="40000"/>
-              </a:prstClr>
-            </a:outerShdw>
-          </a:effectLst>
-        </p:spPr>
-        <p:style>
-          <a:lnRef idx="1">
-            <a:schemeClr val="accent5"/>
-          </a:lnRef>
-          <a:fillRef idx="2">
-            <a:schemeClr val="accent5"/>
-          </a:fillRef>
-          <a:effectRef idx="1">
-            <a:schemeClr val="accent5"/>
-          </a:effectRef>
-          <a:fontRef idx="minor">
-            <a:schemeClr val="dk1"/>
-          </a:fontRef>
-        </p:style>
-        <p:txBody>
-          <a:bodyPr rtlCol="0" anchor="ctr"/>
-          <a:lstStyle/>
-          <a:p>
-            <a:pPr algn="ctr"/>
-            <a:endParaRPr lang="zh-TW" altLang="en-US"/>
-          </a:p>
-        </p:txBody>
-      </p:sp>
-      <p:sp>
-        <p:nvSpPr>
-          <p:cNvPr id="18" name="矩形 17">
-            <a:extLst>
-              <a:ext uri="{FF2B5EF4-FFF2-40B4-BE49-F238E27FC236}">
-                <a16:creationId xmlns:a16="http://schemas.microsoft.com/office/drawing/2014/main" id="{742C962F-3A88-47FC-ADB5-4513064CDFF1}"/>
-              </a:ext>
-            </a:extLst>
-          </p:cNvPr>
-          <p:cNvSpPr/>
-          <p:nvPr/>
-        </p:nvSpPr>
-        <p:spPr>
-          <a:xfrm flipV="1">
-            <a:off x="10972800" y="7315722"/>
-            <a:ext cx="2209800" cy="1243445"/>
-          </a:xfrm>
-          <a:prstGeom prst="rect">
-            <a:avLst/>
-          </a:prstGeom>
-          <a:solidFill>
-            <a:srgbClr val="9F9DC8"/>
-          </a:solidFill>
-          <a:ln/>
-          <a:effectLst>
-            <a:outerShdw blurRad="50800" dist="38100" dir="2700000" algn="tl" rotWithShape="0">
-              <a:prstClr val="black">
-                <a:alpha val="40000"/>
-              </a:prstClr>
-            </a:outerShdw>
-          </a:effectLst>
-        </p:spPr>
-        <p:style>
-          <a:lnRef idx="1">
-            <a:schemeClr val="accent5"/>
-          </a:lnRef>
-          <a:fillRef idx="2">
-            <a:schemeClr val="accent5"/>
-          </a:fillRef>
-          <a:effectRef idx="1">
-            <a:schemeClr val="accent5"/>
-          </a:effectRef>
-          <a:fontRef idx="minor">
-            <a:schemeClr val="dk1"/>
-          </a:fontRef>
-        </p:style>
-        <p:txBody>
-          <a:bodyPr rtlCol="0" anchor="ctr"/>
-          <a:lstStyle/>
-          <a:p>
-            <a:pPr algn="ctr"/>
-            <a:endParaRPr lang="zh-TW" altLang="en-US"/>
-          </a:p>
-        </p:txBody>
-      </p:sp>
-      <p:sp>
-        <p:nvSpPr>
-          <p:cNvPr id="19" name="矩形 18">
-            <a:extLst>
-              <a:ext uri="{FF2B5EF4-FFF2-40B4-BE49-F238E27FC236}">
-                <a16:creationId xmlns:a16="http://schemas.microsoft.com/office/drawing/2014/main" id="{725AAB06-95DC-4413-9437-41F081897704}"/>
-              </a:ext>
-            </a:extLst>
-          </p:cNvPr>
-          <p:cNvSpPr/>
-          <p:nvPr/>
-        </p:nvSpPr>
-        <p:spPr>
-          <a:xfrm flipV="1">
-            <a:off x="10668000" y="5729631"/>
-            <a:ext cx="2209800" cy="1243445"/>
-          </a:xfrm>
-          <a:prstGeom prst="rect">
-            <a:avLst/>
-          </a:prstGeom>
-          <a:solidFill>
-            <a:srgbClr val="C9C1E1"/>
-          </a:solidFill>
-          <a:ln/>
-          <a:effectLst>
-            <a:outerShdw blurRad="50800" dist="38100" dir="2700000" algn="tl" rotWithShape="0">
-              <a:prstClr val="black">
-                <a:alpha val="40000"/>
-              </a:prstClr>
-            </a:outerShdw>
-          </a:effectLst>
-        </p:spPr>
-        <p:style>
-          <a:lnRef idx="1">
-            <a:schemeClr val="accent5"/>
-          </a:lnRef>
-          <a:fillRef idx="2">
-            <a:schemeClr val="accent5"/>
-          </a:fillRef>
-          <a:effectRef idx="1">
-            <a:schemeClr val="accent5"/>
-          </a:effectRef>
-          <a:fontRef idx="minor">
-            <a:schemeClr val="dk1"/>
-          </a:fontRef>
-        </p:style>
-        <p:txBody>
-          <a:bodyPr rtlCol="0" anchor="ctr"/>
-          <a:lstStyle/>
-          <a:p>
-            <a:pPr algn="ctr"/>
-            <a:endParaRPr lang="zh-TW" altLang="en-US"/>
-          </a:p>
-        </p:txBody>
-      </p:sp>
-      <p:sp>
-        <p:nvSpPr>
-          <p:cNvPr id="20" name="矩形 19">
-            <a:extLst>
-              <a:ext uri="{FF2B5EF4-FFF2-40B4-BE49-F238E27FC236}">
-                <a16:creationId xmlns:a16="http://schemas.microsoft.com/office/drawing/2014/main" id="{62C35985-74F9-4B47-974B-4C4EE7FCD837}"/>
-              </a:ext>
-            </a:extLst>
-          </p:cNvPr>
-          <p:cNvSpPr/>
-          <p:nvPr/>
-        </p:nvSpPr>
-        <p:spPr>
-          <a:xfrm flipV="1">
-            <a:off x="4468091" y="4170177"/>
-            <a:ext cx="2209800" cy="1243445"/>
-          </a:xfrm>
-          <a:prstGeom prst="rect">
-            <a:avLst/>
-          </a:prstGeom>
-          <a:solidFill>
-            <a:srgbClr val="FFD5C4"/>
-          </a:solidFill>
-          <a:ln/>
-          <a:effectLst>
-            <a:outerShdw blurRad="50800" dist="38100" dir="2700000" algn="tl" rotWithShape="0">
-              <a:prstClr val="black">
-                <a:alpha val="40000"/>
-              </a:prstClr>
-            </a:outerShdw>
-          </a:effectLst>
-        </p:spPr>
-        <p:style>
-          <a:lnRef idx="1">
-            <a:schemeClr val="accent5"/>
-          </a:lnRef>
-          <a:fillRef idx="2">
-            <a:schemeClr val="accent5"/>
-          </a:fillRef>
-          <a:effectRef idx="1">
-            <a:schemeClr val="accent5"/>
-          </a:effectRef>
-          <a:fontRef idx="minor">
-            <a:schemeClr val="dk1"/>
-          </a:fontRef>
-        </p:style>
-        <p:txBody>
-          <a:bodyPr rtlCol="0" anchor="ctr"/>
-          <a:lstStyle/>
-          <a:p>
-            <a:pPr algn="ctr"/>
-            <a:endParaRPr lang="zh-TW" altLang="en-US"/>
-          </a:p>
-        </p:txBody>
-      </p:sp>
-      <p:sp>
-        <p:nvSpPr>
-          <p:cNvPr id="21" name="矩形 20">
-            <a:extLst>
-              <a:ext uri="{FF2B5EF4-FFF2-40B4-BE49-F238E27FC236}">
-                <a16:creationId xmlns:a16="http://schemas.microsoft.com/office/drawing/2014/main" id="{FE9FB946-046A-4381-BC63-90EC96C663CD}"/>
-              </a:ext>
-            </a:extLst>
-          </p:cNvPr>
-          <p:cNvSpPr/>
-          <p:nvPr/>
-        </p:nvSpPr>
-        <p:spPr>
-          <a:xfrm flipV="1">
-            <a:off x="1640939" y="5646041"/>
-            <a:ext cx="2209800" cy="1243445"/>
-          </a:xfrm>
-          <a:prstGeom prst="rect">
-            <a:avLst/>
-          </a:prstGeom>
-          <a:solidFill>
-            <a:srgbClr val="FBECA2"/>
-          </a:solidFill>
-          <a:ln/>
-          <a:effectLst>
-            <a:outerShdw blurRad="50800" dist="38100" dir="2700000" algn="tl" rotWithShape="0">
-              <a:prstClr val="black">
-                <a:alpha val="40000"/>
-              </a:prstClr>
-            </a:outerShdw>
-          </a:effectLst>
-        </p:spPr>
-        <p:style>
-          <a:lnRef idx="1">
-            <a:schemeClr val="accent5"/>
-          </a:lnRef>
-          <a:fillRef idx="2">
-            <a:schemeClr val="accent5"/>
-          </a:fillRef>
-          <a:effectRef idx="1">
-            <a:schemeClr val="accent5"/>
-          </a:effectRef>
-          <a:fontRef idx="minor">
-            <a:schemeClr val="dk1"/>
-          </a:fontRef>
-        </p:style>
-        <p:txBody>
-          <a:bodyPr rtlCol="0" anchor="ctr"/>
-          <a:lstStyle/>
-          <a:p>
-            <a:pPr algn="ctr"/>
-            <a:endParaRPr lang="zh-TW" altLang="en-US"/>
-          </a:p>
-        </p:txBody>
-      </p:sp>
-      <p:sp>
-        <p:nvSpPr>
-          <p:cNvPr id="22" name="矩形 21">
-            <a:extLst>
-              <a:ext uri="{FF2B5EF4-FFF2-40B4-BE49-F238E27FC236}">
-                <a16:creationId xmlns:a16="http://schemas.microsoft.com/office/drawing/2014/main" id="{B529FE49-E154-4D96-BE00-2600026CDA6E}"/>
-              </a:ext>
-            </a:extLst>
-          </p:cNvPr>
-          <p:cNvSpPr/>
-          <p:nvPr/>
-        </p:nvSpPr>
-        <p:spPr>
-          <a:xfrm flipV="1">
-            <a:off x="7966363" y="4099839"/>
-            <a:ext cx="2209800" cy="1243445"/>
-          </a:xfrm>
-          <a:prstGeom prst="rect">
-            <a:avLst/>
-          </a:prstGeom>
-          <a:solidFill>
-            <a:srgbClr val="F6C0CE"/>
-          </a:solidFill>
-          <a:ln/>
-          <a:effectLst>
-            <a:outerShdw blurRad="50800" dist="38100" dir="2700000" algn="tl" rotWithShape="0">
-              <a:prstClr val="black">
-                <a:alpha val="40000"/>
-              </a:prstClr>
-            </a:outerShdw>
-          </a:effectLst>
-        </p:spPr>
-        <p:style>
-          <a:lnRef idx="1">
-            <a:schemeClr val="accent5"/>
-          </a:lnRef>
-          <a:fillRef idx="2">
-            <a:schemeClr val="accent5"/>
-          </a:fillRef>
-          <a:effectRef idx="1">
-            <a:schemeClr val="accent5"/>
-          </a:effectRef>
-          <a:fontRef idx="minor">
-            <a:schemeClr val="dk1"/>
-          </a:fontRef>
-        </p:style>
-        <p:txBody>
-          <a:bodyPr rtlCol="0" anchor="ctr"/>
-          <a:lstStyle/>
-          <a:p>
-            <a:pPr algn="ctr"/>
-            <a:endParaRPr lang="zh-TW" altLang="en-US"/>
+            <a:pPr algn="l">
+              <a:lnSpc>
+                <a:spcPts val="4480"/>
+              </a:lnSpc>
+              <a:spcBef>
+                <a:spcPct val="0"/>
+              </a:spcBef>
+            </a:pPr>
+            <a:endParaRPr lang="en-US" altLang="zh-TW" sz="2600" dirty="0">
+              <a:latin typeface="Times New Roman" panose="02020603050405020304" pitchFamily="18" charset="0"/>
+              <a:ea typeface="標楷體" panose="03000509000000000000" pitchFamily="65" charset="-120"/>
+              <a:cs typeface="王漢宗顏楷體"/>
+              <a:sym typeface="王漢宗顏楷體"/>
+            </a:endParaRPr>
+          </a:p>
+          <a:p>
+            <a:pPr marL="457200" indent="-457200" algn="l">
+              <a:lnSpc>
+                <a:spcPts val="4480"/>
+              </a:lnSpc>
+              <a:spcBef>
+                <a:spcPct val="0"/>
+              </a:spcBef>
+              <a:buFont typeface="Wingdings" panose="05000000000000000000" pitchFamily="2" charset="2"/>
+              <a:buChar char="v"/>
+            </a:pPr>
+            <a:r>
+              <a:rPr lang="zh-TW" altLang="en-US" sz="2600" dirty="0">
+                <a:latin typeface="Times New Roman" panose="02020603050405020304" pitchFamily="18" charset="0"/>
+                <a:ea typeface="標楷體" panose="03000509000000000000" pitchFamily="65" charset="-120"/>
+                <a:cs typeface="王漢宗顏楷體"/>
+                <a:sym typeface="王漢宗顏楷體"/>
+              </a:rPr>
+              <a:t>執行階段 </a:t>
+            </a:r>
+            <a:r>
+              <a:rPr lang="en-US" altLang="zh-TW" sz="2600" dirty="0">
+                <a:latin typeface="Times New Roman" panose="02020603050405020304" pitchFamily="18" charset="0"/>
+                <a:ea typeface="標楷體" panose="03000509000000000000" pitchFamily="65" charset="-120"/>
+                <a:cs typeface="王漢宗顏楷體"/>
+                <a:sym typeface="王漢宗顏楷體"/>
+              </a:rPr>
+              <a:t>(Execution Phase)</a:t>
+            </a:r>
+            <a:r>
+              <a:rPr lang="zh-TW" altLang="en-US" sz="2600" dirty="0">
+                <a:latin typeface="Times New Roman" panose="02020603050405020304" pitchFamily="18" charset="0"/>
+                <a:ea typeface="標楷體" panose="03000509000000000000" pitchFamily="65" charset="-120"/>
+                <a:cs typeface="王漢宗顏楷體"/>
+                <a:sym typeface="王漢宗顏楷體"/>
+              </a:rPr>
+              <a:t>：</a:t>
+            </a:r>
+            <a:endParaRPr lang="en-US" altLang="zh-TW" sz="2600" dirty="0">
+              <a:latin typeface="Times New Roman" panose="02020603050405020304" pitchFamily="18" charset="0"/>
+              <a:ea typeface="標楷體" panose="03000509000000000000" pitchFamily="65" charset="-120"/>
+              <a:cs typeface="王漢宗顏楷體"/>
+              <a:sym typeface="王漢宗顏楷體"/>
+            </a:endParaRPr>
+          </a:p>
+          <a:p>
+            <a:pPr marL="914400" lvl="1" indent="-457200">
+              <a:lnSpc>
+                <a:spcPts val="4480"/>
+              </a:lnSpc>
+              <a:spcBef>
+                <a:spcPct val="0"/>
+              </a:spcBef>
+              <a:buFont typeface="Wingdings" panose="05000000000000000000" pitchFamily="2" charset="2"/>
+              <a:buChar char="v"/>
+            </a:pPr>
+            <a:r>
+              <a:rPr lang="zh-TW" altLang="en-US" sz="2600" dirty="0">
+                <a:latin typeface="Times New Roman" panose="02020603050405020304" pitchFamily="18" charset="0"/>
+                <a:ea typeface="標楷體" panose="03000509000000000000" pitchFamily="65" charset="-120"/>
+                <a:cs typeface="王漢宗顏楷體"/>
+                <a:sym typeface="王漢宗顏楷體"/>
+              </a:rPr>
+              <a:t>逐行執行程式碼。</a:t>
+            </a:r>
+            <a:endParaRPr lang="en-US" altLang="zh-TW" sz="2600" dirty="0">
+              <a:latin typeface="Times New Roman" panose="02020603050405020304" pitchFamily="18" charset="0"/>
+              <a:ea typeface="標楷體" panose="03000509000000000000" pitchFamily="65" charset="-120"/>
+              <a:cs typeface="王漢宗顏楷體"/>
+              <a:sym typeface="王漢宗顏楷體"/>
+            </a:endParaRPr>
+          </a:p>
+          <a:p>
+            <a:pPr marL="914400" lvl="1" indent="-457200">
+              <a:lnSpc>
+                <a:spcPts val="4480"/>
+              </a:lnSpc>
+              <a:spcBef>
+                <a:spcPct val="0"/>
+              </a:spcBef>
+              <a:buFont typeface="Wingdings" panose="05000000000000000000" pitchFamily="2" charset="2"/>
+              <a:buChar char="v"/>
+            </a:pPr>
+            <a:r>
+              <a:rPr lang="zh-TW" altLang="en-US" sz="2600" dirty="0">
+                <a:latin typeface="Times New Roman" panose="02020603050405020304" pitchFamily="18" charset="0"/>
+                <a:ea typeface="標楷體" panose="03000509000000000000" pitchFamily="65" charset="-120"/>
+                <a:sym typeface="王漢宗顏楷體"/>
+              </a:rPr>
+              <a:t>透過 </a:t>
+            </a:r>
+            <a:r>
+              <a:rPr lang="en-US" altLang="zh-TW" sz="2600" dirty="0">
+                <a:latin typeface="Times New Roman" panose="02020603050405020304" pitchFamily="18" charset="0"/>
+                <a:ea typeface="標楷體" panose="03000509000000000000" pitchFamily="65" charset="-120"/>
+                <a:sym typeface="王漢宗顏楷體"/>
+              </a:rPr>
+              <a:t>`this` </a:t>
+            </a:r>
+            <a:r>
+              <a:rPr lang="zh-TW" altLang="en-US" sz="2600" dirty="0">
+                <a:latin typeface="Times New Roman" panose="02020603050405020304" pitchFamily="18" charset="0"/>
+                <a:ea typeface="標楷體" panose="03000509000000000000" pitchFamily="65" charset="-120"/>
+                <a:sym typeface="王漢宗顏楷體"/>
+              </a:rPr>
+              <a:t>和作用域鏈，存取所需的變數和函式。</a:t>
+            </a:r>
+            <a:endParaRPr lang="en-US" altLang="zh-TW" sz="2600" dirty="0">
+              <a:latin typeface="Times New Roman" panose="02020603050405020304" pitchFamily="18" charset="0"/>
+              <a:ea typeface="標楷體" panose="03000509000000000000" pitchFamily="65" charset="-120"/>
+              <a:sym typeface="王漢宗顏楷體"/>
+            </a:endParaRPr>
+          </a:p>
+          <a:p>
+            <a:pPr marL="914400" lvl="1" indent="-457200">
+              <a:lnSpc>
+                <a:spcPts val="4480"/>
+              </a:lnSpc>
+              <a:spcBef>
+                <a:spcPct val="0"/>
+              </a:spcBef>
+              <a:buFont typeface="Wingdings" panose="05000000000000000000" pitchFamily="2" charset="2"/>
+              <a:buChar char="v"/>
+            </a:pPr>
+            <a:r>
+              <a:rPr lang="zh-TW" altLang="en-US" sz="2600" dirty="0">
+                <a:latin typeface="Times New Roman" panose="02020603050405020304" pitchFamily="18" charset="0"/>
+                <a:ea typeface="標楷體" panose="03000509000000000000" pitchFamily="65" charset="-120"/>
+                <a:sym typeface="王漢宗顏楷體"/>
+              </a:rPr>
+              <a:t>當函式執行完成或遇到 </a:t>
+            </a:r>
+            <a:r>
+              <a:rPr lang="en-US" altLang="zh-TW" sz="2600" dirty="0">
+                <a:latin typeface="Times New Roman" panose="02020603050405020304" pitchFamily="18" charset="0"/>
+                <a:ea typeface="標楷體" panose="03000509000000000000" pitchFamily="65" charset="-120"/>
+                <a:sym typeface="王漢宗顏楷體"/>
+              </a:rPr>
+              <a:t>`return`</a:t>
+            </a:r>
+            <a:r>
+              <a:rPr lang="zh-TW" altLang="en-US" sz="2600" dirty="0">
+                <a:latin typeface="Times New Roman" panose="02020603050405020304" pitchFamily="18" charset="0"/>
+                <a:ea typeface="標楷體" panose="03000509000000000000" pitchFamily="65" charset="-120"/>
+                <a:sym typeface="王漢宗顏楷體"/>
+              </a:rPr>
+              <a:t>，從堆疊中移除執行環境。</a:t>
+            </a:r>
+            <a:endParaRPr lang="en-US" altLang="zh-TW" sz="2600" dirty="0">
+              <a:latin typeface="Times New Roman" panose="02020603050405020304" pitchFamily="18" charset="0"/>
+              <a:ea typeface="標楷體" panose="03000509000000000000" pitchFamily="65" charset="-120"/>
+              <a:sym typeface="王漢宗顏楷體"/>
+            </a:endParaRPr>
           </a:p>
         </p:txBody>
       </p:sp>
     </p:spTree>
     <p:extLst>
       <p:ext uri="{BB962C8B-B14F-4D97-AF65-F5344CB8AC3E}">
-        <p14:creationId xmlns:p14="http://schemas.microsoft.com/office/powerpoint/2010/main" val="1819327646"/>
+        <p14:creationId xmlns:p14="http://schemas.microsoft.com/office/powerpoint/2010/main" val="1197786838"/>
       </p:ext>
     </p:extLst>
   </p:cSld>
@@ -12948,7 +12410,7 @@
 </p:sld>
 </file>
 
-<file path=ppt/slides/slide3.xml><?xml version="1.0" encoding="utf-8"?>
+<file path=ppt/slides/slide26.xml><?xml version="1.0" encoding="utf-8"?>
 <p:sld xmlns:a="http://schemas.openxmlformats.org/drawingml/2006/main" xmlns:r="http://schemas.openxmlformats.org/officeDocument/2006/relationships" xmlns:p="http://schemas.openxmlformats.org/presentationml/2006/main">
   <p:cSld>
     <p:spTree>
@@ -12965,53 +12427,691 @@
           <a:chExt cx="0" cy="0"/>
         </a:xfrm>
       </p:grpSpPr>
+      <p:grpSp>
+        <p:nvGrpSpPr>
+          <p:cNvPr id="28" name="Group 2">
+            <a:extLst>
+              <a:ext uri="{FF2B5EF4-FFF2-40B4-BE49-F238E27FC236}">
+                <a16:creationId xmlns:a16="http://schemas.microsoft.com/office/drawing/2014/main" id="{C571510F-4237-4159-A25E-D023AAABD06D}"/>
+              </a:ext>
+            </a:extLst>
+          </p:cNvPr>
+          <p:cNvGrpSpPr/>
+          <p:nvPr/>
+        </p:nvGrpSpPr>
+        <p:grpSpPr>
+          <a:xfrm>
+            <a:off x="0" y="0"/>
+            <a:ext cx="18288000" cy="1691609"/>
+            <a:chOff x="0" y="0"/>
+            <a:chExt cx="4816593" cy="543967"/>
+          </a:xfrm>
+        </p:grpSpPr>
+        <p:sp>
+          <p:nvSpPr>
+            <p:cNvPr id="29" name="Freeform 3">
+              <a:extLst>
+                <a:ext uri="{FF2B5EF4-FFF2-40B4-BE49-F238E27FC236}">
+                  <a16:creationId xmlns:a16="http://schemas.microsoft.com/office/drawing/2014/main" id="{8558C2F7-92C9-4ED9-A7F6-36896AE39BAD}"/>
+                </a:ext>
+              </a:extLst>
+            </p:cNvPr>
+            <p:cNvSpPr/>
+            <p:nvPr/>
+          </p:nvSpPr>
+          <p:spPr>
+            <a:xfrm>
+              <a:off x="0" y="0"/>
+              <a:ext cx="4816592" cy="543967"/>
+            </a:xfrm>
+            <a:custGeom>
+              <a:avLst/>
+              <a:gdLst/>
+              <a:ahLst/>
+              <a:cxnLst/>
+              <a:rect l="l" t="t" r="r" b="b"/>
+              <a:pathLst>
+                <a:path w="4816592" h="543967">
+                  <a:moveTo>
+                    <a:pt x="0" y="0"/>
+                  </a:moveTo>
+                  <a:lnTo>
+                    <a:pt x="4816592" y="0"/>
+                  </a:lnTo>
+                  <a:lnTo>
+                    <a:pt x="4816592" y="543967"/>
+                  </a:lnTo>
+                  <a:lnTo>
+                    <a:pt x="0" y="543967"/>
+                  </a:lnTo>
+                  <a:close/>
+                </a:path>
+              </a:pathLst>
+            </a:custGeom>
+            <a:gradFill rotWithShape="1">
+              <a:gsLst>
+                <a:gs pos="0">
+                  <a:srgbClr val="B81B22">
+                    <a:alpha val="100000"/>
+                  </a:srgbClr>
+                </a:gs>
+                <a:gs pos="25000">
+                  <a:srgbClr val="B81B22">
+                    <a:alpha val="99500"/>
+                  </a:srgbClr>
+                </a:gs>
+                <a:gs pos="50000">
+                  <a:srgbClr val="E82A34">
+                    <a:alpha val="100000"/>
+                  </a:srgbClr>
+                </a:gs>
+                <a:gs pos="75000">
+                  <a:srgbClr val="F89DA1">
+                    <a:alpha val="100000"/>
+                  </a:srgbClr>
+                </a:gs>
+                <a:gs pos="100000">
+                  <a:srgbClr val="FFFFFF">
+                    <a:alpha val="99500"/>
+                  </a:srgbClr>
+                </a:gs>
+              </a:gsLst>
+              <a:lin ang="0"/>
+            </a:gradFill>
+          </p:spPr>
+        </p:sp>
+        <p:sp>
+          <p:nvSpPr>
+            <p:cNvPr id="30" name="TextBox 4">
+              <a:extLst>
+                <a:ext uri="{FF2B5EF4-FFF2-40B4-BE49-F238E27FC236}">
+                  <a16:creationId xmlns:a16="http://schemas.microsoft.com/office/drawing/2014/main" id="{CC107A00-22F6-47C1-AAF1-49AC9E4F1FE8}"/>
+                </a:ext>
+              </a:extLst>
+            </p:cNvPr>
+            <p:cNvSpPr txBox="1"/>
+            <p:nvPr/>
+          </p:nvSpPr>
+          <p:spPr>
+            <a:xfrm>
+              <a:off x="0" y="-47625"/>
+              <a:ext cx="4816593" cy="591592"/>
+            </a:xfrm>
+            <a:prstGeom prst="rect">
+              <a:avLst/>
+            </a:prstGeom>
+          </p:spPr>
+          <p:txBody>
+            <a:bodyPr lIns="50800" tIns="50800" rIns="50800" bIns="50800" rtlCol="0" anchor="ctr"/>
+            <a:lstStyle/>
+            <a:p>
+              <a:pPr algn="ctr">
+                <a:lnSpc>
+                  <a:spcPts val="2659"/>
+                </a:lnSpc>
+              </a:pPr>
+              <a:endParaRPr>
+                <a:latin typeface="標楷體" panose="03000509000000000000" pitchFamily="65" charset="-120"/>
+                <a:ea typeface="標楷體" panose="03000509000000000000" pitchFamily="65" charset="-120"/>
+              </a:endParaRPr>
+            </a:p>
+          </p:txBody>
+        </p:sp>
+      </p:grpSp>
+      <p:sp>
+        <p:nvSpPr>
+          <p:cNvPr id="34" name="TextBox 8">
+            <a:extLst>
+              <a:ext uri="{FF2B5EF4-FFF2-40B4-BE49-F238E27FC236}">
+                <a16:creationId xmlns:a16="http://schemas.microsoft.com/office/drawing/2014/main" id="{6A6E9B8B-C857-4E5F-B514-20784942772F}"/>
+              </a:ext>
+            </a:extLst>
+          </p:cNvPr>
+          <p:cNvSpPr txBox="1"/>
+          <p:nvPr/>
+        </p:nvSpPr>
+        <p:spPr>
+          <a:xfrm>
+            <a:off x="304800" y="110995"/>
+            <a:ext cx="9571413" cy="1321516"/>
+          </a:xfrm>
+          <a:prstGeom prst="rect">
+            <a:avLst/>
+          </a:prstGeom>
+        </p:spPr>
+        <p:txBody>
+          <a:bodyPr wrap="square" lIns="0" tIns="0" rIns="0" bIns="0" rtlCol="0" anchor="t">
+            <a:spAutoFit/>
+          </a:bodyPr>
+          <a:lstStyle/>
+          <a:p>
+            <a:pPr algn="l">
+              <a:lnSpc>
+                <a:spcPts val="11200"/>
+              </a:lnSpc>
+              <a:spcBef>
+                <a:spcPct val="0"/>
+              </a:spcBef>
+            </a:pPr>
+            <a:r>
+              <a:rPr lang="en-US" altLang="zh-TW" sz="8000" dirty="0">
+                <a:solidFill>
+                  <a:srgbClr val="FFFFFF"/>
+                </a:solidFill>
+                <a:latin typeface="Times New Roman" panose="02020603050405020304" pitchFamily="18" charset="0"/>
+                <a:ea typeface="標楷體" panose="03000509000000000000" pitchFamily="65" charset="-120"/>
+                <a:cs typeface="Times New Roman" panose="02020603050405020304" pitchFamily="18" charset="0"/>
+                <a:sym typeface="王漢宗顏楷體"/>
+              </a:rPr>
+              <a:t>this</a:t>
+            </a:r>
+          </a:p>
+        </p:txBody>
+      </p:sp>
+      <p:sp>
+        <p:nvSpPr>
+          <p:cNvPr id="8" name="TextBox 10">
+            <a:extLst>
+              <a:ext uri="{FF2B5EF4-FFF2-40B4-BE49-F238E27FC236}">
+                <a16:creationId xmlns:a16="http://schemas.microsoft.com/office/drawing/2014/main" id="{865EEF63-FD01-45DF-A4FB-C10C815DFB5A}"/>
+              </a:ext>
+            </a:extLst>
+          </p:cNvPr>
+          <p:cNvSpPr txBox="1"/>
+          <p:nvPr/>
+        </p:nvSpPr>
+        <p:spPr>
+          <a:xfrm>
+            <a:off x="152400" y="1691609"/>
+            <a:ext cx="9343488" cy="4551759"/>
+          </a:xfrm>
+          <a:prstGeom prst="rect">
+            <a:avLst/>
+          </a:prstGeom>
+        </p:spPr>
+        <p:txBody>
+          <a:bodyPr wrap="square" lIns="0" tIns="0" rIns="0" bIns="0" rtlCol="0" anchor="t">
+            <a:spAutoFit/>
+          </a:bodyPr>
+          <a:lstStyle/>
+          <a:p>
+            <a:pPr algn="l">
+              <a:lnSpc>
+                <a:spcPts val="4480"/>
+              </a:lnSpc>
+              <a:spcBef>
+                <a:spcPct val="0"/>
+              </a:spcBef>
+            </a:pPr>
+            <a:r>
+              <a:rPr lang="en-US" altLang="zh-TW" sz="2600" dirty="0">
+                <a:latin typeface="Times New Roman" panose="02020603050405020304" pitchFamily="18" charset="0"/>
+                <a:ea typeface="標楷體" panose="03000509000000000000" pitchFamily="65" charset="-120"/>
+                <a:cs typeface="王漢宗顏楷體"/>
+                <a:sym typeface="王漢宗顏楷體"/>
+              </a:rPr>
+              <a:t>【</a:t>
+            </a:r>
+            <a:r>
+              <a:rPr lang="zh-TW" altLang="en-US" sz="2600" dirty="0">
+                <a:latin typeface="Times New Roman" panose="02020603050405020304" pitchFamily="18" charset="0"/>
+                <a:ea typeface="標楷體" panose="03000509000000000000" pitchFamily="65" charset="-120"/>
+                <a:cs typeface="王漢宗顏楷體"/>
+                <a:sym typeface="王漢宗顏楷體"/>
+              </a:rPr>
+              <a:t>全域執行環境 </a:t>
+            </a:r>
+            <a:r>
+              <a:rPr lang="en-US" altLang="zh-TW" sz="2600" dirty="0">
+                <a:latin typeface="Times New Roman" panose="02020603050405020304" pitchFamily="18" charset="0"/>
+                <a:ea typeface="標楷體" panose="03000509000000000000" pitchFamily="65" charset="-120"/>
+                <a:cs typeface="王漢宗顏楷體"/>
+                <a:sym typeface="王漢宗顏楷體"/>
+              </a:rPr>
+              <a:t>(Global Execution Context)】</a:t>
+            </a:r>
+          </a:p>
+          <a:p>
+            <a:pPr marL="457200" indent="-457200">
+              <a:lnSpc>
+                <a:spcPts val="4480"/>
+              </a:lnSpc>
+              <a:spcBef>
+                <a:spcPct val="0"/>
+              </a:spcBef>
+              <a:buFont typeface="Wingdings" panose="05000000000000000000" pitchFamily="2" charset="2"/>
+              <a:buChar char="v"/>
+            </a:pPr>
+            <a:r>
+              <a:rPr lang="zh-TW" altLang="en-US" sz="2600" dirty="0">
+                <a:latin typeface="Times New Roman" panose="02020603050405020304" pitchFamily="18" charset="0"/>
+                <a:ea typeface="標楷體" panose="03000509000000000000" pitchFamily="65" charset="-120"/>
+                <a:cs typeface="王漢宗顏楷體"/>
+                <a:sym typeface="王漢宗顏楷體"/>
+              </a:rPr>
+              <a:t>全域執行環境 </a:t>
+            </a:r>
+            <a:r>
+              <a:rPr lang="en-US" altLang="zh-TW" sz="2600" dirty="0">
+                <a:latin typeface="Times New Roman" panose="02020603050405020304" pitchFamily="18" charset="0"/>
+                <a:ea typeface="標楷體" panose="03000509000000000000" pitchFamily="65" charset="-120"/>
+                <a:cs typeface="王漢宗顏楷體"/>
+                <a:sym typeface="王漢宗顏楷體"/>
+              </a:rPr>
+              <a:t>(Global Execution Context)</a:t>
+            </a:r>
+          </a:p>
+          <a:p>
+            <a:pPr marL="914400" lvl="1" indent="-457200">
+              <a:lnSpc>
+                <a:spcPts val="4480"/>
+              </a:lnSpc>
+              <a:spcBef>
+                <a:spcPct val="0"/>
+              </a:spcBef>
+              <a:buFont typeface="Wingdings" panose="05000000000000000000" pitchFamily="2" charset="2"/>
+              <a:buChar char="v"/>
+            </a:pPr>
+            <a:r>
+              <a:rPr lang="zh-TW" altLang="en-US" sz="2600" dirty="0">
+                <a:latin typeface="Times New Roman" panose="02020603050405020304" pitchFamily="18" charset="0"/>
+                <a:ea typeface="標楷體" panose="03000509000000000000" pitchFamily="65" charset="-120"/>
+                <a:cs typeface="王漢宗顏楷體"/>
+                <a:sym typeface="王漢宗顏楷體"/>
+              </a:rPr>
+              <a:t>在程式啟動時首先建立的執行環境。</a:t>
+            </a:r>
+            <a:endParaRPr lang="en-US" altLang="zh-TW" sz="2600" dirty="0">
+              <a:latin typeface="Times New Roman" panose="02020603050405020304" pitchFamily="18" charset="0"/>
+              <a:ea typeface="標楷體" panose="03000509000000000000" pitchFamily="65" charset="-120"/>
+              <a:cs typeface="王漢宗顏楷體"/>
+              <a:sym typeface="王漢宗顏楷體"/>
+            </a:endParaRPr>
+          </a:p>
+          <a:p>
+            <a:pPr marL="914400" lvl="1" indent="-457200">
+              <a:lnSpc>
+                <a:spcPts val="4480"/>
+              </a:lnSpc>
+              <a:spcBef>
+                <a:spcPct val="0"/>
+              </a:spcBef>
+              <a:buFont typeface="Wingdings" panose="05000000000000000000" pitchFamily="2" charset="2"/>
+              <a:buChar char="v"/>
+            </a:pPr>
+            <a:r>
+              <a:rPr lang="zh-TW" altLang="en-US" sz="2600" dirty="0">
+                <a:solidFill>
+                  <a:srgbClr val="FF0000"/>
+                </a:solidFill>
+                <a:latin typeface="Times New Roman" panose="02020603050405020304" pitchFamily="18" charset="0"/>
+                <a:ea typeface="標楷體" panose="03000509000000000000" pitchFamily="65" charset="-120"/>
+                <a:cs typeface="王漢宗顏楷體"/>
+                <a:sym typeface="王漢宗顏楷體"/>
+              </a:rPr>
+              <a:t>負責管理全域變數和函式，並將</a:t>
+            </a:r>
+            <a:r>
+              <a:rPr lang="en-US" altLang="zh-TW" sz="2600" dirty="0">
+                <a:solidFill>
+                  <a:srgbClr val="FF0000"/>
+                </a:solidFill>
+                <a:latin typeface="Times New Roman" panose="02020603050405020304" pitchFamily="18" charset="0"/>
+                <a:ea typeface="標楷體" panose="03000509000000000000" pitchFamily="65" charset="-120"/>
+                <a:cs typeface="王漢宗顏楷體"/>
+                <a:sym typeface="王漢宗顏楷體"/>
+              </a:rPr>
+              <a:t>this</a:t>
+            </a:r>
+            <a:r>
+              <a:rPr lang="zh-TW" altLang="en-US" sz="2600" dirty="0">
+                <a:solidFill>
+                  <a:srgbClr val="FF0000"/>
+                </a:solidFill>
+                <a:latin typeface="Times New Roman" panose="02020603050405020304" pitchFamily="18" charset="0"/>
+                <a:ea typeface="標楷體" panose="03000509000000000000" pitchFamily="65" charset="-120"/>
+                <a:cs typeface="王漢宗顏楷體"/>
+                <a:sym typeface="王漢宗顏楷體"/>
+              </a:rPr>
+              <a:t>綁定當程式中呼叫函式時，會建立新的執行環境並放入呼叫堆疊中。到全域物件</a:t>
+            </a:r>
+            <a:r>
+              <a:rPr lang="en-US" altLang="zh-TW" sz="2600" dirty="0">
+                <a:solidFill>
+                  <a:srgbClr val="FF0000"/>
+                </a:solidFill>
+                <a:latin typeface="Times New Roman" panose="02020603050405020304" pitchFamily="18" charset="0"/>
+                <a:ea typeface="標楷體" panose="03000509000000000000" pitchFamily="65" charset="-120"/>
+                <a:cs typeface="王漢宗顏楷體"/>
+                <a:sym typeface="王漢宗顏楷體"/>
+              </a:rPr>
+              <a:t>(</a:t>
+            </a:r>
+            <a:r>
+              <a:rPr lang="zh-TW" altLang="en-US" sz="2600" dirty="0">
+                <a:solidFill>
+                  <a:srgbClr val="FF0000"/>
+                </a:solidFill>
+                <a:latin typeface="Times New Roman" panose="02020603050405020304" pitchFamily="18" charset="0"/>
+                <a:ea typeface="標楷體" panose="03000509000000000000" pitchFamily="65" charset="-120"/>
+                <a:cs typeface="王漢宗顏楷體"/>
+                <a:sym typeface="王漢宗顏楷體"/>
+              </a:rPr>
+              <a:t>瀏覽器中是</a:t>
+            </a:r>
+            <a:r>
+              <a:rPr lang="en-US" altLang="zh-TW" sz="2600" dirty="0">
+                <a:solidFill>
+                  <a:srgbClr val="FF0000"/>
+                </a:solidFill>
+                <a:latin typeface="Times New Roman" panose="02020603050405020304" pitchFamily="18" charset="0"/>
+                <a:ea typeface="標楷體" panose="03000509000000000000" pitchFamily="65" charset="-120"/>
+                <a:cs typeface="王漢宗顏楷體"/>
+                <a:sym typeface="王漢宗顏楷體"/>
+              </a:rPr>
+              <a:t>window</a:t>
+            </a:r>
+            <a:r>
+              <a:rPr lang="zh-TW" altLang="en-US" sz="2600" dirty="0">
+                <a:solidFill>
+                  <a:srgbClr val="FF0000"/>
+                </a:solidFill>
+                <a:latin typeface="Times New Roman" panose="02020603050405020304" pitchFamily="18" charset="0"/>
+                <a:ea typeface="標楷體" panose="03000509000000000000" pitchFamily="65" charset="-120"/>
+                <a:cs typeface="王漢宗顏楷體"/>
+                <a:sym typeface="王漢宗顏楷體"/>
+              </a:rPr>
+              <a:t>，</a:t>
+            </a:r>
+            <a:r>
+              <a:rPr lang="en-US" altLang="zh-TW" sz="2600" dirty="0">
+                <a:solidFill>
+                  <a:srgbClr val="FF0000"/>
+                </a:solidFill>
+                <a:latin typeface="Times New Roman" panose="02020603050405020304" pitchFamily="18" charset="0"/>
+                <a:ea typeface="標楷體" panose="03000509000000000000" pitchFamily="65" charset="-120"/>
+                <a:cs typeface="王漢宗顏楷體"/>
+                <a:sym typeface="王漢宗顏楷體"/>
+              </a:rPr>
+              <a:t>Node.js </a:t>
+            </a:r>
+            <a:r>
+              <a:rPr lang="zh-TW" altLang="en-US" sz="2600" dirty="0">
+                <a:solidFill>
+                  <a:srgbClr val="FF0000"/>
+                </a:solidFill>
+                <a:latin typeface="Times New Roman" panose="02020603050405020304" pitchFamily="18" charset="0"/>
+                <a:ea typeface="標楷體" panose="03000509000000000000" pitchFamily="65" charset="-120"/>
+                <a:cs typeface="王漢宗顏楷體"/>
+                <a:sym typeface="王漢宗顏楷體"/>
+              </a:rPr>
+              <a:t>中是</a:t>
+            </a:r>
+            <a:r>
+              <a:rPr lang="en-US" altLang="zh-TW" sz="2600" dirty="0">
+                <a:solidFill>
+                  <a:srgbClr val="FF0000"/>
+                </a:solidFill>
+                <a:latin typeface="Times New Roman" panose="02020603050405020304" pitchFamily="18" charset="0"/>
+                <a:ea typeface="標楷體" panose="03000509000000000000" pitchFamily="65" charset="-120"/>
+                <a:cs typeface="王漢宗顏楷體"/>
+                <a:sym typeface="王漢宗顏楷體"/>
+              </a:rPr>
+              <a:t>global)</a:t>
+            </a:r>
+            <a:r>
+              <a:rPr lang="zh-TW" altLang="en-US" sz="2600" dirty="0">
+                <a:latin typeface="Times New Roman" panose="02020603050405020304" pitchFamily="18" charset="0"/>
+                <a:ea typeface="標楷體" panose="03000509000000000000" pitchFamily="65" charset="-120"/>
+                <a:cs typeface="王漢宗顏楷體"/>
+                <a:sym typeface="王漢宗顏楷體"/>
+              </a:rPr>
+              <a:t>。</a:t>
+            </a:r>
+            <a:endParaRPr lang="en-US" altLang="zh-TW" sz="2600" dirty="0">
+              <a:latin typeface="Times New Roman" panose="02020603050405020304" pitchFamily="18" charset="0"/>
+              <a:ea typeface="標楷體" panose="03000509000000000000" pitchFamily="65" charset="-120"/>
+              <a:cs typeface="王漢宗顏楷體"/>
+              <a:sym typeface="王漢宗顏楷體"/>
+            </a:endParaRPr>
+          </a:p>
+          <a:p>
+            <a:pPr marL="914400" lvl="1" indent="-457200">
+              <a:lnSpc>
+                <a:spcPts val="4480"/>
+              </a:lnSpc>
+              <a:spcBef>
+                <a:spcPct val="0"/>
+              </a:spcBef>
+              <a:buFont typeface="Wingdings" panose="05000000000000000000" pitchFamily="2" charset="2"/>
+              <a:buChar char="v"/>
+            </a:pPr>
+            <a:r>
+              <a:rPr lang="zh-TW" altLang="en-US" sz="2600" dirty="0">
+                <a:latin typeface="Times New Roman" panose="02020603050405020304" pitchFamily="18" charset="0"/>
+                <a:ea typeface="標楷體" panose="03000509000000000000" pitchFamily="65" charset="-120"/>
+                <a:cs typeface="王漢宗顏楷體"/>
+                <a:sym typeface="王漢宗顏楷體"/>
+              </a:rPr>
+              <a:t>當程式中呼叫函式時，會建立新的執行環境並放入呼叫堆疊中。</a:t>
+            </a:r>
+            <a:endParaRPr lang="en-US" altLang="zh-TW" sz="2600" dirty="0">
+              <a:latin typeface="Times New Roman" panose="02020603050405020304" pitchFamily="18" charset="0"/>
+              <a:ea typeface="標楷體" panose="03000509000000000000" pitchFamily="65" charset="-120"/>
+              <a:cs typeface="王漢宗顏楷體"/>
+              <a:sym typeface="王漢宗顏楷體"/>
+            </a:endParaRPr>
+          </a:p>
+        </p:txBody>
+      </p:sp>
+      <p:sp>
+        <p:nvSpPr>
+          <p:cNvPr id="9" name="TextBox 10">
+            <a:extLst>
+              <a:ext uri="{FF2B5EF4-FFF2-40B4-BE49-F238E27FC236}">
+                <a16:creationId xmlns:a16="http://schemas.microsoft.com/office/drawing/2014/main" id="{07CD09F6-F75F-4441-9194-3DB1551FCDD8}"/>
+              </a:ext>
+            </a:extLst>
+          </p:cNvPr>
+          <p:cNvSpPr txBox="1"/>
+          <p:nvPr/>
+        </p:nvSpPr>
+        <p:spPr>
+          <a:xfrm>
+            <a:off x="152400" y="6243368"/>
+            <a:ext cx="9525000" cy="1666354"/>
+          </a:xfrm>
+          <a:prstGeom prst="rect">
+            <a:avLst/>
+          </a:prstGeom>
+        </p:spPr>
+        <p:txBody>
+          <a:bodyPr wrap="square" lIns="0" tIns="0" rIns="0" bIns="0" rtlCol="0" anchor="t">
+            <a:spAutoFit/>
+          </a:bodyPr>
+          <a:lstStyle/>
+          <a:p>
+            <a:pPr marL="457200" indent="-457200">
+              <a:lnSpc>
+                <a:spcPts val="4480"/>
+              </a:lnSpc>
+              <a:spcBef>
+                <a:spcPct val="0"/>
+              </a:spcBef>
+              <a:buFont typeface="Wingdings" panose="05000000000000000000" pitchFamily="2" charset="2"/>
+              <a:buChar char="v"/>
+            </a:pPr>
+            <a:r>
+              <a:rPr lang="zh-TW" altLang="en-US" sz="2600" dirty="0">
+                <a:latin typeface="Times New Roman" panose="02020603050405020304" pitchFamily="18" charset="0"/>
+                <a:ea typeface="標楷體" panose="03000509000000000000" pitchFamily="65" charset="-120"/>
+                <a:cs typeface="王漢宗顏楷體"/>
+                <a:sym typeface="王漢宗顏楷體"/>
+              </a:rPr>
+              <a:t>函式</a:t>
+            </a:r>
+            <a:r>
+              <a:rPr lang="en-US" altLang="zh-TW" sz="2600" dirty="0">
+                <a:latin typeface="Times New Roman" panose="02020603050405020304" pitchFamily="18" charset="0"/>
+                <a:ea typeface="標楷體" panose="03000509000000000000" pitchFamily="65" charset="-120"/>
+                <a:cs typeface="王漢宗顏楷體"/>
+                <a:sym typeface="王漢宗顏楷體"/>
+              </a:rPr>
+              <a:t>/</a:t>
+            </a:r>
+            <a:r>
+              <a:rPr lang="zh-TW" altLang="en-US" sz="2600" dirty="0">
+                <a:latin typeface="Times New Roman" panose="02020603050405020304" pitchFamily="18" charset="0"/>
+                <a:ea typeface="標楷體" panose="03000509000000000000" pitchFamily="65" charset="-120"/>
+                <a:cs typeface="王漢宗顏楷體"/>
+                <a:sym typeface="王漢宗顏楷體"/>
+              </a:rPr>
+              <a:t>局部執行環境 </a:t>
+            </a:r>
+            <a:r>
+              <a:rPr lang="en-US" altLang="zh-TW" sz="2600" dirty="0">
+                <a:latin typeface="Times New Roman" panose="02020603050405020304" pitchFamily="18" charset="0"/>
+                <a:ea typeface="標楷體" panose="03000509000000000000" pitchFamily="65" charset="-120"/>
+                <a:cs typeface="王漢宗顏楷體"/>
+                <a:sym typeface="王漢宗顏楷體"/>
+              </a:rPr>
+              <a:t>(Function/Local Execution Context)</a:t>
+            </a:r>
+          </a:p>
+          <a:p>
+            <a:pPr marL="914400" lvl="1" indent="-457200">
+              <a:lnSpc>
+                <a:spcPts val="4480"/>
+              </a:lnSpc>
+              <a:spcBef>
+                <a:spcPct val="0"/>
+              </a:spcBef>
+              <a:buFont typeface="Wingdings" panose="05000000000000000000" pitchFamily="2" charset="2"/>
+              <a:buChar char="v"/>
+            </a:pPr>
+            <a:r>
+              <a:rPr lang="zh-TW" altLang="en-US" sz="2600" dirty="0">
+                <a:latin typeface="Times New Roman" panose="02020603050405020304" pitchFamily="18" charset="0"/>
+                <a:ea typeface="標楷體" panose="03000509000000000000" pitchFamily="65" charset="-120"/>
+                <a:cs typeface="王漢宗顏楷體"/>
+                <a:sym typeface="王漢宗顏楷體"/>
+              </a:rPr>
+              <a:t>每當呼叫一個函式時，會為該函式建立一個新的執行環境。</a:t>
+            </a:r>
+            <a:endParaRPr lang="en-US" altLang="zh-TW" sz="2600" dirty="0">
+              <a:latin typeface="Times New Roman" panose="02020603050405020304" pitchFamily="18" charset="0"/>
+              <a:ea typeface="標楷體" panose="03000509000000000000" pitchFamily="65" charset="-120"/>
+              <a:cs typeface="王漢宗顏楷體"/>
+              <a:sym typeface="王漢宗顏楷體"/>
+            </a:endParaRPr>
+          </a:p>
+          <a:p>
+            <a:pPr marL="914400" lvl="1" indent="-457200">
+              <a:lnSpc>
+                <a:spcPts val="4480"/>
+              </a:lnSpc>
+              <a:spcBef>
+                <a:spcPct val="0"/>
+              </a:spcBef>
+              <a:buFont typeface="Wingdings" panose="05000000000000000000" pitchFamily="2" charset="2"/>
+              <a:buChar char="v"/>
+            </a:pPr>
+            <a:r>
+              <a:rPr lang="en-US" altLang="zh-TW" sz="2600" dirty="0">
+                <a:solidFill>
+                  <a:srgbClr val="FF0000"/>
+                </a:solidFill>
+                <a:latin typeface="Times New Roman" panose="02020603050405020304" pitchFamily="18" charset="0"/>
+                <a:ea typeface="標楷體" panose="03000509000000000000" pitchFamily="65" charset="-120"/>
+                <a:cs typeface="王漢宗顏楷體"/>
+                <a:sym typeface="王漢宗顏楷體"/>
+              </a:rPr>
+              <a:t>this</a:t>
+            </a:r>
+            <a:r>
+              <a:rPr lang="zh-TW" altLang="en-US" sz="2600" dirty="0">
+                <a:solidFill>
+                  <a:srgbClr val="FF0000"/>
+                </a:solidFill>
+                <a:latin typeface="Times New Roman" panose="02020603050405020304" pitchFamily="18" charset="0"/>
+                <a:ea typeface="標楷體" panose="03000509000000000000" pitchFamily="65" charset="-120"/>
+                <a:cs typeface="王漢宗顏楷體"/>
+                <a:sym typeface="王漢宗顏楷體"/>
+              </a:rPr>
+              <a:t>的指向會根據呼叫方式而定，不像全域環境中那樣固定。</a:t>
+            </a:r>
+            <a:endParaRPr lang="en-US" altLang="zh-TW" sz="2600" dirty="0">
+              <a:solidFill>
+                <a:srgbClr val="FF0000"/>
+              </a:solidFill>
+              <a:latin typeface="Times New Roman" panose="02020603050405020304" pitchFamily="18" charset="0"/>
+              <a:ea typeface="標楷體" panose="03000509000000000000" pitchFamily="65" charset="-120"/>
+              <a:cs typeface="王漢宗顏楷體"/>
+              <a:sym typeface="王漢宗顏楷體"/>
+            </a:endParaRPr>
+          </a:p>
+        </p:txBody>
+      </p:sp>
       <p:pic>
         <p:nvPicPr>
-          <p:cNvPr id="1026" name="Picture 2">
+          <p:cNvPr id="10" name="圖片 9">
             <a:extLst>
               <a:ext uri="{FF2B5EF4-FFF2-40B4-BE49-F238E27FC236}">
-                <a16:creationId xmlns:a16="http://schemas.microsoft.com/office/drawing/2014/main" id="{5B516BD0-8DFD-4EC3-8B67-F180CF4DBC63}"/>
+                <a16:creationId xmlns:a16="http://schemas.microsoft.com/office/drawing/2014/main" id="{CC03EDF3-6F0F-4A5D-8D48-F86F8434C96B}"/>
               </a:ext>
             </a:extLst>
           </p:cNvPr>
           <p:cNvPicPr>
-            <a:picLocks noChangeAspect="1" noChangeArrowheads="1"/>
+            <a:picLocks noChangeAspect="1"/>
           </p:cNvPicPr>
           <p:nvPr/>
         </p:nvPicPr>
         <p:blipFill>
-          <a:blip r:embed="rId2">
-            <a:extLst>
-              <a:ext uri="{28A0092B-C50C-407E-A947-70E740481C1C}">
-                <a14:useLocalDpi xmlns:a14="http://schemas.microsoft.com/office/drawing/2010/main" val="0"/>
-              </a:ext>
-            </a:extLst>
-          </a:blip>
-          <a:srcRect/>
+          <a:blip r:embed="rId2"/>
           <a:stretch>
             <a:fillRect/>
           </a:stretch>
         </p:blipFill>
-        <p:spPr bwMode="auto">
+        <p:spPr>
           <a:xfrm>
-            <a:off x="9085051" y="1668293"/>
-            <a:ext cx="9202945" cy="6400181"/>
+            <a:off x="9876214" y="1814312"/>
+            <a:ext cx="8085228" cy="7212724"/>
           </a:xfrm>
           <a:prstGeom prst="rect">
             <a:avLst/>
           </a:prstGeom>
-          <a:noFill/>
-          <a:extLst>
-            <a:ext uri="{909E8E84-426E-40DD-AFC4-6F175D3DCCD1}">
-              <a14:hiddenFill xmlns:a14="http://schemas.microsoft.com/office/drawing/2010/main">
-                <a:solidFill>
-                  <a:srgbClr val="FFFFFF"/>
-                </a:solidFill>
-              </a14:hiddenFill>
-            </a:ext>
-          </a:extLst>
         </p:spPr>
       </p:pic>
+    </p:spTree>
+    <p:extLst>
+      <p:ext uri="{BB962C8B-B14F-4D97-AF65-F5344CB8AC3E}">
+        <p14:creationId xmlns:p14="http://schemas.microsoft.com/office/powerpoint/2010/main" val="2872679423"/>
+      </p:ext>
+    </p:extLst>
+  </p:cSld>
+  <p:clrMapOvr>
+    <a:masterClrMapping/>
+  </p:clrMapOvr>
+</p:sld>
+</file>
+
+<file path=ppt/slides/slide27.xml><?xml version="1.0" encoding="utf-8"?>
+<p:sld xmlns:a="http://schemas.openxmlformats.org/drawingml/2006/main" xmlns:r="http://schemas.openxmlformats.org/officeDocument/2006/relationships" xmlns:p="http://schemas.openxmlformats.org/presentationml/2006/main">
+  <p:cSld>
+    <p:spTree>
+      <p:nvGrpSpPr>
+        <p:cNvPr id="1" name=""/>
+        <p:cNvGrpSpPr/>
+        <p:nvPr/>
+      </p:nvGrpSpPr>
+      <p:grpSpPr>
+        <a:xfrm>
+          <a:off x="0" y="0"/>
+          <a:ext cx="0" cy="0"/>
+          <a:chOff x="0" y="0"/>
+          <a:chExt cx="0" cy="0"/>
+        </a:xfrm>
+      </p:grpSpPr>
       <p:sp>
         <p:nvSpPr>
           <p:cNvPr id="27" name="TextBox 10">
@@ -13026,8 +13126,8 @@
         </p:nvSpPr>
         <p:spPr>
           <a:xfrm>
-            <a:off x="206911" y="1785472"/>
-            <a:ext cx="8878136" cy="6860083"/>
+            <a:off x="152400" y="1691609"/>
+            <a:ext cx="9220200" cy="1088055"/>
           </a:xfrm>
           <a:prstGeom prst="rect">
             <a:avLst/>
@@ -13050,31 +13150,40 @@
               <a:buChar char="v"/>
             </a:pPr>
             <a:r>
-              <a:rPr lang="zh-TW" altLang="en-US" sz="2600" dirty="0">
-                <a:latin typeface="Times New Roman" panose="02020603050405020304" pitchFamily="18" charset="0"/>
-                <a:ea typeface="標楷體" panose="03000509000000000000" pitchFamily="65" charset="-120"/>
-                <a:cs typeface="王漢宗顏楷體"/>
-                <a:sym typeface="王漢宗顏楷體"/>
-              </a:rPr>
-              <a:t>瀏覽器透過作業系統，將網址發送給</a:t>
-            </a:r>
-            <a:r>
-              <a:rPr lang="en-US" altLang="zh-TW" sz="2600" dirty="0">
-                <a:latin typeface="Times New Roman" panose="02020603050405020304" pitchFamily="18" charset="0"/>
-                <a:ea typeface="標楷體" panose="03000509000000000000" pitchFamily="65" charset="-120"/>
-                <a:cs typeface="王漢宗顏楷體"/>
-                <a:sym typeface="王漢宗顏楷體"/>
-              </a:rPr>
-              <a:t>DNS Server</a:t>
-            </a:r>
-            <a:r>
-              <a:rPr lang="zh-TW" altLang="en-US" sz="2600" dirty="0">
-                <a:latin typeface="Times New Roman" panose="02020603050405020304" pitchFamily="18" charset="0"/>
-                <a:ea typeface="標楷體" panose="03000509000000000000" pitchFamily="65" charset="-120"/>
-                <a:cs typeface="王漢宗顏楷體"/>
-                <a:sym typeface="王漢宗顏楷體"/>
-              </a:rPr>
-              <a:t>。</a:t>
+              <a:rPr lang="en-US" altLang="zh-TW" sz="2600" dirty="0">
+                <a:latin typeface="Times New Roman" panose="02020603050405020304" pitchFamily="18" charset="0"/>
+                <a:ea typeface="標楷體" panose="03000509000000000000" pitchFamily="65" charset="-120"/>
+                <a:cs typeface="王漢宗顏楷體"/>
+                <a:sym typeface="王漢宗顏楷體"/>
+              </a:rPr>
+              <a:t>this</a:t>
+            </a:r>
+            <a:r>
+              <a:rPr lang="zh-TW" altLang="en-US" sz="2600" dirty="0">
+                <a:latin typeface="Times New Roman" panose="02020603050405020304" pitchFamily="18" charset="0"/>
+                <a:ea typeface="標楷體" panose="03000509000000000000" pitchFamily="65" charset="-120"/>
+                <a:cs typeface="王漢宗顏楷體"/>
+                <a:sym typeface="王漢宗顏楷體"/>
+              </a:rPr>
+              <a:t>是透過物建中的建構子產生，</a:t>
+            </a:r>
+            <a:r>
+              <a:rPr lang="en-US" altLang="zh-TW" sz="2600" dirty="0">
+                <a:latin typeface="Times New Roman" panose="02020603050405020304" pitchFamily="18" charset="0"/>
+                <a:ea typeface="標楷體" panose="03000509000000000000" pitchFamily="65" charset="-120"/>
+                <a:cs typeface="王漢宗顏楷體"/>
+                <a:sym typeface="王漢宗顏楷體"/>
+              </a:rPr>
+              <a:t>this</a:t>
+            </a:r>
+            <a:r>
+              <a:rPr lang="zh-TW" altLang="en-US" sz="2600" dirty="0">
+                <a:latin typeface="Times New Roman" panose="02020603050405020304" pitchFamily="18" charset="0"/>
+                <a:ea typeface="標楷體" panose="03000509000000000000" pitchFamily="65" charset="-120"/>
+                <a:cs typeface="王漢宗顏楷體"/>
+                <a:sym typeface="王漢宗顏楷體"/>
+              </a:rPr>
+              <a:t>會指向建構子。</a:t>
             </a:r>
             <a:endParaRPr lang="en-US" altLang="zh-TW" sz="2600" dirty="0">
               <a:latin typeface="Times New Roman" panose="02020603050405020304" pitchFamily="18" charset="0"/>
@@ -13095,400 +13204,31 @@
               <a:buChar char="v"/>
             </a:pPr>
             <a:r>
-              <a:rPr lang="en-US" altLang="zh-TW" sz="2600" dirty="0">
-                <a:latin typeface="Times New Roman" panose="02020603050405020304" pitchFamily="18" charset="0"/>
-                <a:ea typeface="標楷體" panose="03000509000000000000" pitchFamily="65" charset="-120"/>
-                <a:cs typeface="王漢宗顏楷體"/>
-                <a:sym typeface="王漢宗顏楷體"/>
-              </a:rPr>
-              <a:t>DNS Server</a:t>
-            </a:r>
-            <a:r>
-              <a:rPr lang="zh-TW" altLang="en-US" sz="2600" dirty="0">
-                <a:latin typeface="Times New Roman" panose="02020603050405020304" pitchFamily="18" charset="0"/>
-                <a:ea typeface="標楷體" panose="03000509000000000000" pitchFamily="65" charset="-120"/>
-                <a:cs typeface="王漢宗顏楷體"/>
-                <a:sym typeface="王漢宗顏楷體"/>
-              </a:rPr>
-              <a:t>解析網址，將處理的結果組成完整的</a:t>
-            </a:r>
-            <a:r>
-              <a:rPr lang="en-US" altLang="zh-TW" sz="2600" dirty="0">
-                <a:latin typeface="Times New Roman" panose="02020603050405020304" pitchFamily="18" charset="0"/>
-                <a:ea typeface="標楷體" panose="03000509000000000000" pitchFamily="65" charset="-120"/>
-                <a:cs typeface="王漢宗顏楷體"/>
-                <a:sym typeface="王漢宗顏楷體"/>
-              </a:rPr>
-              <a:t>IP</a:t>
-            </a:r>
-            <a:r>
-              <a:rPr lang="zh-TW" altLang="en-US" sz="2600" dirty="0">
-                <a:latin typeface="Times New Roman" panose="02020603050405020304" pitchFamily="18" charset="0"/>
-                <a:ea typeface="標楷體" panose="03000509000000000000" pitchFamily="65" charset="-120"/>
-                <a:cs typeface="王漢宗顏楷體"/>
-                <a:sym typeface="王漢宗顏楷體"/>
-              </a:rPr>
-              <a:t>位址並回傳。</a:t>
-            </a:r>
-            <a:endParaRPr lang="en-US" altLang="zh-TW" sz="2600" dirty="0">
-              <a:latin typeface="Times New Roman" panose="02020603050405020304" pitchFamily="18" charset="0"/>
-              <a:ea typeface="標楷體" panose="03000509000000000000" pitchFamily="65" charset="-120"/>
-              <a:cs typeface="王漢宗顏楷體"/>
-              <a:sym typeface="王漢宗顏楷體"/>
-            </a:endParaRPr>
-          </a:p>
-          <a:p>
-            <a:pPr marL="457200" indent="-457200" algn="l">
-              <a:lnSpc>
-                <a:spcPts val="4480"/>
-              </a:lnSpc>
-              <a:spcBef>
-                <a:spcPct val="0"/>
-              </a:spcBef>
-              <a:buFont typeface="Wingdings" panose="05000000000000000000" pitchFamily="2" charset="2"/>
-              <a:buChar char="v"/>
-            </a:pPr>
-            <a:r>
-              <a:rPr lang="zh-TW" altLang="en-US" sz="2600" dirty="0">
-                <a:latin typeface="Times New Roman" panose="02020603050405020304" pitchFamily="18" charset="0"/>
-                <a:ea typeface="標楷體" panose="03000509000000000000" pitchFamily="65" charset="-120"/>
-                <a:cs typeface="王漢宗顏楷體"/>
-                <a:sym typeface="王漢宗顏楷體"/>
-              </a:rPr>
-              <a:t>瀏覽器知道</a:t>
-            </a:r>
-            <a:r>
-              <a:rPr lang="en-US" altLang="zh-TW" sz="2600" dirty="0">
-                <a:latin typeface="Times New Roman" panose="02020603050405020304" pitchFamily="18" charset="0"/>
-                <a:ea typeface="標楷體" panose="03000509000000000000" pitchFamily="65" charset="-120"/>
-                <a:cs typeface="王漢宗顏楷體"/>
-                <a:sym typeface="王漢宗顏楷體"/>
-              </a:rPr>
-              <a:t>IP</a:t>
-            </a:r>
-            <a:r>
-              <a:rPr lang="zh-TW" altLang="en-US" sz="2600" dirty="0">
-                <a:latin typeface="Times New Roman" panose="02020603050405020304" pitchFamily="18" charset="0"/>
-                <a:ea typeface="標楷體" panose="03000509000000000000" pitchFamily="65" charset="-120"/>
-                <a:cs typeface="王漢宗顏楷體"/>
-                <a:sym typeface="王漢宗顏楷體"/>
-              </a:rPr>
-              <a:t>位址後發出網路請求，透過</a:t>
-            </a:r>
-            <a:r>
-              <a:rPr lang="en-US" altLang="zh-TW" sz="2600" dirty="0">
-                <a:latin typeface="Times New Roman" panose="02020603050405020304" pitchFamily="18" charset="0"/>
-                <a:ea typeface="標楷體" panose="03000509000000000000" pitchFamily="65" charset="-120"/>
-                <a:cs typeface="王漢宗顏楷體"/>
-                <a:sym typeface="王漢宗顏楷體"/>
-              </a:rPr>
-              <a:t>TCP/IP</a:t>
-            </a:r>
-            <a:r>
-              <a:rPr lang="zh-TW" altLang="en-US" sz="2600" dirty="0">
-                <a:latin typeface="Times New Roman" panose="02020603050405020304" pitchFamily="18" charset="0"/>
-                <a:ea typeface="標楷體" panose="03000509000000000000" pitchFamily="65" charset="-120"/>
-                <a:cs typeface="王漢宗顏楷體"/>
-                <a:sym typeface="王漢宗顏楷體"/>
-              </a:rPr>
-              <a:t>的通訊協定對 </a:t>
-            </a:r>
-            <a:r>
-              <a:rPr lang="en-US" altLang="zh-TW" sz="2600" dirty="0">
-                <a:latin typeface="Times New Roman" panose="02020603050405020304" pitchFamily="18" charset="0"/>
-                <a:ea typeface="標楷體" panose="03000509000000000000" pitchFamily="65" charset="-120"/>
-                <a:cs typeface="王漢宗顏楷體"/>
-                <a:sym typeface="王漢宗顏楷體"/>
-              </a:rPr>
-              <a:t>Target Server</a:t>
-            </a:r>
-            <a:r>
-              <a:rPr lang="zh-TW" altLang="en-US" sz="2600" dirty="0">
-                <a:latin typeface="Times New Roman" panose="02020603050405020304" pitchFamily="18" charset="0"/>
-                <a:ea typeface="標楷體" panose="03000509000000000000" pitchFamily="65" charset="-120"/>
-                <a:cs typeface="王漢宗顏楷體"/>
-                <a:sym typeface="王漢宗顏楷體"/>
-              </a:rPr>
-              <a:t>，也就是網頁所在的伺服器來建立連線。</a:t>
-            </a:r>
-            <a:endParaRPr lang="en-US" altLang="zh-TW" sz="2600" dirty="0">
-              <a:latin typeface="Times New Roman" panose="02020603050405020304" pitchFamily="18" charset="0"/>
-              <a:ea typeface="標楷體" panose="03000509000000000000" pitchFamily="65" charset="-120"/>
-              <a:cs typeface="王漢宗顏楷體"/>
-              <a:sym typeface="王漢宗顏楷體"/>
-            </a:endParaRPr>
-          </a:p>
-          <a:p>
-            <a:pPr marL="457200" indent="-457200" algn="l">
-              <a:lnSpc>
-                <a:spcPts val="4480"/>
-              </a:lnSpc>
-              <a:spcBef>
-                <a:spcPct val="0"/>
-              </a:spcBef>
-              <a:buFont typeface="Wingdings" panose="05000000000000000000" pitchFamily="2" charset="2"/>
-              <a:buChar char="v"/>
-            </a:pPr>
-            <a:r>
-              <a:rPr lang="en-US" altLang="zh-TW" sz="2600" dirty="0">
-                <a:latin typeface="Times New Roman" panose="02020603050405020304" pitchFamily="18" charset="0"/>
-                <a:ea typeface="標楷體" panose="03000509000000000000" pitchFamily="65" charset="-120"/>
-                <a:cs typeface="王漢宗顏楷體"/>
-                <a:sym typeface="王漢宗顏楷體"/>
-              </a:rPr>
-              <a:t>Target Server</a:t>
-            </a:r>
-            <a:r>
-              <a:rPr lang="zh-TW" altLang="en-US" sz="2600" dirty="0">
-                <a:latin typeface="Times New Roman" panose="02020603050405020304" pitchFamily="18" charset="0"/>
-                <a:ea typeface="標楷體" panose="03000509000000000000" pitchFamily="65" charset="-120"/>
-                <a:cs typeface="王漢宗顏楷體"/>
-                <a:sym typeface="王漢宗顏楷體"/>
-              </a:rPr>
-              <a:t>收到請求後，把所需的資源以封包的形式回應。</a:t>
-            </a:r>
-            <a:endParaRPr lang="en-US" altLang="zh-TW" sz="2600" dirty="0">
-              <a:latin typeface="Times New Roman" panose="02020603050405020304" pitchFamily="18" charset="0"/>
-              <a:ea typeface="標楷體" panose="03000509000000000000" pitchFamily="65" charset="-120"/>
-              <a:cs typeface="王漢宗顏楷體"/>
-              <a:sym typeface="王漢宗顏楷體"/>
-            </a:endParaRPr>
-          </a:p>
-          <a:p>
-            <a:pPr marL="457200" indent="-457200" algn="l">
-              <a:lnSpc>
-                <a:spcPts val="4480"/>
-              </a:lnSpc>
-              <a:spcBef>
-                <a:spcPct val="0"/>
-              </a:spcBef>
-              <a:buFont typeface="Wingdings" panose="05000000000000000000" pitchFamily="2" charset="2"/>
-              <a:buChar char="v"/>
-            </a:pPr>
-            <a:r>
-              <a:rPr lang="zh-TW" altLang="en-US" sz="2600" dirty="0">
-                <a:latin typeface="Times New Roman" panose="02020603050405020304" pitchFamily="18" charset="0"/>
-                <a:ea typeface="標楷體" panose="03000509000000000000" pitchFamily="65" charset="-120"/>
-                <a:cs typeface="王漢宗顏楷體"/>
-                <a:sym typeface="王漢宗顏楷體"/>
-              </a:rPr>
-              <a:t>解析完封包後，瀏覽器會收到相關的檔案和狀態資訊。</a:t>
-            </a:r>
-            <a:endParaRPr lang="en-US" altLang="zh-TW" sz="2600" dirty="0">
-              <a:latin typeface="Times New Roman" panose="02020603050405020304" pitchFamily="18" charset="0"/>
-              <a:ea typeface="標楷體" panose="03000509000000000000" pitchFamily="65" charset="-120"/>
-              <a:cs typeface="王漢宗顏楷體"/>
-              <a:sym typeface="王漢宗顏楷體"/>
-            </a:endParaRPr>
-          </a:p>
-          <a:p>
-            <a:pPr marL="457200" indent="-457200" algn="l">
-              <a:lnSpc>
-                <a:spcPts val="4480"/>
-              </a:lnSpc>
-              <a:spcBef>
-                <a:spcPct val="0"/>
-              </a:spcBef>
-              <a:buFont typeface="Wingdings" panose="05000000000000000000" pitchFamily="2" charset="2"/>
-              <a:buChar char="v"/>
-            </a:pPr>
-            <a:r>
-              <a:rPr lang="en-US" altLang="zh-TW" sz="2600" dirty="0">
-                <a:latin typeface="Times New Roman" panose="02020603050405020304" pitchFamily="18" charset="0"/>
-                <a:ea typeface="標楷體" panose="03000509000000000000" pitchFamily="65" charset="-120"/>
-                <a:cs typeface="王漢宗顏楷體"/>
-                <a:sym typeface="王漢宗顏楷體"/>
-              </a:rPr>
-              <a:t>HTML</a:t>
-            </a:r>
-            <a:r>
-              <a:rPr lang="zh-TW" altLang="en-US" sz="2600" dirty="0">
-                <a:latin typeface="Times New Roman" panose="02020603050405020304" pitchFamily="18" charset="0"/>
-                <a:ea typeface="標楷體" panose="03000509000000000000" pitchFamily="65" charset="-120"/>
-                <a:cs typeface="王漢宗顏楷體"/>
-                <a:sym typeface="王漢宗顏楷體"/>
-              </a:rPr>
-              <a:t>和</a:t>
-            </a:r>
-            <a:r>
-              <a:rPr lang="en-US" altLang="zh-TW" sz="2600" dirty="0">
-                <a:latin typeface="Times New Roman" panose="02020603050405020304" pitchFamily="18" charset="0"/>
-                <a:ea typeface="標楷體" panose="03000509000000000000" pitchFamily="65" charset="-120"/>
-                <a:cs typeface="王漢宗顏楷體"/>
-                <a:sym typeface="王漢宗顏楷體"/>
-              </a:rPr>
-              <a:t>CSS</a:t>
-            </a:r>
-            <a:r>
-              <a:rPr lang="zh-TW" altLang="en-US" sz="2600" dirty="0">
-                <a:latin typeface="Times New Roman" panose="02020603050405020304" pitchFamily="18" charset="0"/>
-                <a:ea typeface="標楷體" panose="03000509000000000000" pitchFamily="65" charset="-120"/>
-                <a:cs typeface="王漢宗顏楷體"/>
-                <a:sym typeface="王漢宗顏楷體"/>
-              </a:rPr>
-              <a:t>會分別透過各自的</a:t>
-            </a:r>
-            <a:r>
-              <a:rPr lang="en-US" altLang="zh-TW" sz="2600" dirty="0">
-                <a:latin typeface="Times New Roman" panose="02020603050405020304" pitchFamily="18" charset="0"/>
-                <a:ea typeface="標楷體" panose="03000509000000000000" pitchFamily="65" charset="-120"/>
-                <a:cs typeface="王漢宗顏楷體"/>
-                <a:sym typeface="王漢宗顏楷體"/>
-              </a:rPr>
-              <a:t>Parser</a:t>
-            </a:r>
-            <a:r>
-              <a:rPr lang="zh-TW" altLang="en-US" sz="2600" dirty="0">
-                <a:latin typeface="Times New Roman" panose="02020603050405020304" pitchFamily="18" charset="0"/>
-                <a:ea typeface="標楷體" panose="03000509000000000000" pitchFamily="65" charset="-120"/>
-                <a:cs typeface="王漢宗顏楷體"/>
-                <a:sym typeface="王漢宗顏楷體"/>
-              </a:rPr>
-              <a:t>建立樹狀結構的資料模型：</a:t>
-            </a:r>
-            <a:r>
-              <a:rPr lang="en-US" altLang="zh-TW" sz="2600" dirty="0">
-                <a:latin typeface="Times New Roman" panose="02020603050405020304" pitchFamily="18" charset="0"/>
-                <a:ea typeface="標楷體" panose="03000509000000000000" pitchFamily="65" charset="-120"/>
-                <a:cs typeface="王漢宗顏楷體"/>
-                <a:sym typeface="王漢宗顏楷體"/>
-              </a:rPr>
-              <a:t>DOM Tree</a:t>
-            </a:r>
-            <a:r>
-              <a:rPr lang="zh-TW" altLang="en-US" sz="2600" dirty="0">
-                <a:latin typeface="Times New Roman" panose="02020603050405020304" pitchFamily="18" charset="0"/>
-                <a:ea typeface="標楷體" panose="03000509000000000000" pitchFamily="65" charset="-120"/>
-                <a:cs typeface="王漢宗顏楷體"/>
-                <a:sym typeface="王漢宗顏楷體"/>
-              </a:rPr>
-              <a:t>和</a:t>
-            </a:r>
-            <a:r>
-              <a:rPr lang="en-US" altLang="zh-TW" sz="2600" dirty="0">
-                <a:latin typeface="Times New Roman" panose="02020603050405020304" pitchFamily="18" charset="0"/>
-                <a:ea typeface="標楷體" panose="03000509000000000000" pitchFamily="65" charset="-120"/>
-                <a:cs typeface="王漢宗顏楷體"/>
-                <a:sym typeface="王漢宗顏楷體"/>
-              </a:rPr>
-              <a:t>CSSOM Tree</a:t>
-            </a:r>
-            <a:r>
-              <a:rPr lang="zh-TW" altLang="en-US" sz="2600" dirty="0">
-                <a:latin typeface="Times New Roman" panose="02020603050405020304" pitchFamily="18" charset="0"/>
-                <a:ea typeface="標楷體" panose="03000509000000000000" pitchFamily="65" charset="-120"/>
-                <a:cs typeface="王漢宗顏楷體"/>
-                <a:sym typeface="王漢宗顏楷體"/>
-              </a:rPr>
-              <a:t>。</a:t>
-            </a:r>
-            <a:endParaRPr lang="en-US" altLang="zh-TW" sz="2600" dirty="0">
-              <a:latin typeface="Times New Roman" panose="02020603050405020304" pitchFamily="18" charset="0"/>
-              <a:ea typeface="標楷體" panose="03000509000000000000" pitchFamily="65" charset="-120"/>
-              <a:cs typeface="王漢宗顏楷體"/>
-              <a:sym typeface="王漢宗顏楷體"/>
-            </a:endParaRPr>
-          </a:p>
-          <a:p>
-            <a:pPr marL="457200" indent="-457200" algn="l">
-              <a:lnSpc>
-                <a:spcPts val="4480"/>
-              </a:lnSpc>
-              <a:spcBef>
-                <a:spcPct val="0"/>
-              </a:spcBef>
-              <a:buFont typeface="Wingdings" panose="05000000000000000000" pitchFamily="2" charset="2"/>
-              <a:buChar char="v"/>
-            </a:pPr>
-            <a:r>
-              <a:rPr lang="zh-TW" altLang="en-US" sz="2600" dirty="0">
-                <a:latin typeface="Times New Roman" panose="02020603050405020304" pitchFamily="18" charset="0"/>
-                <a:ea typeface="標楷體" panose="03000509000000000000" pitchFamily="65" charset="-120"/>
-                <a:cs typeface="王漢宗顏楷體"/>
-                <a:sym typeface="王漢宗顏楷體"/>
-              </a:rPr>
-              <a:t>瀏覽器透過</a:t>
-            </a:r>
-            <a:r>
-              <a:rPr lang="en-US" altLang="zh-TW" sz="2600" dirty="0">
-                <a:latin typeface="Times New Roman" panose="02020603050405020304" pitchFamily="18" charset="0"/>
-                <a:ea typeface="標楷體" panose="03000509000000000000" pitchFamily="65" charset="-120"/>
-                <a:cs typeface="王漢宗顏楷體"/>
-                <a:sym typeface="王漢宗顏楷體"/>
-              </a:rPr>
-              <a:t>Render Tree</a:t>
-            </a:r>
-            <a:r>
-              <a:rPr lang="zh-TW" altLang="en-US" sz="2600" dirty="0">
-                <a:latin typeface="Times New Roman" panose="02020603050405020304" pitchFamily="18" charset="0"/>
-                <a:ea typeface="標楷體" panose="03000509000000000000" pitchFamily="65" charset="-120"/>
-                <a:cs typeface="王漢宗顏楷體"/>
-                <a:sym typeface="王漢宗顏楷體"/>
-              </a:rPr>
-              <a:t>計算出每個節點對應到頁面上的實際位置、形狀與大小等資訊，輸出一個</a:t>
-            </a:r>
-            <a:r>
-              <a:rPr lang="en-US" altLang="zh-TW" sz="2600" dirty="0">
-                <a:latin typeface="Times New Roman" panose="02020603050405020304" pitchFamily="18" charset="0"/>
-                <a:ea typeface="標楷體" panose="03000509000000000000" pitchFamily="65" charset="-120"/>
-                <a:cs typeface="王漢宗顏楷體"/>
-                <a:sym typeface="王漢宗顏楷體"/>
-              </a:rPr>
-              <a:t>Layout</a:t>
-            </a:r>
-            <a:r>
-              <a:rPr lang="zh-TW" altLang="en-US" sz="2600" dirty="0">
-                <a:latin typeface="Times New Roman" panose="02020603050405020304" pitchFamily="18" charset="0"/>
-                <a:ea typeface="標楷體" panose="03000509000000000000" pitchFamily="65" charset="-120"/>
-                <a:cs typeface="王漢宗顏楷體"/>
-                <a:sym typeface="王漢宗顏楷體"/>
-              </a:rPr>
-              <a:t>的資料模型。</a:t>
-            </a:r>
-            <a:endParaRPr lang="en-US" altLang="zh-TW" sz="2600" dirty="0">
-              <a:latin typeface="Times New Roman" panose="02020603050405020304" pitchFamily="18" charset="0"/>
-              <a:ea typeface="標楷體" panose="03000509000000000000" pitchFamily="65" charset="-120"/>
-              <a:cs typeface="王漢宗顏楷體"/>
-              <a:sym typeface="王漢宗顏楷體"/>
-            </a:endParaRPr>
-          </a:p>
-          <a:p>
-            <a:pPr marL="457200" indent="-457200" algn="l">
-              <a:lnSpc>
-                <a:spcPts val="4480"/>
-              </a:lnSpc>
-              <a:spcBef>
-                <a:spcPct val="0"/>
-              </a:spcBef>
-              <a:buFont typeface="Wingdings" panose="05000000000000000000" pitchFamily="2" charset="2"/>
-              <a:buChar char="v"/>
-            </a:pPr>
-            <a:r>
-              <a:rPr lang="zh-TW" altLang="en-US" sz="2600" dirty="0">
-                <a:latin typeface="Times New Roman" panose="02020603050405020304" pitchFamily="18" charset="0"/>
-                <a:ea typeface="標楷體" panose="03000509000000000000" pitchFamily="65" charset="-120"/>
-                <a:cs typeface="王漢宗顏楷體"/>
-                <a:sym typeface="王漢宗顏楷體"/>
-              </a:rPr>
-              <a:t>瀏覽器透過這個</a:t>
-            </a:r>
-            <a:r>
-              <a:rPr lang="en-US" altLang="zh-TW" sz="2600" dirty="0">
-                <a:latin typeface="Times New Roman" panose="02020603050405020304" pitchFamily="18" charset="0"/>
-                <a:ea typeface="標楷體" panose="03000509000000000000" pitchFamily="65" charset="-120"/>
-                <a:cs typeface="王漢宗顏楷體"/>
-                <a:sym typeface="王漢宗顏楷體"/>
-              </a:rPr>
-              <a:t>Layout</a:t>
-            </a:r>
-            <a:r>
-              <a:rPr lang="zh-TW" altLang="en-US" sz="2600" dirty="0">
-                <a:latin typeface="Times New Roman" panose="02020603050405020304" pitchFamily="18" charset="0"/>
-                <a:ea typeface="標楷體" panose="03000509000000000000" pitchFamily="65" charset="-120"/>
-                <a:cs typeface="王漢宗顏楷體"/>
-                <a:sym typeface="王漢宗顏楷體"/>
-              </a:rPr>
-              <a:t>渲染在頁面上。</a:t>
+              <a:rPr lang="zh-TW" altLang="en-US" sz="2600" dirty="0">
+                <a:latin typeface="Times New Roman" panose="02020603050405020304" pitchFamily="18" charset="0"/>
+                <a:ea typeface="標楷體" panose="03000509000000000000" pitchFamily="65" charset="-120"/>
+                <a:cs typeface="王漢宗顏楷體"/>
+                <a:sym typeface="王漢宗顏楷體"/>
+              </a:rPr>
+              <a:t>當要存取或執行自己的成員時，就可以透過</a:t>
+            </a:r>
+            <a:r>
+              <a:rPr lang="en-US" altLang="zh-TW" sz="2600" dirty="0">
+                <a:latin typeface="Times New Roman" panose="02020603050405020304" pitchFamily="18" charset="0"/>
+                <a:ea typeface="標楷體" panose="03000509000000000000" pitchFamily="65" charset="-120"/>
+                <a:cs typeface="王漢宗顏楷體"/>
+                <a:sym typeface="王漢宗顏楷體"/>
+              </a:rPr>
+              <a:t>this</a:t>
+            </a:r>
+            <a:r>
+              <a:rPr lang="zh-TW" altLang="en-US" sz="2600" dirty="0">
+                <a:latin typeface="Times New Roman" panose="02020603050405020304" pitchFamily="18" charset="0"/>
+                <a:ea typeface="標楷體" panose="03000509000000000000" pitchFamily="65" charset="-120"/>
+                <a:cs typeface="王漢宗顏楷體"/>
+                <a:sym typeface="王漢宗顏楷體"/>
+              </a:rPr>
+              <a:t>來進行。</a:t>
             </a:r>
             <a:endParaRPr lang="en-US" altLang="zh-TW" sz="2600" dirty="0">
               <a:latin typeface="Times New Roman" panose="02020603050405020304" pitchFamily="18" charset="0"/>
@@ -13644,6 +13384,2350 @@
         </p:nvSpPr>
         <p:spPr>
           <a:xfrm>
+            <a:off x="304800" y="110995"/>
+            <a:ext cx="9571413" cy="1321516"/>
+          </a:xfrm>
+          <a:prstGeom prst="rect">
+            <a:avLst/>
+          </a:prstGeom>
+        </p:spPr>
+        <p:txBody>
+          <a:bodyPr wrap="square" lIns="0" tIns="0" rIns="0" bIns="0" rtlCol="0" anchor="t">
+            <a:spAutoFit/>
+          </a:bodyPr>
+          <a:lstStyle/>
+          <a:p>
+            <a:pPr algn="l">
+              <a:lnSpc>
+                <a:spcPts val="11200"/>
+              </a:lnSpc>
+              <a:spcBef>
+                <a:spcPct val="0"/>
+              </a:spcBef>
+            </a:pPr>
+            <a:r>
+              <a:rPr lang="en-US" altLang="zh-TW" sz="8000" dirty="0">
+                <a:solidFill>
+                  <a:srgbClr val="FFFFFF"/>
+                </a:solidFill>
+                <a:latin typeface="Times New Roman" panose="02020603050405020304" pitchFamily="18" charset="0"/>
+                <a:ea typeface="標楷體" panose="03000509000000000000" pitchFamily="65" charset="-120"/>
+                <a:cs typeface="Times New Roman" panose="02020603050405020304" pitchFamily="18" charset="0"/>
+                <a:sym typeface="王漢宗顏楷體"/>
+              </a:rPr>
+              <a:t>this</a:t>
+            </a:r>
+          </a:p>
+        </p:txBody>
+      </p:sp>
+      <p:pic>
+        <p:nvPicPr>
+          <p:cNvPr id="5" name="圖片 4">
+            <a:extLst>
+              <a:ext uri="{FF2B5EF4-FFF2-40B4-BE49-F238E27FC236}">
+                <a16:creationId xmlns:a16="http://schemas.microsoft.com/office/drawing/2014/main" id="{13D1DFD2-499F-4135-88E1-F15D520A11D0}"/>
+              </a:ext>
+            </a:extLst>
+          </p:cNvPr>
+          <p:cNvPicPr>
+            <a:picLocks noChangeAspect="1"/>
+          </p:cNvPicPr>
+          <p:nvPr/>
+        </p:nvPicPr>
+        <p:blipFill>
+          <a:blip r:embed="rId2"/>
+          <a:stretch>
+            <a:fillRect/>
+          </a:stretch>
+        </p:blipFill>
+        <p:spPr>
+          <a:xfrm>
+            <a:off x="227967" y="3038762"/>
+            <a:ext cx="6848261" cy="4085938"/>
+          </a:xfrm>
+          <a:prstGeom prst="rect">
+            <a:avLst/>
+          </a:prstGeom>
+        </p:spPr>
+      </p:pic>
+      <p:sp>
+        <p:nvSpPr>
+          <p:cNvPr id="11" name="TextBox 10">
+            <a:extLst>
+              <a:ext uri="{FF2B5EF4-FFF2-40B4-BE49-F238E27FC236}">
+                <a16:creationId xmlns:a16="http://schemas.microsoft.com/office/drawing/2014/main" id="{37B9CFD3-88B6-40FC-BF0E-FA4C4FC359CF}"/>
+              </a:ext>
+            </a:extLst>
+          </p:cNvPr>
+          <p:cNvSpPr txBox="1"/>
+          <p:nvPr/>
+        </p:nvSpPr>
+        <p:spPr>
+          <a:xfrm>
+            <a:off x="152400" y="7277100"/>
+            <a:ext cx="13792200" cy="1089273"/>
+          </a:xfrm>
+          <a:prstGeom prst="rect">
+            <a:avLst/>
+          </a:prstGeom>
+        </p:spPr>
+        <p:txBody>
+          <a:bodyPr wrap="square" lIns="0" tIns="0" rIns="0" bIns="0" rtlCol="0" anchor="t">
+            <a:spAutoFit/>
+          </a:bodyPr>
+          <a:lstStyle/>
+          <a:p>
+            <a:pPr marL="457200" indent="-457200" algn="l">
+              <a:lnSpc>
+                <a:spcPts val="4480"/>
+              </a:lnSpc>
+              <a:spcBef>
+                <a:spcPct val="0"/>
+              </a:spcBef>
+              <a:buFont typeface="Wingdings" panose="05000000000000000000" pitchFamily="2" charset="2"/>
+              <a:buChar char="v"/>
+            </a:pPr>
+            <a:r>
+              <a:rPr lang="zh-TW" altLang="en-US" sz="2600" dirty="0">
+                <a:latin typeface="Times New Roman" panose="02020603050405020304" pitchFamily="18" charset="0"/>
+                <a:ea typeface="標楷體" panose="03000509000000000000" pitchFamily="65" charset="-120"/>
+                <a:cs typeface="王漢宗顏楷體"/>
+                <a:sym typeface="王漢宗顏楷體"/>
+              </a:rPr>
+              <a:t>不過在</a:t>
+            </a:r>
+            <a:r>
+              <a:rPr lang="en-US" altLang="zh-TW" sz="2600" dirty="0">
+                <a:latin typeface="Times New Roman" panose="02020603050405020304" pitchFamily="18" charset="0"/>
+                <a:ea typeface="標楷體" panose="03000509000000000000" pitchFamily="65" charset="-120"/>
+                <a:cs typeface="王漢宗顏楷體"/>
+                <a:sym typeface="王漢宗顏楷體"/>
+              </a:rPr>
+              <a:t>JavaScript</a:t>
+            </a:r>
+            <a:r>
+              <a:rPr lang="zh-TW" altLang="en-US" sz="2600" dirty="0">
+                <a:latin typeface="Times New Roman" panose="02020603050405020304" pitchFamily="18" charset="0"/>
+                <a:ea typeface="標楷體" panose="03000509000000000000" pitchFamily="65" charset="-120"/>
+                <a:cs typeface="王漢宗顏楷體"/>
+                <a:sym typeface="王漢宗顏楷體"/>
+              </a:rPr>
+              <a:t>中，</a:t>
+            </a:r>
+            <a:r>
+              <a:rPr lang="en-US" altLang="zh-TW" sz="2600" dirty="0">
+                <a:latin typeface="Times New Roman" panose="02020603050405020304" pitchFamily="18" charset="0"/>
+                <a:ea typeface="標楷體" panose="03000509000000000000" pitchFamily="65" charset="-120"/>
+                <a:cs typeface="王漢宗顏楷體"/>
+                <a:sym typeface="王漢宗顏楷體"/>
+              </a:rPr>
+              <a:t>this</a:t>
+            </a:r>
+            <a:r>
+              <a:rPr lang="zh-TW" altLang="en-US" sz="2600" dirty="0">
+                <a:latin typeface="Times New Roman" panose="02020603050405020304" pitchFamily="18" charset="0"/>
+                <a:ea typeface="標楷體" panose="03000509000000000000" pitchFamily="65" charset="-120"/>
+                <a:cs typeface="王漢宗顏楷體"/>
+                <a:sym typeface="王漢宗顏楷體"/>
+              </a:rPr>
+              <a:t>關鍵字會隨著執行環境、特殊的語法、函式呼叫的方式等會有變動。</a:t>
+            </a:r>
+            <a:endParaRPr lang="en-US" altLang="zh-TW" sz="2600" dirty="0">
+              <a:latin typeface="Times New Roman" panose="02020603050405020304" pitchFamily="18" charset="0"/>
+              <a:ea typeface="標楷體" panose="03000509000000000000" pitchFamily="65" charset="-120"/>
+              <a:cs typeface="王漢宗顏楷體"/>
+              <a:sym typeface="王漢宗顏楷體"/>
+            </a:endParaRPr>
+          </a:p>
+          <a:p>
+            <a:pPr marL="457200" indent="-457200" algn="l">
+              <a:lnSpc>
+                <a:spcPts val="4480"/>
+              </a:lnSpc>
+              <a:spcBef>
+                <a:spcPct val="0"/>
+              </a:spcBef>
+              <a:buFont typeface="Wingdings" panose="05000000000000000000" pitchFamily="2" charset="2"/>
+              <a:buChar char="v"/>
+            </a:pPr>
+            <a:r>
+              <a:rPr lang="zh-TW" altLang="en-US" sz="2600" dirty="0">
+                <a:latin typeface="Times New Roman" panose="02020603050405020304" pitchFamily="18" charset="0"/>
+                <a:ea typeface="標楷體" panose="03000509000000000000" pitchFamily="65" charset="-120"/>
+                <a:cs typeface="王漢宗顏楷體"/>
+                <a:sym typeface="王漢宗顏楷體"/>
+              </a:rPr>
+              <a:t>這種動態決定函式執行環境中</a:t>
+            </a:r>
+            <a:r>
+              <a:rPr lang="en-US" altLang="zh-TW" sz="2600" dirty="0">
+                <a:latin typeface="Times New Roman" panose="02020603050405020304" pitchFamily="18" charset="0"/>
+                <a:ea typeface="標楷體" panose="03000509000000000000" pitchFamily="65" charset="-120"/>
+                <a:cs typeface="王漢宗顏楷體"/>
+                <a:sym typeface="王漢宗顏楷體"/>
+              </a:rPr>
+              <a:t>this</a:t>
+            </a:r>
+            <a:r>
+              <a:rPr lang="zh-TW" altLang="en-US" sz="2600" dirty="0">
+                <a:latin typeface="Times New Roman" panose="02020603050405020304" pitchFamily="18" charset="0"/>
+                <a:ea typeface="標楷體" panose="03000509000000000000" pitchFamily="65" charset="-120"/>
+                <a:cs typeface="王漢宗顏楷體"/>
+                <a:sym typeface="王漢宗顏楷體"/>
+              </a:rPr>
+              <a:t>對象，我們通常叫做「綁定」</a:t>
+            </a:r>
+            <a:r>
+              <a:rPr lang="en-US" altLang="zh-TW" sz="2600" dirty="0">
+                <a:latin typeface="Times New Roman" panose="02020603050405020304" pitchFamily="18" charset="0"/>
+                <a:ea typeface="標楷體" panose="03000509000000000000" pitchFamily="65" charset="-120"/>
+                <a:cs typeface="王漢宗顏楷體"/>
+                <a:sym typeface="王漢宗顏楷體"/>
+              </a:rPr>
+              <a:t>(binding)</a:t>
+            </a:r>
+            <a:r>
+              <a:rPr lang="zh-TW" altLang="en-US" sz="2600" dirty="0">
+                <a:latin typeface="Times New Roman" panose="02020603050405020304" pitchFamily="18" charset="0"/>
+                <a:ea typeface="標楷體" panose="03000509000000000000" pitchFamily="65" charset="-120"/>
+                <a:cs typeface="王漢宗顏楷體"/>
+                <a:sym typeface="王漢宗顏楷體"/>
+              </a:rPr>
+              <a:t>。</a:t>
+            </a:r>
+            <a:endParaRPr lang="en-US" altLang="zh-TW" sz="2600" dirty="0">
+              <a:latin typeface="Times New Roman" panose="02020603050405020304" pitchFamily="18" charset="0"/>
+              <a:ea typeface="標楷體" panose="03000509000000000000" pitchFamily="65" charset="-120"/>
+              <a:cs typeface="王漢宗顏楷體"/>
+              <a:sym typeface="王漢宗顏楷體"/>
+            </a:endParaRPr>
+          </a:p>
+        </p:txBody>
+      </p:sp>
+    </p:spTree>
+    <p:extLst>
+      <p:ext uri="{BB962C8B-B14F-4D97-AF65-F5344CB8AC3E}">
+        <p14:creationId xmlns:p14="http://schemas.microsoft.com/office/powerpoint/2010/main" val="3649068650"/>
+      </p:ext>
+    </p:extLst>
+  </p:cSld>
+  <p:clrMapOvr>
+    <a:masterClrMapping/>
+  </p:clrMapOvr>
+</p:sld>
+</file>
+
+<file path=ppt/slides/slide28.xml><?xml version="1.0" encoding="utf-8"?>
+<p:sld xmlns:a="http://schemas.openxmlformats.org/drawingml/2006/main" xmlns:r="http://schemas.openxmlformats.org/officeDocument/2006/relationships" xmlns:p="http://schemas.openxmlformats.org/presentationml/2006/main">
+  <p:cSld>
+    <p:spTree>
+      <p:nvGrpSpPr>
+        <p:cNvPr id="1" name=""/>
+        <p:cNvGrpSpPr/>
+        <p:nvPr/>
+      </p:nvGrpSpPr>
+      <p:grpSpPr>
+        <a:xfrm>
+          <a:off x="0" y="0"/>
+          <a:ext cx="0" cy="0"/>
+          <a:chOff x="0" y="0"/>
+          <a:chExt cx="0" cy="0"/>
+        </a:xfrm>
+      </p:grpSpPr>
+      <p:sp>
+        <p:nvSpPr>
+          <p:cNvPr id="27" name="TextBox 10">
+            <a:extLst>
+              <a:ext uri="{FF2B5EF4-FFF2-40B4-BE49-F238E27FC236}">
+                <a16:creationId xmlns:a16="http://schemas.microsoft.com/office/drawing/2014/main" id="{2A659F81-1ED8-4106-8C45-6A01D7DBC583}"/>
+              </a:ext>
+            </a:extLst>
+          </p:cNvPr>
+          <p:cNvSpPr txBox="1"/>
+          <p:nvPr/>
+        </p:nvSpPr>
+        <p:spPr>
+          <a:xfrm>
+            <a:off x="152400" y="1704309"/>
+            <a:ext cx="7924800" cy="1666354"/>
+          </a:xfrm>
+          <a:prstGeom prst="rect">
+            <a:avLst/>
+          </a:prstGeom>
+        </p:spPr>
+        <p:txBody>
+          <a:bodyPr wrap="square" lIns="0" tIns="0" rIns="0" bIns="0" rtlCol="0" anchor="t">
+            <a:spAutoFit/>
+          </a:bodyPr>
+          <a:lstStyle/>
+          <a:p>
+            <a:pPr algn="l">
+              <a:lnSpc>
+                <a:spcPts val="4480"/>
+              </a:lnSpc>
+              <a:spcBef>
+                <a:spcPct val="0"/>
+              </a:spcBef>
+            </a:pPr>
+            <a:r>
+              <a:rPr lang="en-US" altLang="zh-TW" sz="2600" dirty="0">
+                <a:latin typeface="Times New Roman" panose="02020603050405020304" pitchFamily="18" charset="0"/>
+                <a:ea typeface="標楷體" panose="03000509000000000000" pitchFamily="65" charset="-120"/>
+                <a:cs typeface="王漢宗顏楷體"/>
+                <a:sym typeface="王漢宗顏楷體"/>
+              </a:rPr>
+              <a:t>【</a:t>
+            </a:r>
+            <a:r>
+              <a:rPr lang="zh-TW" altLang="en-US" sz="2600" dirty="0">
+                <a:latin typeface="Times New Roman" panose="02020603050405020304" pitchFamily="18" charset="0"/>
+                <a:ea typeface="標楷體" panose="03000509000000000000" pitchFamily="65" charset="-120"/>
+                <a:cs typeface="王漢宗顏楷體"/>
+                <a:sym typeface="王漢宗顏楷體"/>
+              </a:rPr>
+              <a:t>預設綁定</a:t>
+            </a:r>
+            <a:r>
+              <a:rPr lang="en-US" altLang="zh-TW" sz="2600" dirty="0">
+                <a:latin typeface="Times New Roman" panose="02020603050405020304" pitchFamily="18" charset="0"/>
+                <a:ea typeface="標楷體" panose="03000509000000000000" pitchFamily="65" charset="-120"/>
+                <a:cs typeface="王漢宗顏楷體"/>
+                <a:sym typeface="王漢宗顏楷體"/>
+              </a:rPr>
+              <a:t>(Default binding)】</a:t>
+            </a:r>
+          </a:p>
+          <a:p>
+            <a:pPr marL="457200" indent="-457200" algn="l">
+              <a:lnSpc>
+                <a:spcPts val="4480"/>
+              </a:lnSpc>
+              <a:spcBef>
+                <a:spcPct val="0"/>
+              </a:spcBef>
+              <a:buFont typeface="Wingdings" panose="05000000000000000000" pitchFamily="2" charset="2"/>
+              <a:buChar char="v"/>
+            </a:pPr>
+            <a:r>
+              <a:rPr lang="zh-TW" altLang="en-US" sz="2600" dirty="0">
+                <a:latin typeface="Times New Roman" panose="02020603050405020304" pitchFamily="18" charset="0"/>
+                <a:ea typeface="標楷體" panose="03000509000000000000" pitchFamily="65" charset="-120"/>
+                <a:cs typeface="王漢宗顏楷體"/>
+                <a:sym typeface="王漢宗顏楷體"/>
+              </a:rPr>
+              <a:t>在全域宣告的函式，</a:t>
+            </a:r>
+            <a:r>
+              <a:rPr lang="en-US" altLang="zh-TW" sz="2600" dirty="0">
+                <a:latin typeface="Times New Roman" panose="02020603050405020304" pitchFamily="18" charset="0"/>
+                <a:ea typeface="標楷體" panose="03000509000000000000" pitchFamily="65" charset="-120"/>
+                <a:cs typeface="王漢宗顏楷體"/>
+                <a:sym typeface="王漢宗顏楷體"/>
+              </a:rPr>
+              <a:t>this</a:t>
+            </a:r>
+            <a:r>
+              <a:rPr lang="zh-TW" altLang="en-US" sz="2600" dirty="0">
+                <a:latin typeface="Times New Roman" panose="02020603050405020304" pitchFamily="18" charset="0"/>
+                <a:ea typeface="標楷體" panose="03000509000000000000" pitchFamily="65" charset="-120"/>
+                <a:cs typeface="王漢宗顏楷體"/>
+                <a:sym typeface="王漢宗顏楷體"/>
+              </a:rPr>
+              <a:t>會預設指向全域物件</a:t>
+            </a:r>
+            <a:r>
+              <a:rPr lang="en-US" altLang="zh-TW" sz="2600" dirty="0">
+                <a:latin typeface="Times New Roman" panose="02020603050405020304" pitchFamily="18" charset="0"/>
+                <a:ea typeface="標楷體" panose="03000509000000000000" pitchFamily="65" charset="-120"/>
+                <a:cs typeface="王漢宗顏楷體"/>
+                <a:sym typeface="王漢宗顏楷體"/>
+              </a:rPr>
+              <a:t>(</a:t>
+            </a:r>
+            <a:r>
+              <a:rPr lang="zh-TW" altLang="en-US" sz="2600" dirty="0">
+                <a:latin typeface="Times New Roman" panose="02020603050405020304" pitchFamily="18" charset="0"/>
+                <a:ea typeface="標楷體" panose="03000509000000000000" pitchFamily="65" charset="-120"/>
+                <a:cs typeface="王漢宗顏楷體"/>
+                <a:sym typeface="王漢宗顏楷體"/>
+              </a:rPr>
+              <a:t>可能是瀏覽器中的</a:t>
+            </a:r>
+            <a:r>
+              <a:rPr lang="en-US" altLang="zh-TW" sz="2600" dirty="0">
+                <a:latin typeface="Times New Roman" panose="02020603050405020304" pitchFamily="18" charset="0"/>
+                <a:ea typeface="標楷體" panose="03000509000000000000" pitchFamily="65" charset="-120"/>
+                <a:cs typeface="王漢宗顏楷體"/>
+                <a:sym typeface="王漢宗顏楷體"/>
+              </a:rPr>
+              <a:t>window</a:t>
+            </a:r>
+            <a:r>
+              <a:rPr lang="zh-TW" altLang="en-US" sz="2600" dirty="0">
+                <a:latin typeface="Times New Roman" panose="02020603050405020304" pitchFamily="18" charset="0"/>
+                <a:ea typeface="標楷體" panose="03000509000000000000" pitchFamily="65" charset="-120"/>
+                <a:cs typeface="王漢宗顏楷體"/>
+                <a:sym typeface="王漢宗顏楷體"/>
+              </a:rPr>
+              <a:t>，或是</a:t>
+            </a:r>
+            <a:r>
+              <a:rPr lang="en-US" altLang="zh-TW" sz="2600" dirty="0">
+                <a:latin typeface="Times New Roman" panose="02020603050405020304" pitchFamily="18" charset="0"/>
+                <a:ea typeface="標楷體" panose="03000509000000000000" pitchFamily="65" charset="-120"/>
+                <a:cs typeface="王漢宗顏楷體"/>
+                <a:sym typeface="王漢宗顏楷體"/>
+              </a:rPr>
+              <a:t>Node.js</a:t>
+            </a:r>
+            <a:r>
+              <a:rPr lang="zh-TW" altLang="en-US" sz="2600" dirty="0">
+                <a:latin typeface="Times New Roman" panose="02020603050405020304" pitchFamily="18" charset="0"/>
+                <a:ea typeface="標楷體" panose="03000509000000000000" pitchFamily="65" charset="-120"/>
+                <a:cs typeface="王漢宗顏楷體"/>
+                <a:sym typeface="王漢宗顏楷體"/>
+              </a:rPr>
+              <a:t>中的</a:t>
+            </a:r>
+            <a:r>
+              <a:rPr lang="en-US" altLang="zh-TW" sz="2600" dirty="0">
+                <a:latin typeface="Times New Roman" panose="02020603050405020304" pitchFamily="18" charset="0"/>
+                <a:ea typeface="標楷體" panose="03000509000000000000" pitchFamily="65" charset="-120"/>
+                <a:cs typeface="王漢宗顏楷體"/>
+                <a:sym typeface="王漢宗顏楷體"/>
+              </a:rPr>
+              <a:t>global)</a:t>
+            </a:r>
+            <a:r>
+              <a:rPr lang="zh-TW" altLang="en-US" sz="2600" dirty="0">
+                <a:latin typeface="Times New Roman" panose="02020603050405020304" pitchFamily="18" charset="0"/>
+                <a:ea typeface="標楷體" panose="03000509000000000000" pitchFamily="65" charset="-120"/>
+                <a:cs typeface="王漢宗顏楷體"/>
+                <a:sym typeface="王漢宗顏楷體"/>
+              </a:rPr>
+              <a:t>。</a:t>
+            </a:r>
+            <a:endParaRPr lang="en-US" altLang="zh-TW" sz="2600" dirty="0">
+              <a:latin typeface="Times New Roman" panose="02020603050405020304" pitchFamily="18" charset="0"/>
+              <a:ea typeface="標楷體" panose="03000509000000000000" pitchFamily="65" charset="-120"/>
+              <a:cs typeface="王漢宗顏楷體"/>
+              <a:sym typeface="王漢宗顏楷體"/>
+            </a:endParaRPr>
+          </a:p>
+        </p:txBody>
+      </p:sp>
+      <p:grpSp>
+        <p:nvGrpSpPr>
+          <p:cNvPr id="28" name="Group 2">
+            <a:extLst>
+              <a:ext uri="{FF2B5EF4-FFF2-40B4-BE49-F238E27FC236}">
+                <a16:creationId xmlns:a16="http://schemas.microsoft.com/office/drawing/2014/main" id="{C571510F-4237-4159-A25E-D023AAABD06D}"/>
+              </a:ext>
+            </a:extLst>
+          </p:cNvPr>
+          <p:cNvGrpSpPr/>
+          <p:nvPr/>
+        </p:nvGrpSpPr>
+        <p:grpSpPr>
+          <a:xfrm>
+            <a:off x="0" y="0"/>
+            <a:ext cx="18288000" cy="1691609"/>
+            <a:chOff x="0" y="0"/>
+            <a:chExt cx="4816593" cy="543967"/>
+          </a:xfrm>
+        </p:grpSpPr>
+        <p:sp>
+          <p:nvSpPr>
+            <p:cNvPr id="29" name="Freeform 3">
+              <a:extLst>
+                <a:ext uri="{FF2B5EF4-FFF2-40B4-BE49-F238E27FC236}">
+                  <a16:creationId xmlns:a16="http://schemas.microsoft.com/office/drawing/2014/main" id="{8558C2F7-92C9-4ED9-A7F6-36896AE39BAD}"/>
+                </a:ext>
+              </a:extLst>
+            </p:cNvPr>
+            <p:cNvSpPr/>
+            <p:nvPr/>
+          </p:nvSpPr>
+          <p:spPr>
+            <a:xfrm>
+              <a:off x="0" y="0"/>
+              <a:ext cx="4816592" cy="543967"/>
+            </a:xfrm>
+            <a:custGeom>
+              <a:avLst/>
+              <a:gdLst/>
+              <a:ahLst/>
+              <a:cxnLst/>
+              <a:rect l="l" t="t" r="r" b="b"/>
+              <a:pathLst>
+                <a:path w="4816592" h="543967">
+                  <a:moveTo>
+                    <a:pt x="0" y="0"/>
+                  </a:moveTo>
+                  <a:lnTo>
+                    <a:pt x="4816592" y="0"/>
+                  </a:lnTo>
+                  <a:lnTo>
+                    <a:pt x="4816592" y="543967"/>
+                  </a:lnTo>
+                  <a:lnTo>
+                    <a:pt x="0" y="543967"/>
+                  </a:lnTo>
+                  <a:close/>
+                </a:path>
+              </a:pathLst>
+            </a:custGeom>
+            <a:gradFill rotWithShape="1">
+              <a:gsLst>
+                <a:gs pos="0">
+                  <a:srgbClr val="B81B22">
+                    <a:alpha val="100000"/>
+                  </a:srgbClr>
+                </a:gs>
+                <a:gs pos="25000">
+                  <a:srgbClr val="B81B22">
+                    <a:alpha val="99500"/>
+                  </a:srgbClr>
+                </a:gs>
+                <a:gs pos="50000">
+                  <a:srgbClr val="E82A34">
+                    <a:alpha val="100000"/>
+                  </a:srgbClr>
+                </a:gs>
+                <a:gs pos="75000">
+                  <a:srgbClr val="F89DA1">
+                    <a:alpha val="100000"/>
+                  </a:srgbClr>
+                </a:gs>
+                <a:gs pos="100000">
+                  <a:srgbClr val="FFFFFF">
+                    <a:alpha val="99500"/>
+                  </a:srgbClr>
+                </a:gs>
+              </a:gsLst>
+              <a:lin ang="0"/>
+            </a:gradFill>
+          </p:spPr>
+        </p:sp>
+        <p:sp>
+          <p:nvSpPr>
+            <p:cNvPr id="30" name="TextBox 4">
+              <a:extLst>
+                <a:ext uri="{FF2B5EF4-FFF2-40B4-BE49-F238E27FC236}">
+                  <a16:creationId xmlns:a16="http://schemas.microsoft.com/office/drawing/2014/main" id="{CC107A00-22F6-47C1-AAF1-49AC9E4F1FE8}"/>
+                </a:ext>
+              </a:extLst>
+            </p:cNvPr>
+            <p:cNvSpPr txBox="1"/>
+            <p:nvPr/>
+          </p:nvSpPr>
+          <p:spPr>
+            <a:xfrm>
+              <a:off x="0" y="-47625"/>
+              <a:ext cx="4816593" cy="591592"/>
+            </a:xfrm>
+            <a:prstGeom prst="rect">
+              <a:avLst/>
+            </a:prstGeom>
+          </p:spPr>
+          <p:txBody>
+            <a:bodyPr lIns="50800" tIns="50800" rIns="50800" bIns="50800" rtlCol="0" anchor="ctr"/>
+            <a:lstStyle/>
+            <a:p>
+              <a:pPr algn="ctr">
+                <a:lnSpc>
+                  <a:spcPts val="2659"/>
+                </a:lnSpc>
+              </a:pPr>
+              <a:endParaRPr>
+                <a:latin typeface="標楷體" panose="03000509000000000000" pitchFamily="65" charset="-120"/>
+                <a:ea typeface="標楷體" panose="03000509000000000000" pitchFamily="65" charset="-120"/>
+              </a:endParaRPr>
+            </a:p>
+          </p:txBody>
+        </p:sp>
+      </p:grpSp>
+      <p:sp>
+        <p:nvSpPr>
+          <p:cNvPr id="34" name="TextBox 8">
+            <a:extLst>
+              <a:ext uri="{FF2B5EF4-FFF2-40B4-BE49-F238E27FC236}">
+                <a16:creationId xmlns:a16="http://schemas.microsoft.com/office/drawing/2014/main" id="{6A6E9B8B-C857-4E5F-B514-20784942772F}"/>
+              </a:ext>
+            </a:extLst>
+          </p:cNvPr>
+          <p:cNvSpPr txBox="1"/>
+          <p:nvPr/>
+        </p:nvSpPr>
+        <p:spPr>
+          <a:xfrm>
+            <a:off x="304800" y="110995"/>
+            <a:ext cx="9571413" cy="1321516"/>
+          </a:xfrm>
+          <a:prstGeom prst="rect">
+            <a:avLst/>
+          </a:prstGeom>
+        </p:spPr>
+        <p:txBody>
+          <a:bodyPr wrap="square" lIns="0" tIns="0" rIns="0" bIns="0" rtlCol="0" anchor="t">
+            <a:spAutoFit/>
+          </a:bodyPr>
+          <a:lstStyle/>
+          <a:p>
+            <a:pPr algn="l">
+              <a:lnSpc>
+                <a:spcPts val="11200"/>
+              </a:lnSpc>
+              <a:spcBef>
+                <a:spcPct val="0"/>
+              </a:spcBef>
+            </a:pPr>
+            <a:r>
+              <a:rPr lang="en-US" altLang="zh-TW" sz="8000" dirty="0">
+                <a:solidFill>
+                  <a:srgbClr val="FFFFFF"/>
+                </a:solidFill>
+                <a:latin typeface="Times New Roman" panose="02020603050405020304" pitchFamily="18" charset="0"/>
+                <a:ea typeface="標楷體" panose="03000509000000000000" pitchFamily="65" charset="-120"/>
+                <a:cs typeface="Times New Roman" panose="02020603050405020304" pitchFamily="18" charset="0"/>
+                <a:sym typeface="王漢宗顏楷體"/>
+              </a:rPr>
+              <a:t>this</a:t>
+            </a:r>
+          </a:p>
+        </p:txBody>
+      </p:sp>
+      <p:pic>
+        <p:nvPicPr>
+          <p:cNvPr id="3" name="圖片 2">
+            <a:extLst>
+              <a:ext uri="{FF2B5EF4-FFF2-40B4-BE49-F238E27FC236}">
+                <a16:creationId xmlns:a16="http://schemas.microsoft.com/office/drawing/2014/main" id="{0E7B2E9D-F15D-4E0C-9848-A86B04E62C6D}"/>
+              </a:ext>
+            </a:extLst>
+          </p:cNvPr>
+          <p:cNvPicPr>
+            <a:picLocks noChangeAspect="1"/>
+          </p:cNvPicPr>
+          <p:nvPr/>
+        </p:nvPicPr>
+        <p:blipFill>
+          <a:blip r:embed="rId2"/>
+          <a:stretch>
+            <a:fillRect/>
+          </a:stretch>
+        </p:blipFill>
+        <p:spPr>
+          <a:xfrm>
+            <a:off x="152400" y="3479870"/>
+            <a:ext cx="8305800" cy="3454012"/>
+          </a:xfrm>
+          <a:prstGeom prst="rect">
+            <a:avLst/>
+          </a:prstGeom>
+        </p:spPr>
+      </p:pic>
+      <p:sp>
+        <p:nvSpPr>
+          <p:cNvPr id="12" name="TextBox 10">
+            <a:extLst>
+              <a:ext uri="{FF2B5EF4-FFF2-40B4-BE49-F238E27FC236}">
+                <a16:creationId xmlns:a16="http://schemas.microsoft.com/office/drawing/2014/main" id="{6E184ED7-CACA-4524-97C3-C09BB39D3395}"/>
+              </a:ext>
+            </a:extLst>
+          </p:cNvPr>
+          <p:cNvSpPr txBox="1"/>
+          <p:nvPr/>
+        </p:nvSpPr>
+        <p:spPr>
+          <a:xfrm>
+            <a:off x="9143998" y="1709472"/>
+            <a:ext cx="7924800" cy="1666354"/>
+          </a:xfrm>
+          <a:prstGeom prst="rect">
+            <a:avLst/>
+          </a:prstGeom>
+        </p:spPr>
+        <p:txBody>
+          <a:bodyPr wrap="square" lIns="0" tIns="0" rIns="0" bIns="0" rtlCol="0" anchor="t">
+            <a:spAutoFit/>
+          </a:bodyPr>
+          <a:lstStyle/>
+          <a:p>
+            <a:pPr algn="l">
+              <a:lnSpc>
+                <a:spcPts val="4480"/>
+              </a:lnSpc>
+              <a:spcBef>
+                <a:spcPct val="0"/>
+              </a:spcBef>
+            </a:pPr>
+            <a:r>
+              <a:rPr lang="en-US" altLang="zh-TW" sz="2600" dirty="0">
+                <a:latin typeface="Times New Roman" panose="02020603050405020304" pitchFamily="18" charset="0"/>
+                <a:ea typeface="標楷體" panose="03000509000000000000" pitchFamily="65" charset="-120"/>
+                <a:cs typeface="王漢宗顏楷體"/>
+                <a:sym typeface="王漢宗顏楷體"/>
+              </a:rPr>
+              <a:t>【</a:t>
+            </a:r>
+            <a:r>
+              <a:rPr lang="zh-TW" altLang="en-US" sz="2600" dirty="0">
+                <a:latin typeface="Times New Roman" panose="02020603050405020304" pitchFamily="18" charset="0"/>
+                <a:ea typeface="標楷體" panose="03000509000000000000" pitchFamily="65" charset="-120"/>
+                <a:cs typeface="王漢宗顏楷體"/>
+                <a:sym typeface="王漢宗顏楷體"/>
+              </a:rPr>
+              <a:t>隱式綁定 </a:t>
+            </a:r>
+            <a:r>
+              <a:rPr lang="en-US" altLang="zh-TW" sz="2600" dirty="0">
+                <a:latin typeface="Times New Roman" panose="02020603050405020304" pitchFamily="18" charset="0"/>
+                <a:ea typeface="標楷體" panose="03000509000000000000" pitchFamily="65" charset="-120"/>
+                <a:cs typeface="王漢宗顏楷體"/>
+                <a:sym typeface="王漢宗顏楷體"/>
+              </a:rPr>
+              <a:t>(Implicit Binding)】</a:t>
+            </a:r>
+          </a:p>
+          <a:p>
+            <a:pPr marL="457200" indent="-457200" algn="l">
+              <a:lnSpc>
+                <a:spcPts val="4480"/>
+              </a:lnSpc>
+              <a:spcBef>
+                <a:spcPct val="0"/>
+              </a:spcBef>
+              <a:buFont typeface="Wingdings" panose="05000000000000000000" pitchFamily="2" charset="2"/>
+              <a:buChar char="v"/>
+            </a:pPr>
+            <a:r>
+              <a:rPr lang="zh-TW" altLang="en-US" sz="2600" dirty="0">
+                <a:latin typeface="Times New Roman" panose="02020603050405020304" pitchFamily="18" charset="0"/>
+                <a:ea typeface="標楷體" panose="03000509000000000000" pitchFamily="65" charset="-120"/>
+                <a:cs typeface="王漢宗顏楷體"/>
+                <a:sym typeface="王漢宗顏楷體"/>
+              </a:rPr>
+              <a:t>當函式被作為物件的方法呼叫時，</a:t>
+            </a:r>
+            <a:r>
+              <a:rPr lang="en-US" altLang="zh-TW" sz="2600" dirty="0">
+                <a:latin typeface="Times New Roman" panose="02020603050405020304" pitchFamily="18" charset="0"/>
+                <a:ea typeface="標楷體" panose="03000509000000000000" pitchFamily="65" charset="-120"/>
+                <a:cs typeface="王漢宗顏楷體"/>
+                <a:sym typeface="王漢宗顏楷體"/>
+              </a:rPr>
+              <a:t>this </a:t>
+            </a:r>
+            <a:r>
+              <a:rPr lang="zh-TW" altLang="en-US" sz="2600" dirty="0">
+                <a:latin typeface="Times New Roman" panose="02020603050405020304" pitchFamily="18" charset="0"/>
+                <a:ea typeface="標楷體" panose="03000509000000000000" pitchFamily="65" charset="-120"/>
+                <a:cs typeface="王漢宗顏楷體"/>
+                <a:sym typeface="王漢宗顏楷體"/>
+              </a:rPr>
+              <a:t>會被綁定到呼叫該函式的物件。</a:t>
+            </a:r>
+            <a:endParaRPr lang="en-US" altLang="zh-TW" sz="2600" dirty="0">
+              <a:latin typeface="Times New Roman" panose="02020603050405020304" pitchFamily="18" charset="0"/>
+              <a:ea typeface="標楷體" panose="03000509000000000000" pitchFamily="65" charset="-120"/>
+              <a:cs typeface="王漢宗顏楷體"/>
+              <a:sym typeface="王漢宗顏楷體"/>
+            </a:endParaRPr>
+          </a:p>
+        </p:txBody>
+      </p:sp>
+      <p:sp>
+        <p:nvSpPr>
+          <p:cNvPr id="13" name="TextBox 10">
+            <a:extLst>
+              <a:ext uri="{FF2B5EF4-FFF2-40B4-BE49-F238E27FC236}">
+                <a16:creationId xmlns:a16="http://schemas.microsoft.com/office/drawing/2014/main" id="{1682B9FA-F60E-44B1-99DA-77C217DAD648}"/>
+              </a:ext>
+            </a:extLst>
+          </p:cNvPr>
+          <p:cNvSpPr txBox="1"/>
+          <p:nvPr/>
+        </p:nvSpPr>
+        <p:spPr>
+          <a:xfrm>
+            <a:off x="190500" y="7055789"/>
+            <a:ext cx="7924800" cy="1089273"/>
+          </a:xfrm>
+          <a:prstGeom prst="rect">
+            <a:avLst/>
+          </a:prstGeom>
+        </p:spPr>
+        <p:txBody>
+          <a:bodyPr wrap="square" lIns="0" tIns="0" rIns="0" bIns="0" rtlCol="0" anchor="t">
+            <a:spAutoFit/>
+          </a:bodyPr>
+          <a:lstStyle/>
+          <a:p>
+            <a:pPr marL="457200" indent="-457200" algn="l">
+              <a:lnSpc>
+                <a:spcPts val="4480"/>
+              </a:lnSpc>
+              <a:spcBef>
+                <a:spcPct val="0"/>
+              </a:spcBef>
+              <a:buFont typeface="Wingdings" panose="05000000000000000000" pitchFamily="2" charset="2"/>
+              <a:buChar char="v"/>
+            </a:pPr>
+            <a:r>
+              <a:rPr lang="zh-TW" altLang="en-US" sz="2600" dirty="0">
+                <a:latin typeface="Times New Roman" panose="02020603050405020304" pitchFamily="18" charset="0"/>
+                <a:ea typeface="標楷體" panose="03000509000000000000" pitchFamily="65" charset="-120"/>
+                <a:cs typeface="王漢宗顏楷體"/>
+                <a:sym typeface="王漢宗顏楷體"/>
+              </a:rPr>
+              <a:t>箭頭函式 </a:t>
+            </a:r>
+            <a:r>
+              <a:rPr lang="en-US" altLang="zh-TW" sz="2600" dirty="0">
+                <a:latin typeface="Times New Roman" panose="02020603050405020304" pitchFamily="18" charset="0"/>
+                <a:ea typeface="標楷體" panose="03000509000000000000" pitchFamily="65" charset="-120"/>
+                <a:cs typeface="王漢宗顏楷體"/>
+                <a:sym typeface="王漢宗顏楷體"/>
+              </a:rPr>
+              <a:t>(Arrow Function) </a:t>
+            </a:r>
+            <a:r>
+              <a:rPr lang="zh-TW" altLang="en-US" sz="2600" dirty="0">
+                <a:latin typeface="Times New Roman" panose="02020603050405020304" pitchFamily="18" charset="0"/>
+                <a:ea typeface="標楷體" panose="03000509000000000000" pitchFamily="65" charset="-120"/>
+                <a:cs typeface="王漢宗顏楷體"/>
+                <a:sym typeface="王漢宗顏楷體"/>
+              </a:rPr>
+              <a:t>不會依循預設綁定。它的 </a:t>
+            </a:r>
+            <a:r>
+              <a:rPr lang="en-US" altLang="zh-TW" sz="2600" dirty="0">
+                <a:latin typeface="Times New Roman" panose="02020603050405020304" pitchFamily="18" charset="0"/>
+                <a:ea typeface="標楷體" panose="03000509000000000000" pitchFamily="65" charset="-120"/>
+                <a:cs typeface="王漢宗顏楷體"/>
+                <a:sym typeface="王漢宗顏楷體"/>
+              </a:rPr>
+              <a:t>this </a:t>
+            </a:r>
+            <a:r>
+              <a:rPr lang="zh-TW" altLang="en-US" sz="2600" dirty="0">
+                <a:latin typeface="Times New Roman" panose="02020603050405020304" pitchFamily="18" charset="0"/>
+                <a:ea typeface="標楷體" panose="03000509000000000000" pitchFamily="65" charset="-120"/>
+                <a:cs typeface="王漢宗顏楷體"/>
+                <a:sym typeface="王漢宗顏楷體"/>
+              </a:rPr>
+              <a:t>是由定義時的作用域決定，而非執行時決定。</a:t>
+            </a:r>
+            <a:endParaRPr lang="en-US" altLang="zh-TW" sz="2600" dirty="0">
+              <a:latin typeface="Times New Roman" panose="02020603050405020304" pitchFamily="18" charset="0"/>
+              <a:ea typeface="標楷體" panose="03000509000000000000" pitchFamily="65" charset="-120"/>
+              <a:cs typeface="王漢宗顏楷體"/>
+              <a:sym typeface="王漢宗顏楷體"/>
+            </a:endParaRPr>
+          </a:p>
+        </p:txBody>
+      </p:sp>
+      <p:pic>
+        <p:nvPicPr>
+          <p:cNvPr id="6" name="圖片 5">
+            <a:extLst>
+              <a:ext uri="{FF2B5EF4-FFF2-40B4-BE49-F238E27FC236}">
+                <a16:creationId xmlns:a16="http://schemas.microsoft.com/office/drawing/2014/main" id="{07B97D44-0F2A-4F90-B265-EF035DE23E8B}"/>
+              </a:ext>
+            </a:extLst>
+          </p:cNvPr>
+          <p:cNvPicPr>
+            <a:picLocks noChangeAspect="1"/>
+          </p:cNvPicPr>
+          <p:nvPr/>
+        </p:nvPicPr>
+        <p:blipFill>
+          <a:blip r:embed="rId3"/>
+          <a:stretch>
+            <a:fillRect/>
+          </a:stretch>
+        </p:blipFill>
+        <p:spPr>
+          <a:xfrm>
+            <a:off x="8534400" y="3479870"/>
+            <a:ext cx="9543163" cy="2882830"/>
+          </a:xfrm>
+          <a:prstGeom prst="rect">
+            <a:avLst/>
+          </a:prstGeom>
+        </p:spPr>
+      </p:pic>
+      <p:sp>
+        <p:nvSpPr>
+          <p:cNvPr id="15" name="TextBox 10">
+            <a:extLst>
+              <a:ext uri="{FF2B5EF4-FFF2-40B4-BE49-F238E27FC236}">
+                <a16:creationId xmlns:a16="http://schemas.microsoft.com/office/drawing/2014/main" id="{7F4476D4-8E29-4EEB-B3A7-AD99946B9CBC}"/>
+              </a:ext>
+            </a:extLst>
+          </p:cNvPr>
+          <p:cNvSpPr txBox="1"/>
+          <p:nvPr/>
+        </p:nvSpPr>
+        <p:spPr>
+          <a:xfrm>
+            <a:off x="9143997" y="6389245"/>
+            <a:ext cx="8933565" cy="1089273"/>
+          </a:xfrm>
+          <a:prstGeom prst="rect">
+            <a:avLst/>
+          </a:prstGeom>
+        </p:spPr>
+        <p:txBody>
+          <a:bodyPr wrap="square" lIns="0" tIns="0" rIns="0" bIns="0" rtlCol="0" anchor="t">
+            <a:spAutoFit/>
+          </a:bodyPr>
+          <a:lstStyle/>
+          <a:p>
+            <a:pPr marL="457200" indent="-457200" algn="l">
+              <a:lnSpc>
+                <a:spcPts val="4480"/>
+              </a:lnSpc>
+              <a:spcBef>
+                <a:spcPct val="0"/>
+              </a:spcBef>
+              <a:buFont typeface="Wingdings" panose="05000000000000000000" pitchFamily="2" charset="2"/>
+              <a:buChar char="v"/>
+            </a:pPr>
+            <a:r>
+              <a:rPr lang="zh-TW" altLang="en-US" sz="2600" dirty="0">
+                <a:latin typeface="Times New Roman" panose="02020603050405020304" pitchFamily="18" charset="0"/>
+                <a:ea typeface="標楷體" panose="03000509000000000000" pitchFamily="65" charset="-120"/>
+                <a:cs typeface="王漢宗顏楷體"/>
+                <a:sym typeface="王漢宗顏楷體"/>
+              </a:rPr>
+              <a:t>箭頭函式不會符合隱式綁定規則，因為它的 </a:t>
+            </a:r>
+            <a:r>
+              <a:rPr lang="en-US" altLang="zh-TW" sz="2600" dirty="0">
+                <a:latin typeface="Times New Roman" panose="02020603050405020304" pitchFamily="18" charset="0"/>
+                <a:ea typeface="標楷體" panose="03000509000000000000" pitchFamily="65" charset="-120"/>
+                <a:cs typeface="王漢宗顏楷體"/>
+                <a:sym typeface="王漢宗顏楷體"/>
+              </a:rPr>
+              <a:t>this </a:t>
+            </a:r>
+            <a:r>
+              <a:rPr lang="zh-TW" altLang="en-US" sz="2600" dirty="0">
+                <a:latin typeface="Times New Roman" panose="02020603050405020304" pitchFamily="18" charset="0"/>
+                <a:ea typeface="標楷體" panose="03000509000000000000" pitchFamily="65" charset="-120"/>
+                <a:cs typeface="王漢宗顏楷體"/>
+                <a:sym typeface="王漢宗顏楷體"/>
+              </a:rPr>
+              <a:t>始終由它定義時的作用域決定。</a:t>
+            </a:r>
+            <a:endParaRPr lang="en-US" altLang="zh-TW" sz="2600" dirty="0">
+              <a:latin typeface="Times New Roman" panose="02020603050405020304" pitchFamily="18" charset="0"/>
+              <a:ea typeface="標楷體" panose="03000509000000000000" pitchFamily="65" charset="-120"/>
+              <a:cs typeface="王漢宗顏楷體"/>
+              <a:sym typeface="王漢宗顏楷體"/>
+            </a:endParaRPr>
+          </a:p>
+        </p:txBody>
+      </p:sp>
+    </p:spTree>
+    <p:extLst>
+      <p:ext uri="{BB962C8B-B14F-4D97-AF65-F5344CB8AC3E}">
+        <p14:creationId xmlns:p14="http://schemas.microsoft.com/office/powerpoint/2010/main" val="3931548439"/>
+      </p:ext>
+    </p:extLst>
+  </p:cSld>
+  <p:clrMapOvr>
+    <a:masterClrMapping/>
+  </p:clrMapOvr>
+</p:sld>
+</file>
+
+<file path=ppt/slides/slide29.xml><?xml version="1.0" encoding="utf-8"?>
+<p:sld xmlns:a="http://schemas.openxmlformats.org/drawingml/2006/main" xmlns:r="http://schemas.openxmlformats.org/officeDocument/2006/relationships" xmlns:p="http://schemas.openxmlformats.org/presentationml/2006/main">
+  <p:cSld>
+    <p:spTree>
+      <p:nvGrpSpPr>
+        <p:cNvPr id="1" name=""/>
+        <p:cNvGrpSpPr/>
+        <p:nvPr/>
+      </p:nvGrpSpPr>
+      <p:grpSpPr>
+        <a:xfrm>
+          <a:off x="0" y="0"/>
+          <a:ext cx="0" cy="0"/>
+          <a:chOff x="0" y="0"/>
+          <a:chExt cx="0" cy="0"/>
+        </a:xfrm>
+      </p:grpSpPr>
+      <p:sp>
+        <p:nvSpPr>
+          <p:cNvPr id="27" name="TextBox 10">
+            <a:extLst>
+              <a:ext uri="{FF2B5EF4-FFF2-40B4-BE49-F238E27FC236}">
+                <a16:creationId xmlns:a16="http://schemas.microsoft.com/office/drawing/2014/main" id="{2A659F81-1ED8-4106-8C45-6A01D7DBC583}"/>
+              </a:ext>
+            </a:extLst>
+          </p:cNvPr>
+          <p:cNvSpPr txBox="1"/>
+          <p:nvPr/>
+        </p:nvSpPr>
+        <p:spPr>
+          <a:xfrm>
+            <a:off x="228600" y="2336890"/>
+            <a:ext cx="15621000" cy="2819298"/>
+          </a:xfrm>
+          <a:prstGeom prst="rect">
+            <a:avLst/>
+          </a:prstGeom>
+        </p:spPr>
+        <p:txBody>
+          <a:bodyPr wrap="square" lIns="0" tIns="0" rIns="0" bIns="0" rtlCol="0" anchor="t">
+            <a:spAutoFit/>
+          </a:bodyPr>
+          <a:lstStyle/>
+          <a:p>
+            <a:pPr algn="l">
+              <a:lnSpc>
+                <a:spcPts val="4480"/>
+              </a:lnSpc>
+              <a:spcBef>
+                <a:spcPct val="0"/>
+              </a:spcBef>
+            </a:pPr>
+            <a:r>
+              <a:rPr lang="en-US" altLang="zh-TW" sz="2600" dirty="0">
+                <a:latin typeface="Times New Roman" panose="02020603050405020304" pitchFamily="18" charset="0"/>
+                <a:ea typeface="標楷體" panose="03000509000000000000" pitchFamily="65" charset="-120"/>
+                <a:cs typeface="王漢宗顏楷體"/>
+                <a:sym typeface="王漢宗顏楷體"/>
+              </a:rPr>
+              <a:t>【</a:t>
+            </a:r>
+            <a:r>
+              <a:rPr lang="zh-TW" altLang="en-US" sz="2600" dirty="0">
+                <a:latin typeface="Times New Roman" panose="02020603050405020304" pitchFamily="18" charset="0"/>
+                <a:ea typeface="標楷體" panose="03000509000000000000" pitchFamily="65" charset="-120"/>
+                <a:cs typeface="王漢宗顏楷體"/>
+                <a:sym typeface="王漢宗顏楷體"/>
+              </a:rPr>
+              <a:t>綁定函數</a:t>
+            </a:r>
+            <a:r>
+              <a:rPr lang="en-US" altLang="zh-TW" sz="2600" dirty="0">
+                <a:latin typeface="Times New Roman" panose="02020603050405020304" pitchFamily="18" charset="0"/>
+                <a:ea typeface="標楷體" panose="03000509000000000000" pitchFamily="65" charset="-120"/>
+                <a:cs typeface="王漢宗顏楷體"/>
+                <a:sym typeface="王漢宗顏楷體"/>
+              </a:rPr>
+              <a:t>(bind function)】</a:t>
+            </a:r>
+          </a:p>
+          <a:p>
+            <a:pPr marL="457200" indent="-457200" algn="l">
+              <a:lnSpc>
+                <a:spcPts val="4480"/>
+              </a:lnSpc>
+              <a:spcBef>
+                <a:spcPct val="0"/>
+              </a:spcBef>
+              <a:buFont typeface="Wingdings" panose="05000000000000000000" pitchFamily="2" charset="2"/>
+              <a:buChar char="v"/>
+            </a:pPr>
+            <a:r>
+              <a:rPr lang="en-US" altLang="zh-TW" sz="2600" dirty="0">
+                <a:latin typeface="Times New Roman" panose="02020603050405020304" pitchFamily="18" charset="0"/>
+                <a:ea typeface="標楷體" panose="03000509000000000000" pitchFamily="65" charset="-120"/>
+                <a:cs typeface="王漢宗顏楷體"/>
+                <a:sym typeface="王漢宗顏楷體"/>
+              </a:rPr>
+              <a:t>bind</a:t>
+            </a:r>
+            <a:r>
+              <a:rPr lang="zh-TW" altLang="en-US" sz="2600" dirty="0">
+                <a:latin typeface="Times New Roman" panose="02020603050405020304" pitchFamily="18" charset="0"/>
+                <a:ea typeface="標楷體" panose="03000509000000000000" pitchFamily="65" charset="-120"/>
+                <a:cs typeface="王漢宗顏楷體"/>
+                <a:sym typeface="王漢宗顏楷體"/>
+              </a:rPr>
+              <a:t>可以讓你創建一個新的函式，這個函式的</a:t>
+            </a:r>
+            <a:r>
+              <a:rPr lang="en-US" altLang="zh-TW" sz="2600" dirty="0">
+                <a:latin typeface="Times New Roman" panose="02020603050405020304" pitchFamily="18" charset="0"/>
+                <a:ea typeface="標楷體" panose="03000509000000000000" pitchFamily="65" charset="-120"/>
+                <a:cs typeface="王漢宗顏楷體"/>
+                <a:sym typeface="王漢宗顏楷體"/>
+              </a:rPr>
+              <a:t>this</a:t>
+            </a:r>
+            <a:r>
+              <a:rPr lang="zh-TW" altLang="en-US" sz="2600" dirty="0">
+                <a:latin typeface="Times New Roman" panose="02020603050405020304" pitchFamily="18" charset="0"/>
+                <a:ea typeface="標楷體" panose="03000509000000000000" pitchFamily="65" charset="-120"/>
+                <a:cs typeface="王漢宗顏楷體"/>
+                <a:sym typeface="王漢宗顏楷體"/>
+              </a:rPr>
+              <a:t>被綁定到特定對象，並且可以預設某些參數。</a:t>
+            </a:r>
+            <a:endParaRPr lang="en-US" altLang="zh-TW" sz="2600" dirty="0">
+              <a:latin typeface="Times New Roman" panose="02020603050405020304" pitchFamily="18" charset="0"/>
+              <a:ea typeface="標楷體" panose="03000509000000000000" pitchFamily="65" charset="-120"/>
+              <a:cs typeface="王漢宗顏楷體"/>
+              <a:sym typeface="王漢宗顏楷體"/>
+            </a:endParaRPr>
+          </a:p>
+          <a:p>
+            <a:pPr marL="457200" indent="-457200" algn="l">
+              <a:lnSpc>
+                <a:spcPts val="4480"/>
+              </a:lnSpc>
+              <a:spcBef>
+                <a:spcPct val="0"/>
+              </a:spcBef>
+              <a:buFont typeface="Wingdings" panose="05000000000000000000" pitchFamily="2" charset="2"/>
+              <a:buChar char="v"/>
+            </a:pPr>
+            <a:r>
+              <a:rPr lang="en-US" altLang="zh-TW" sz="2600" dirty="0" err="1">
+                <a:latin typeface="Times New Roman" panose="02020603050405020304" pitchFamily="18" charset="0"/>
+                <a:ea typeface="標楷體" panose="03000509000000000000" pitchFamily="65" charset="-120"/>
+                <a:cs typeface="王漢宗顏楷體"/>
+                <a:sym typeface="王漢宗顏楷體"/>
+              </a:rPr>
+              <a:t>function.bind</a:t>
+            </a:r>
+            <a:r>
+              <a:rPr lang="en-US" altLang="zh-TW" sz="2600" dirty="0">
+                <a:latin typeface="Times New Roman" panose="02020603050405020304" pitchFamily="18" charset="0"/>
+                <a:ea typeface="標楷體" panose="03000509000000000000" pitchFamily="65" charset="-120"/>
+                <a:cs typeface="王漢宗顏楷體"/>
+                <a:sym typeface="王漢宗顏楷體"/>
+              </a:rPr>
+              <a:t>(</a:t>
+            </a:r>
+            <a:r>
+              <a:rPr lang="en-US" altLang="zh-TW" sz="2600" dirty="0" err="1">
+                <a:latin typeface="Times New Roman" panose="02020603050405020304" pitchFamily="18" charset="0"/>
+                <a:ea typeface="標楷體" panose="03000509000000000000" pitchFamily="65" charset="-120"/>
+                <a:cs typeface="王漢宗顏楷體"/>
+                <a:sym typeface="王漢宗顏楷體"/>
+              </a:rPr>
+              <a:t>thisValue</a:t>
+            </a:r>
+            <a:r>
+              <a:rPr lang="en-US" altLang="zh-TW" sz="2600" dirty="0">
+                <a:latin typeface="Times New Roman" panose="02020603050405020304" pitchFamily="18" charset="0"/>
+                <a:ea typeface="標楷體" panose="03000509000000000000" pitchFamily="65" charset="-120"/>
+                <a:cs typeface="王漢宗顏楷體"/>
+                <a:sym typeface="王漢宗顏楷體"/>
+              </a:rPr>
+              <a:t>, arg1, arg2, ..., </a:t>
+            </a:r>
+            <a:r>
+              <a:rPr lang="en-US" altLang="zh-TW" sz="2600" dirty="0" err="1">
+                <a:latin typeface="Times New Roman" panose="02020603050405020304" pitchFamily="18" charset="0"/>
+                <a:ea typeface="標楷體" panose="03000509000000000000" pitchFamily="65" charset="-120"/>
+                <a:cs typeface="王漢宗顏楷體"/>
+                <a:sym typeface="王漢宗顏楷體"/>
+              </a:rPr>
+              <a:t>argN</a:t>
+            </a:r>
+            <a:r>
+              <a:rPr lang="en-US" altLang="zh-TW" sz="2600" dirty="0">
+                <a:latin typeface="Times New Roman" panose="02020603050405020304" pitchFamily="18" charset="0"/>
+                <a:ea typeface="標楷體" panose="03000509000000000000" pitchFamily="65" charset="-120"/>
+                <a:cs typeface="王漢宗顏楷體"/>
+                <a:sym typeface="王漢宗顏楷體"/>
+              </a:rPr>
+              <a:t>);</a:t>
+            </a:r>
+          </a:p>
+          <a:p>
+            <a:pPr marL="914400" lvl="1" indent="-457200">
+              <a:lnSpc>
+                <a:spcPts val="4480"/>
+              </a:lnSpc>
+              <a:spcBef>
+                <a:spcPct val="0"/>
+              </a:spcBef>
+              <a:buFont typeface="Wingdings" panose="05000000000000000000" pitchFamily="2" charset="2"/>
+              <a:buChar char="v"/>
+            </a:pPr>
+            <a:r>
+              <a:rPr lang="en-US" altLang="zh-TW" sz="2600" dirty="0" err="1">
+                <a:latin typeface="Times New Roman" panose="02020603050405020304" pitchFamily="18" charset="0"/>
+                <a:ea typeface="標楷體" panose="03000509000000000000" pitchFamily="65" charset="-120"/>
+                <a:cs typeface="王漢宗顏楷體"/>
+                <a:sym typeface="王漢宗顏楷體"/>
+              </a:rPr>
+              <a:t>thisValue</a:t>
+            </a:r>
+            <a:r>
+              <a:rPr lang="zh-TW" altLang="en-US" sz="2600" dirty="0">
+                <a:latin typeface="Times New Roman" panose="02020603050405020304" pitchFamily="18" charset="0"/>
+                <a:ea typeface="標楷體" panose="03000509000000000000" pitchFamily="65" charset="-120"/>
+                <a:cs typeface="王漢宗顏楷體"/>
+                <a:sym typeface="王漢宗顏楷體"/>
+              </a:rPr>
+              <a:t>：要綁定的</a:t>
+            </a:r>
+            <a:r>
+              <a:rPr lang="en-US" altLang="zh-TW" sz="2600" dirty="0">
+                <a:latin typeface="Times New Roman" panose="02020603050405020304" pitchFamily="18" charset="0"/>
+                <a:ea typeface="標楷體" panose="03000509000000000000" pitchFamily="65" charset="-120"/>
+                <a:cs typeface="王漢宗顏楷體"/>
+                <a:sym typeface="王漢宗顏楷體"/>
+              </a:rPr>
+              <a:t>this</a:t>
+            </a:r>
+            <a:r>
+              <a:rPr lang="zh-TW" altLang="en-US" sz="2600" dirty="0">
+                <a:latin typeface="Times New Roman" panose="02020603050405020304" pitchFamily="18" charset="0"/>
+                <a:ea typeface="標楷體" panose="03000509000000000000" pitchFamily="65" charset="-120"/>
+                <a:cs typeface="王漢宗顏楷體"/>
+                <a:sym typeface="王漢宗顏楷體"/>
+              </a:rPr>
+              <a:t>對象，必須指定。</a:t>
+            </a:r>
+            <a:endParaRPr lang="en-US" altLang="zh-TW" sz="2600" dirty="0">
+              <a:latin typeface="Times New Roman" panose="02020603050405020304" pitchFamily="18" charset="0"/>
+              <a:ea typeface="標楷體" panose="03000509000000000000" pitchFamily="65" charset="-120"/>
+              <a:cs typeface="王漢宗顏楷體"/>
+              <a:sym typeface="王漢宗顏楷體"/>
+            </a:endParaRPr>
+          </a:p>
+          <a:p>
+            <a:pPr marL="914400" lvl="1" indent="-457200">
+              <a:lnSpc>
+                <a:spcPts val="4480"/>
+              </a:lnSpc>
+              <a:spcBef>
+                <a:spcPct val="0"/>
+              </a:spcBef>
+              <a:buFont typeface="Wingdings" panose="05000000000000000000" pitchFamily="2" charset="2"/>
+              <a:buChar char="v"/>
+            </a:pPr>
+            <a:r>
+              <a:rPr lang="en-US" altLang="zh-TW" sz="2600" dirty="0">
+                <a:latin typeface="Times New Roman" panose="02020603050405020304" pitchFamily="18" charset="0"/>
+                <a:ea typeface="標楷體" panose="03000509000000000000" pitchFamily="65" charset="-120"/>
+                <a:cs typeface="王漢宗顏楷體"/>
+                <a:sym typeface="王漢宗顏楷體"/>
+              </a:rPr>
+              <a:t>arg1, arg2, ..., </a:t>
+            </a:r>
+            <a:r>
+              <a:rPr lang="en-US" altLang="zh-TW" sz="2600" dirty="0" err="1">
+                <a:latin typeface="Times New Roman" panose="02020603050405020304" pitchFamily="18" charset="0"/>
+                <a:ea typeface="標楷體" panose="03000509000000000000" pitchFamily="65" charset="-120"/>
+                <a:cs typeface="王漢宗顏楷體"/>
+                <a:sym typeface="王漢宗顏楷體"/>
+              </a:rPr>
+              <a:t>argN</a:t>
+            </a:r>
+            <a:r>
+              <a:rPr lang="zh-TW" altLang="en-US" sz="2600" dirty="0">
+                <a:latin typeface="Times New Roman" panose="02020603050405020304" pitchFamily="18" charset="0"/>
+                <a:ea typeface="標楷體" panose="03000509000000000000" pitchFamily="65" charset="-120"/>
+                <a:cs typeface="王漢宗顏楷體"/>
+                <a:sym typeface="王漢宗顏楷體"/>
+              </a:rPr>
+              <a:t>：可選的參數列表。</a:t>
+            </a:r>
+            <a:endParaRPr lang="en-US" altLang="zh-TW" sz="2600" dirty="0">
+              <a:latin typeface="Times New Roman" panose="02020603050405020304" pitchFamily="18" charset="0"/>
+              <a:ea typeface="標楷體" panose="03000509000000000000" pitchFamily="65" charset="-120"/>
+              <a:cs typeface="王漢宗顏楷體"/>
+              <a:sym typeface="王漢宗顏楷體"/>
+            </a:endParaRPr>
+          </a:p>
+        </p:txBody>
+      </p:sp>
+      <p:grpSp>
+        <p:nvGrpSpPr>
+          <p:cNvPr id="28" name="Group 2">
+            <a:extLst>
+              <a:ext uri="{FF2B5EF4-FFF2-40B4-BE49-F238E27FC236}">
+                <a16:creationId xmlns:a16="http://schemas.microsoft.com/office/drawing/2014/main" id="{C571510F-4237-4159-A25E-D023AAABD06D}"/>
+              </a:ext>
+            </a:extLst>
+          </p:cNvPr>
+          <p:cNvGrpSpPr/>
+          <p:nvPr/>
+        </p:nvGrpSpPr>
+        <p:grpSpPr>
+          <a:xfrm>
+            <a:off x="0" y="0"/>
+            <a:ext cx="18288000" cy="1691609"/>
+            <a:chOff x="0" y="0"/>
+            <a:chExt cx="4816593" cy="543967"/>
+          </a:xfrm>
+        </p:grpSpPr>
+        <p:sp>
+          <p:nvSpPr>
+            <p:cNvPr id="29" name="Freeform 3">
+              <a:extLst>
+                <a:ext uri="{FF2B5EF4-FFF2-40B4-BE49-F238E27FC236}">
+                  <a16:creationId xmlns:a16="http://schemas.microsoft.com/office/drawing/2014/main" id="{8558C2F7-92C9-4ED9-A7F6-36896AE39BAD}"/>
+                </a:ext>
+              </a:extLst>
+            </p:cNvPr>
+            <p:cNvSpPr/>
+            <p:nvPr/>
+          </p:nvSpPr>
+          <p:spPr>
+            <a:xfrm>
+              <a:off x="0" y="0"/>
+              <a:ext cx="4816592" cy="543967"/>
+            </a:xfrm>
+            <a:custGeom>
+              <a:avLst/>
+              <a:gdLst/>
+              <a:ahLst/>
+              <a:cxnLst/>
+              <a:rect l="l" t="t" r="r" b="b"/>
+              <a:pathLst>
+                <a:path w="4816592" h="543967">
+                  <a:moveTo>
+                    <a:pt x="0" y="0"/>
+                  </a:moveTo>
+                  <a:lnTo>
+                    <a:pt x="4816592" y="0"/>
+                  </a:lnTo>
+                  <a:lnTo>
+                    <a:pt x="4816592" y="543967"/>
+                  </a:lnTo>
+                  <a:lnTo>
+                    <a:pt x="0" y="543967"/>
+                  </a:lnTo>
+                  <a:close/>
+                </a:path>
+              </a:pathLst>
+            </a:custGeom>
+            <a:gradFill rotWithShape="1">
+              <a:gsLst>
+                <a:gs pos="0">
+                  <a:srgbClr val="B81B22">
+                    <a:alpha val="100000"/>
+                  </a:srgbClr>
+                </a:gs>
+                <a:gs pos="25000">
+                  <a:srgbClr val="B81B22">
+                    <a:alpha val="99500"/>
+                  </a:srgbClr>
+                </a:gs>
+                <a:gs pos="50000">
+                  <a:srgbClr val="E82A34">
+                    <a:alpha val="100000"/>
+                  </a:srgbClr>
+                </a:gs>
+                <a:gs pos="75000">
+                  <a:srgbClr val="F89DA1">
+                    <a:alpha val="100000"/>
+                  </a:srgbClr>
+                </a:gs>
+                <a:gs pos="100000">
+                  <a:srgbClr val="FFFFFF">
+                    <a:alpha val="99500"/>
+                  </a:srgbClr>
+                </a:gs>
+              </a:gsLst>
+              <a:lin ang="0"/>
+            </a:gradFill>
+          </p:spPr>
+        </p:sp>
+        <p:sp>
+          <p:nvSpPr>
+            <p:cNvPr id="30" name="TextBox 4">
+              <a:extLst>
+                <a:ext uri="{FF2B5EF4-FFF2-40B4-BE49-F238E27FC236}">
+                  <a16:creationId xmlns:a16="http://schemas.microsoft.com/office/drawing/2014/main" id="{CC107A00-22F6-47C1-AAF1-49AC9E4F1FE8}"/>
+                </a:ext>
+              </a:extLst>
+            </p:cNvPr>
+            <p:cNvSpPr txBox="1"/>
+            <p:nvPr/>
+          </p:nvSpPr>
+          <p:spPr>
+            <a:xfrm>
+              <a:off x="0" y="-47625"/>
+              <a:ext cx="4816593" cy="591592"/>
+            </a:xfrm>
+            <a:prstGeom prst="rect">
+              <a:avLst/>
+            </a:prstGeom>
+          </p:spPr>
+          <p:txBody>
+            <a:bodyPr lIns="50800" tIns="50800" rIns="50800" bIns="50800" rtlCol="0" anchor="ctr"/>
+            <a:lstStyle/>
+            <a:p>
+              <a:pPr algn="ctr">
+                <a:lnSpc>
+                  <a:spcPts val="2659"/>
+                </a:lnSpc>
+              </a:pPr>
+              <a:endParaRPr>
+                <a:latin typeface="標楷體" panose="03000509000000000000" pitchFamily="65" charset="-120"/>
+                <a:ea typeface="標楷體" panose="03000509000000000000" pitchFamily="65" charset="-120"/>
+              </a:endParaRPr>
+            </a:p>
+          </p:txBody>
+        </p:sp>
+      </p:grpSp>
+      <p:sp>
+        <p:nvSpPr>
+          <p:cNvPr id="34" name="TextBox 8">
+            <a:extLst>
+              <a:ext uri="{FF2B5EF4-FFF2-40B4-BE49-F238E27FC236}">
+                <a16:creationId xmlns:a16="http://schemas.microsoft.com/office/drawing/2014/main" id="{6A6E9B8B-C857-4E5F-B514-20784942772F}"/>
+              </a:ext>
+            </a:extLst>
+          </p:cNvPr>
+          <p:cNvSpPr txBox="1"/>
+          <p:nvPr/>
+        </p:nvSpPr>
+        <p:spPr>
+          <a:xfrm>
+            <a:off x="304800" y="110995"/>
+            <a:ext cx="12801600" cy="1321516"/>
+          </a:xfrm>
+          <a:prstGeom prst="rect">
+            <a:avLst/>
+          </a:prstGeom>
+        </p:spPr>
+        <p:txBody>
+          <a:bodyPr wrap="square" lIns="0" tIns="0" rIns="0" bIns="0" rtlCol="0" anchor="t">
+            <a:spAutoFit/>
+          </a:bodyPr>
+          <a:lstStyle/>
+          <a:p>
+            <a:pPr algn="l">
+              <a:lnSpc>
+                <a:spcPts val="11200"/>
+              </a:lnSpc>
+              <a:spcBef>
+                <a:spcPct val="0"/>
+              </a:spcBef>
+            </a:pPr>
+            <a:r>
+              <a:rPr lang="zh-TW" altLang="en-US" sz="8000" dirty="0">
+                <a:solidFill>
+                  <a:srgbClr val="FFFFFF"/>
+                </a:solidFill>
+                <a:latin typeface="Times New Roman" panose="02020603050405020304" pitchFamily="18" charset="0"/>
+                <a:ea typeface="標楷體" panose="03000509000000000000" pitchFamily="65" charset="-120"/>
+                <a:cs typeface="Times New Roman" panose="02020603050405020304" pitchFamily="18" charset="0"/>
+                <a:sym typeface="王漢宗顏楷體"/>
+              </a:rPr>
+              <a:t>顯式綁定</a:t>
+            </a:r>
+            <a:r>
+              <a:rPr lang="en-US" altLang="zh-TW" sz="8000" dirty="0">
+                <a:solidFill>
+                  <a:srgbClr val="FFFFFF"/>
+                </a:solidFill>
+                <a:latin typeface="Times New Roman" panose="02020603050405020304" pitchFamily="18" charset="0"/>
+                <a:ea typeface="標楷體" panose="03000509000000000000" pitchFamily="65" charset="-120"/>
+                <a:cs typeface="Times New Roman" panose="02020603050405020304" pitchFamily="18" charset="0"/>
+                <a:sym typeface="王漢宗顏楷體"/>
+              </a:rPr>
+              <a:t>(Explicit binding)</a:t>
+            </a:r>
+          </a:p>
+        </p:txBody>
+      </p:sp>
+      <p:sp>
+        <p:nvSpPr>
+          <p:cNvPr id="9" name="TextBox 10">
+            <a:extLst>
+              <a:ext uri="{FF2B5EF4-FFF2-40B4-BE49-F238E27FC236}">
+                <a16:creationId xmlns:a16="http://schemas.microsoft.com/office/drawing/2014/main" id="{A3ECE576-DAB0-4C90-B61B-A1B3923C39AE}"/>
+              </a:ext>
+            </a:extLst>
+          </p:cNvPr>
+          <p:cNvSpPr txBox="1"/>
+          <p:nvPr/>
+        </p:nvSpPr>
+        <p:spPr>
+          <a:xfrm>
+            <a:off x="228600" y="1764504"/>
+            <a:ext cx="17221200" cy="512191"/>
+          </a:xfrm>
+          <a:prstGeom prst="rect">
+            <a:avLst/>
+          </a:prstGeom>
+        </p:spPr>
+        <p:txBody>
+          <a:bodyPr wrap="square" lIns="0" tIns="0" rIns="0" bIns="0" rtlCol="0" anchor="t">
+            <a:spAutoFit/>
+          </a:bodyPr>
+          <a:lstStyle/>
+          <a:p>
+            <a:pPr marL="457200" indent="-457200" algn="l">
+              <a:lnSpc>
+                <a:spcPts val="4480"/>
+              </a:lnSpc>
+              <a:spcBef>
+                <a:spcPct val="0"/>
+              </a:spcBef>
+              <a:buFont typeface="Wingdings" panose="05000000000000000000" pitchFamily="2" charset="2"/>
+              <a:buChar char="v"/>
+            </a:pPr>
+            <a:r>
+              <a:rPr lang="zh-TW" altLang="en-US" sz="2600" dirty="0">
+                <a:latin typeface="Times New Roman" panose="02020603050405020304" pitchFamily="18" charset="0"/>
+                <a:ea typeface="標楷體" panose="03000509000000000000" pitchFamily="65" charset="-120"/>
+                <a:cs typeface="王漢宗顏楷體"/>
+                <a:sym typeface="王漢宗顏楷體"/>
+              </a:rPr>
+              <a:t>在 </a:t>
+            </a:r>
+            <a:r>
+              <a:rPr lang="en-US" altLang="zh-TW" sz="2600" dirty="0">
+                <a:latin typeface="Times New Roman" panose="02020603050405020304" pitchFamily="18" charset="0"/>
+                <a:ea typeface="標楷體" panose="03000509000000000000" pitchFamily="65" charset="-120"/>
+                <a:cs typeface="王漢宗顏楷體"/>
+                <a:sym typeface="王漢宗顏楷體"/>
+              </a:rPr>
+              <a:t>JavaScript </a:t>
+            </a:r>
+            <a:r>
+              <a:rPr lang="zh-TW" altLang="en-US" sz="2600" dirty="0">
+                <a:latin typeface="Times New Roman" panose="02020603050405020304" pitchFamily="18" charset="0"/>
+                <a:ea typeface="標楷體" panose="03000509000000000000" pitchFamily="65" charset="-120"/>
+                <a:cs typeface="王漢宗顏楷體"/>
+                <a:sym typeface="王漢宗顏楷體"/>
+              </a:rPr>
+              <a:t>中，當我們希望函式的</a:t>
+            </a:r>
+            <a:r>
+              <a:rPr lang="en-US" altLang="zh-TW" sz="2600" dirty="0">
+                <a:latin typeface="Times New Roman" panose="02020603050405020304" pitchFamily="18" charset="0"/>
+                <a:ea typeface="標楷體" panose="03000509000000000000" pitchFamily="65" charset="-120"/>
+                <a:cs typeface="王漢宗顏楷體"/>
+                <a:sym typeface="王漢宗顏楷體"/>
+              </a:rPr>
+              <a:t>this</a:t>
+            </a:r>
+            <a:r>
+              <a:rPr lang="zh-TW" altLang="en-US" sz="2600" dirty="0">
+                <a:latin typeface="Times New Roman" panose="02020603050405020304" pitchFamily="18" charset="0"/>
+                <a:ea typeface="標楷體" panose="03000509000000000000" pitchFamily="65" charset="-120"/>
+                <a:cs typeface="王漢宗顏楷體"/>
+                <a:sym typeface="王漢宗顏楷體"/>
+              </a:rPr>
+              <a:t>被綁定到特定對象，或者想在呼叫函式時自動傳入一些固定的參數。</a:t>
+            </a:r>
+            <a:endParaRPr lang="en-US" altLang="zh-TW" sz="2600" dirty="0">
+              <a:latin typeface="Times New Roman" panose="02020603050405020304" pitchFamily="18" charset="0"/>
+              <a:ea typeface="標楷體" panose="03000509000000000000" pitchFamily="65" charset="-120"/>
+              <a:cs typeface="王漢宗顏楷體"/>
+              <a:sym typeface="王漢宗顏楷體"/>
+            </a:endParaRPr>
+          </a:p>
+        </p:txBody>
+      </p:sp>
+      <p:pic>
+        <p:nvPicPr>
+          <p:cNvPr id="4" name="圖片 3">
+            <a:extLst>
+              <a:ext uri="{FF2B5EF4-FFF2-40B4-BE49-F238E27FC236}">
+                <a16:creationId xmlns:a16="http://schemas.microsoft.com/office/drawing/2014/main" id="{47514BBC-3CED-4728-9AF6-AC928DF32F8E}"/>
+              </a:ext>
+            </a:extLst>
+          </p:cNvPr>
+          <p:cNvPicPr>
+            <a:picLocks noChangeAspect="1"/>
+          </p:cNvPicPr>
+          <p:nvPr/>
+        </p:nvPicPr>
+        <p:blipFill>
+          <a:blip r:embed="rId2"/>
+          <a:stretch>
+            <a:fillRect/>
+          </a:stretch>
+        </p:blipFill>
+        <p:spPr>
+          <a:xfrm>
+            <a:off x="10073875" y="6602432"/>
+            <a:ext cx="8094742" cy="3505200"/>
+          </a:xfrm>
+          <a:prstGeom prst="rect">
+            <a:avLst/>
+          </a:prstGeom>
+        </p:spPr>
+      </p:pic>
+      <p:pic>
+        <p:nvPicPr>
+          <p:cNvPr id="6" name="圖片 5">
+            <a:extLst>
+              <a:ext uri="{FF2B5EF4-FFF2-40B4-BE49-F238E27FC236}">
+                <a16:creationId xmlns:a16="http://schemas.microsoft.com/office/drawing/2014/main" id="{6EDBF7D9-92DB-4716-A96C-A0C5CAEBF6BC}"/>
+              </a:ext>
+            </a:extLst>
+          </p:cNvPr>
+          <p:cNvPicPr>
+            <a:picLocks noChangeAspect="1"/>
+          </p:cNvPicPr>
+          <p:nvPr/>
+        </p:nvPicPr>
+        <p:blipFill>
+          <a:blip r:embed="rId3"/>
+          <a:stretch>
+            <a:fillRect/>
+          </a:stretch>
+        </p:blipFill>
+        <p:spPr>
+          <a:xfrm>
+            <a:off x="7467600" y="3646468"/>
+            <a:ext cx="7796908" cy="2819298"/>
+          </a:xfrm>
+          <a:prstGeom prst="rect">
+            <a:avLst/>
+          </a:prstGeom>
+        </p:spPr>
+      </p:pic>
+      <p:pic>
+        <p:nvPicPr>
+          <p:cNvPr id="10" name="圖片 9">
+            <a:extLst>
+              <a:ext uri="{FF2B5EF4-FFF2-40B4-BE49-F238E27FC236}">
+                <a16:creationId xmlns:a16="http://schemas.microsoft.com/office/drawing/2014/main" id="{9A1F08FD-9E8E-4F86-84F8-8E22979B71DF}"/>
+              </a:ext>
+            </a:extLst>
+          </p:cNvPr>
+          <p:cNvPicPr>
+            <a:picLocks noChangeAspect="1"/>
+          </p:cNvPicPr>
+          <p:nvPr/>
+        </p:nvPicPr>
+        <p:blipFill>
+          <a:blip r:embed="rId4"/>
+          <a:stretch>
+            <a:fillRect/>
+          </a:stretch>
+        </p:blipFill>
+        <p:spPr>
+          <a:xfrm>
+            <a:off x="228600" y="6577632"/>
+            <a:ext cx="9761217" cy="3530000"/>
+          </a:xfrm>
+          <a:prstGeom prst="rect">
+            <a:avLst/>
+          </a:prstGeom>
+        </p:spPr>
+      </p:pic>
+    </p:spTree>
+    <p:extLst>
+      <p:ext uri="{BB962C8B-B14F-4D97-AF65-F5344CB8AC3E}">
+        <p14:creationId xmlns:p14="http://schemas.microsoft.com/office/powerpoint/2010/main" val="855018570"/>
+      </p:ext>
+    </p:extLst>
+  </p:cSld>
+  <p:clrMapOvr>
+    <a:masterClrMapping/>
+  </p:clrMapOvr>
+</p:sld>
+</file>
+
+<file path=ppt/slides/slide3.xml><?xml version="1.0" encoding="utf-8"?>
+<p:sld xmlns:a="http://schemas.openxmlformats.org/drawingml/2006/main" xmlns:r="http://schemas.openxmlformats.org/officeDocument/2006/relationships" xmlns:p="http://schemas.openxmlformats.org/presentationml/2006/main">
+  <p:cSld>
+    <p:spTree>
+      <p:nvGrpSpPr>
+        <p:cNvPr id="1" name=""/>
+        <p:cNvGrpSpPr/>
+        <p:nvPr/>
+      </p:nvGrpSpPr>
+      <p:grpSpPr>
+        <a:xfrm>
+          <a:off x="0" y="0"/>
+          <a:ext cx="0" cy="0"/>
+          <a:chOff x="0" y="0"/>
+          <a:chExt cx="0" cy="0"/>
+        </a:xfrm>
+      </p:grpSpPr>
+      <p:pic>
+        <p:nvPicPr>
+          <p:cNvPr id="1026" name="Picture 2">
+            <a:extLst>
+              <a:ext uri="{FF2B5EF4-FFF2-40B4-BE49-F238E27FC236}">
+                <a16:creationId xmlns:a16="http://schemas.microsoft.com/office/drawing/2014/main" id="{5B516BD0-8DFD-4EC3-8B67-F180CF4DBC63}"/>
+              </a:ext>
+            </a:extLst>
+          </p:cNvPr>
+          <p:cNvPicPr>
+            <a:picLocks noChangeAspect="1" noChangeArrowheads="1"/>
+          </p:cNvPicPr>
+          <p:nvPr/>
+        </p:nvPicPr>
+        <p:blipFill>
+          <a:blip r:embed="rId2">
+            <a:extLst>
+              <a:ext uri="{28A0092B-C50C-407E-A947-70E740481C1C}">
+                <a14:useLocalDpi xmlns:a14="http://schemas.microsoft.com/office/drawing/2010/main" val="0"/>
+              </a:ext>
+            </a:extLst>
+          </a:blip>
+          <a:srcRect/>
+          <a:stretch>
+            <a:fillRect/>
+          </a:stretch>
+        </p:blipFill>
+        <p:spPr bwMode="auto">
+          <a:xfrm>
+            <a:off x="9085051" y="1668293"/>
+            <a:ext cx="9202945" cy="6400181"/>
+          </a:xfrm>
+          <a:prstGeom prst="rect">
+            <a:avLst/>
+          </a:prstGeom>
+          <a:noFill/>
+          <a:extLst>
+            <a:ext uri="{909E8E84-426E-40DD-AFC4-6F175D3DCCD1}">
+              <a14:hiddenFill xmlns:a14="http://schemas.microsoft.com/office/drawing/2010/main">
+                <a:solidFill>
+                  <a:srgbClr val="FFFFFF"/>
+                </a:solidFill>
+              </a14:hiddenFill>
+            </a:ext>
+          </a:extLst>
+        </p:spPr>
+      </p:pic>
+      <p:sp>
+        <p:nvSpPr>
+          <p:cNvPr id="27" name="TextBox 10">
+            <a:extLst>
+              <a:ext uri="{FF2B5EF4-FFF2-40B4-BE49-F238E27FC236}">
+                <a16:creationId xmlns:a16="http://schemas.microsoft.com/office/drawing/2014/main" id="{2A659F81-1ED8-4106-8C45-6A01D7DBC583}"/>
+              </a:ext>
+            </a:extLst>
+          </p:cNvPr>
+          <p:cNvSpPr txBox="1"/>
+          <p:nvPr/>
+        </p:nvSpPr>
+        <p:spPr>
+          <a:xfrm>
+            <a:off x="206911" y="1785472"/>
+            <a:ext cx="8878136" cy="6860083"/>
+          </a:xfrm>
+          <a:prstGeom prst="rect">
+            <a:avLst/>
+          </a:prstGeom>
+        </p:spPr>
+        <p:txBody>
+          <a:bodyPr wrap="square" lIns="0" tIns="0" rIns="0" bIns="0" rtlCol="0" anchor="t">
+            <a:spAutoFit/>
+          </a:bodyPr>
+          <a:lstStyle/>
+          <a:p>
+            <a:pPr marL="457200" indent="-457200" algn="l">
+              <a:lnSpc>
+                <a:spcPts val="4480"/>
+              </a:lnSpc>
+              <a:spcBef>
+                <a:spcPct val="0"/>
+              </a:spcBef>
+              <a:buFont typeface="Wingdings" panose="05000000000000000000" pitchFamily="2" charset="2"/>
+              <a:buChar char="v"/>
+            </a:pPr>
+            <a:r>
+              <a:rPr lang="zh-TW" altLang="en-US" sz="2600" dirty="0">
+                <a:latin typeface="Times New Roman" panose="02020603050405020304" pitchFamily="18" charset="0"/>
+                <a:ea typeface="標楷體" panose="03000509000000000000" pitchFamily="65" charset="-120"/>
+                <a:cs typeface="王漢宗顏楷體"/>
+                <a:sym typeface="王漢宗顏楷體"/>
+              </a:rPr>
+              <a:t>瀏覽器透過作業系統，將網址發送給</a:t>
+            </a:r>
+            <a:r>
+              <a:rPr lang="en-US" altLang="zh-TW" sz="2600" dirty="0">
+                <a:latin typeface="Times New Roman" panose="02020603050405020304" pitchFamily="18" charset="0"/>
+                <a:ea typeface="標楷體" panose="03000509000000000000" pitchFamily="65" charset="-120"/>
+                <a:cs typeface="王漢宗顏楷體"/>
+                <a:sym typeface="王漢宗顏楷體"/>
+              </a:rPr>
+              <a:t>DNS Server</a:t>
+            </a:r>
+            <a:r>
+              <a:rPr lang="zh-TW" altLang="en-US" sz="2600" dirty="0">
+                <a:latin typeface="Times New Roman" panose="02020603050405020304" pitchFamily="18" charset="0"/>
+                <a:ea typeface="標楷體" panose="03000509000000000000" pitchFamily="65" charset="-120"/>
+                <a:cs typeface="王漢宗顏楷體"/>
+                <a:sym typeface="王漢宗顏楷體"/>
+              </a:rPr>
+              <a:t>。</a:t>
+            </a:r>
+            <a:endParaRPr lang="en-US" altLang="zh-TW" sz="2600" dirty="0">
+              <a:latin typeface="Times New Roman" panose="02020603050405020304" pitchFamily="18" charset="0"/>
+              <a:ea typeface="標楷體" panose="03000509000000000000" pitchFamily="65" charset="-120"/>
+              <a:cs typeface="王漢宗顏楷體"/>
+              <a:sym typeface="王漢宗顏楷體"/>
+            </a:endParaRPr>
+          </a:p>
+          <a:p>
+            <a:pPr marL="457200" indent="-457200" algn="l">
+              <a:lnSpc>
+                <a:spcPts val="4480"/>
+              </a:lnSpc>
+              <a:spcBef>
+                <a:spcPct val="0"/>
+              </a:spcBef>
+              <a:buFont typeface="Wingdings" panose="05000000000000000000" pitchFamily="2" charset="2"/>
+              <a:buChar char="v"/>
+            </a:pPr>
+            <a:r>
+              <a:rPr lang="en-US" altLang="zh-TW" sz="2600" dirty="0">
+                <a:latin typeface="Times New Roman" panose="02020603050405020304" pitchFamily="18" charset="0"/>
+                <a:ea typeface="標楷體" panose="03000509000000000000" pitchFamily="65" charset="-120"/>
+                <a:cs typeface="王漢宗顏楷體"/>
+                <a:sym typeface="王漢宗顏楷體"/>
+              </a:rPr>
+              <a:t>DNS Server</a:t>
+            </a:r>
+            <a:r>
+              <a:rPr lang="zh-TW" altLang="en-US" sz="2600" dirty="0">
+                <a:latin typeface="Times New Roman" panose="02020603050405020304" pitchFamily="18" charset="0"/>
+                <a:ea typeface="標楷體" panose="03000509000000000000" pitchFamily="65" charset="-120"/>
+                <a:cs typeface="王漢宗顏楷體"/>
+                <a:sym typeface="王漢宗顏楷體"/>
+              </a:rPr>
+              <a:t>解析網址，將處理的結果組成完整的</a:t>
+            </a:r>
+            <a:r>
+              <a:rPr lang="en-US" altLang="zh-TW" sz="2600" dirty="0">
+                <a:latin typeface="Times New Roman" panose="02020603050405020304" pitchFamily="18" charset="0"/>
+                <a:ea typeface="標楷體" panose="03000509000000000000" pitchFamily="65" charset="-120"/>
+                <a:cs typeface="王漢宗顏楷體"/>
+                <a:sym typeface="王漢宗顏楷體"/>
+              </a:rPr>
+              <a:t>IP</a:t>
+            </a:r>
+            <a:r>
+              <a:rPr lang="zh-TW" altLang="en-US" sz="2600" dirty="0">
+                <a:latin typeface="Times New Roman" panose="02020603050405020304" pitchFamily="18" charset="0"/>
+                <a:ea typeface="標楷體" panose="03000509000000000000" pitchFamily="65" charset="-120"/>
+                <a:cs typeface="王漢宗顏楷體"/>
+                <a:sym typeface="王漢宗顏楷體"/>
+              </a:rPr>
+              <a:t>位址並回傳。</a:t>
+            </a:r>
+            <a:endParaRPr lang="en-US" altLang="zh-TW" sz="2600" dirty="0">
+              <a:latin typeface="Times New Roman" panose="02020603050405020304" pitchFamily="18" charset="0"/>
+              <a:ea typeface="標楷體" panose="03000509000000000000" pitchFamily="65" charset="-120"/>
+              <a:cs typeface="王漢宗顏楷體"/>
+              <a:sym typeface="王漢宗顏楷體"/>
+            </a:endParaRPr>
+          </a:p>
+          <a:p>
+            <a:pPr marL="457200" indent="-457200" algn="l">
+              <a:lnSpc>
+                <a:spcPts val="4480"/>
+              </a:lnSpc>
+              <a:spcBef>
+                <a:spcPct val="0"/>
+              </a:spcBef>
+              <a:buFont typeface="Wingdings" panose="05000000000000000000" pitchFamily="2" charset="2"/>
+              <a:buChar char="v"/>
+            </a:pPr>
+            <a:r>
+              <a:rPr lang="zh-TW" altLang="en-US" sz="2600" dirty="0">
+                <a:latin typeface="Times New Roman" panose="02020603050405020304" pitchFamily="18" charset="0"/>
+                <a:ea typeface="標楷體" panose="03000509000000000000" pitchFamily="65" charset="-120"/>
+                <a:cs typeface="王漢宗顏楷體"/>
+                <a:sym typeface="王漢宗顏楷體"/>
+              </a:rPr>
+              <a:t>瀏覽器知道</a:t>
+            </a:r>
+            <a:r>
+              <a:rPr lang="en-US" altLang="zh-TW" sz="2600" dirty="0">
+                <a:latin typeface="Times New Roman" panose="02020603050405020304" pitchFamily="18" charset="0"/>
+                <a:ea typeface="標楷體" panose="03000509000000000000" pitchFamily="65" charset="-120"/>
+                <a:cs typeface="王漢宗顏楷體"/>
+                <a:sym typeface="王漢宗顏楷體"/>
+              </a:rPr>
+              <a:t>IP</a:t>
+            </a:r>
+            <a:r>
+              <a:rPr lang="zh-TW" altLang="en-US" sz="2600" dirty="0">
+                <a:latin typeface="Times New Roman" panose="02020603050405020304" pitchFamily="18" charset="0"/>
+                <a:ea typeface="標楷體" panose="03000509000000000000" pitchFamily="65" charset="-120"/>
+                <a:cs typeface="王漢宗顏楷體"/>
+                <a:sym typeface="王漢宗顏楷體"/>
+              </a:rPr>
+              <a:t>位址後發出網路請求，透過</a:t>
+            </a:r>
+            <a:r>
+              <a:rPr lang="en-US" altLang="zh-TW" sz="2600" dirty="0">
+                <a:latin typeface="Times New Roman" panose="02020603050405020304" pitchFamily="18" charset="0"/>
+                <a:ea typeface="標楷體" panose="03000509000000000000" pitchFamily="65" charset="-120"/>
+                <a:cs typeface="王漢宗顏楷體"/>
+                <a:sym typeface="王漢宗顏楷體"/>
+              </a:rPr>
+              <a:t>TCP/IP</a:t>
+            </a:r>
+            <a:r>
+              <a:rPr lang="zh-TW" altLang="en-US" sz="2600" dirty="0">
+                <a:latin typeface="Times New Roman" panose="02020603050405020304" pitchFamily="18" charset="0"/>
+                <a:ea typeface="標楷體" panose="03000509000000000000" pitchFamily="65" charset="-120"/>
+                <a:cs typeface="王漢宗顏楷體"/>
+                <a:sym typeface="王漢宗顏楷體"/>
+              </a:rPr>
+              <a:t>的通訊協定對 </a:t>
+            </a:r>
+            <a:r>
+              <a:rPr lang="en-US" altLang="zh-TW" sz="2600" dirty="0">
+                <a:latin typeface="Times New Roman" panose="02020603050405020304" pitchFamily="18" charset="0"/>
+                <a:ea typeface="標楷體" panose="03000509000000000000" pitchFamily="65" charset="-120"/>
+                <a:cs typeface="王漢宗顏楷體"/>
+                <a:sym typeface="王漢宗顏楷體"/>
+              </a:rPr>
+              <a:t>Target Server</a:t>
+            </a:r>
+            <a:r>
+              <a:rPr lang="zh-TW" altLang="en-US" sz="2600" dirty="0">
+                <a:latin typeface="Times New Roman" panose="02020603050405020304" pitchFamily="18" charset="0"/>
+                <a:ea typeface="標楷體" panose="03000509000000000000" pitchFamily="65" charset="-120"/>
+                <a:cs typeface="王漢宗顏楷體"/>
+                <a:sym typeface="王漢宗顏楷體"/>
+              </a:rPr>
+              <a:t>，也就是網頁所在的伺服器來建立連線。</a:t>
+            </a:r>
+            <a:endParaRPr lang="en-US" altLang="zh-TW" sz="2600" dirty="0">
+              <a:latin typeface="Times New Roman" panose="02020603050405020304" pitchFamily="18" charset="0"/>
+              <a:ea typeface="標楷體" panose="03000509000000000000" pitchFamily="65" charset="-120"/>
+              <a:cs typeface="王漢宗顏楷體"/>
+              <a:sym typeface="王漢宗顏楷體"/>
+            </a:endParaRPr>
+          </a:p>
+          <a:p>
+            <a:pPr marL="457200" indent="-457200" algn="l">
+              <a:lnSpc>
+                <a:spcPts val="4480"/>
+              </a:lnSpc>
+              <a:spcBef>
+                <a:spcPct val="0"/>
+              </a:spcBef>
+              <a:buFont typeface="Wingdings" panose="05000000000000000000" pitchFamily="2" charset="2"/>
+              <a:buChar char="v"/>
+            </a:pPr>
+            <a:r>
+              <a:rPr lang="en-US" altLang="zh-TW" sz="2600" dirty="0">
+                <a:latin typeface="Times New Roman" panose="02020603050405020304" pitchFamily="18" charset="0"/>
+                <a:ea typeface="標楷體" panose="03000509000000000000" pitchFamily="65" charset="-120"/>
+                <a:cs typeface="王漢宗顏楷體"/>
+                <a:sym typeface="王漢宗顏楷體"/>
+              </a:rPr>
+              <a:t>Target Server</a:t>
+            </a:r>
+            <a:r>
+              <a:rPr lang="zh-TW" altLang="en-US" sz="2600" dirty="0">
+                <a:latin typeface="Times New Roman" panose="02020603050405020304" pitchFamily="18" charset="0"/>
+                <a:ea typeface="標楷體" panose="03000509000000000000" pitchFamily="65" charset="-120"/>
+                <a:cs typeface="王漢宗顏楷體"/>
+                <a:sym typeface="王漢宗顏楷體"/>
+              </a:rPr>
+              <a:t>收到請求後，把所需的資源以封包的形式回應。</a:t>
+            </a:r>
+            <a:endParaRPr lang="en-US" altLang="zh-TW" sz="2600" dirty="0">
+              <a:latin typeface="Times New Roman" panose="02020603050405020304" pitchFamily="18" charset="0"/>
+              <a:ea typeface="標楷體" panose="03000509000000000000" pitchFamily="65" charset="-120"/>
+              <a:cs typeface="王漢宗顏楷體"/>
+              <a:sym typeface="王漢宗顏楷體"/>
+            </a:endParaRPr>
+          </a:p>
+          <a:p>
+            <a:pPr marL="457200" indent="-457200" algn="l">
+              <a:lnSpc>
+                <a:spcPts val="4480"/>
+              </a:lnSpc>
+              <a:spcBef>
+                <a:spcPct val="0"/>
+              </a:spcBef>
+              <a:buFont typeface="Wingdings" panose="05000000000000000000" pitchFamily="2" charset="2"/>
+              <a:buChar char="v"/>
+            </a:pPr>
+            <a:r>
+              <a:rPr lang="zh-TW" altLang="en-US" sz="2600" dirty="0">
+                <a:latin typeface="Times New Roman" panose="02020603050405020304" pitchFamily="18" charset="0"/>
+                <a:ea typeface="標楷體" panose="03000509000000000000" pitchFamily="65" charset="-120"/>
+                <a:cs typeface="王漢宗顏楷體"/>
+                <a:sym typeface="王漢宗顏楷體"/>
+              </a:rPr>
+              <a:t>解析完封包後，瀏覽器會收到相關的檔案和狀態資訊。</a:t>
+            </a:r>
+            <a:endParaRPr lang="en-US" altLang="zh-TW" sz="2600" dirty="0">
+              <a:latin typeface="Times New Roman" panose="02020603050405020304" pitchFamily="18" charset="0"/>
+              <a:ea typeface="標楷體" panose="03000509000000000000" pitchFamily="65" charset="-120"/>
+              <a:cs typeface="王漢宗顏楷體"/>
+              <a:sym typeface="王漢宗顏楷體"/>
+            </a:endParaRPr>
+          </a:p>
+          <a:p>
+            <a:pPr marL="457200" indent="-457200" algn="l">
+              <a:lnSpc>
+                <a:spcPts val="4480"/>
+              </a:lnSpc>
+              <a:spcBef>
+                <a:spcPct val="0"/>
+              </a:spcBef>
+              <a:buFont typeface="Wingdings" panose="05000000000000000000" pitchFamily="2" charset="2"/>
+              <a:buChar char="v"/>
+            </a:pPr>
+            <a:r>
+              <a:rPr lang="en-US" altLang="zh-TW" sz="2600" dirty="0">
+                <a:latin typeface="Times New Roman" panose="02020603050405020304" pitchFamily="18" charset="0"/>
+                <a:ea typeface="標楷體" panose="03000509000000000000" pitchFamily="65" charset="-120"/>
+                <a:cs typeface="王漢宗顏楷體"/>
+                <a:sym typeface="王漢宗顏楷體"/>
+              </a:rPr>
+              <a:t>HTML</a:t>
+            </a:r>
+            <a:r>
+              <a:rPr lang="zh-TW" altLang="en-US" sz="2600" dirty="0">
+                <a:latin typeface="Times New Roman" panose="02020603050405020304" pitchFamily="18" charset="0"/>
+                <a:ea typeface="標楷體" panose="03000509000000000000" pitchFamily="65" charset="-120"/>
+                <a:cs typeface="王漢宗顏楷體"/>
+                <a:sym typeface="王漢宗顏楷體"/>
+              </a:rPr>
+              <a:t>和</a:t>
+            </a:r>
+            <a:r>
+              <a:rPr lang="en-US" altLang="zh-TW" sz="2600" dirty="0">
+                <a:latin typeface="Times New Roman" panose="02020603050405020304" pitchFamily="18" charset="0"/>
+                <a:ea typeface="標楷體" panose="03000509000000000000" pitchFamily="65" charset="-120"/>
+                <a:cs typeface="王漢宗顏楷體"/>
+                <a:sym typeface="王漢宗顏楷體"/>
+              </a:rPr>
+              <a:t>CSS</a:t>
+            </a:r>
+            <a:r>
+              <a:rPr lang="zh-TW" altLang="en-US" sz="2600" dirty="0">
+                <a:latin typeface="Times New Roman" panose="02020603050405020304" pitchFamily="18" charset="0"/>
+                <a:ea typeface="標楷體" panose="03000509000000000000" pitchFamily="65" charset="-120"/>
+                <a:cs typeface="王漢宗顏楷體"/>
+                <a:sym typeface="王漢宗顏楷體"/>
+              </a:rPr>
+              <a:t>會分別透過各自的</a:t>
+            </a:r>
+            <a:r>
+              <a:rPr lang="en-US" altLang="zh-TW" sz="2600" dirty="0">
+                <a:latin typeface="Times New Roman" panose="02020603050405020304" pitchFamily="18" charset="0"/>
+                <a:ea typeface="標楷體" panose="03000509000000000000" pitchFamily="65" charset="-120"/>
+                <a:cs typeface="王漢宗顏楷體"/>
+                <a:sym typeface="王漢宗顏楷體"/>
+              </a:rPr>
+              <a:t>Parser</a:t>
+            </a:r>
+            <a:r>
+              <a:rPr lang="zh-TW" altLang="en-US" sz="2600" dirty="0">
+                <a:latin typeface="Times New Roman" panose="02020603050405020304" pitchFamily="18" charset="0"/>
+                <a:ea typeface="標楷體" panose="03000509000000000000" pitchFamily="65" charset="-120"/>
+                <a:cs typeface="王漢宗顏楷體"/>
+                <a:sym typeface="王漢宗顏楷體"/>
+              </a:rPr>
+              <a:t>建立樹狀結構的資料模型：</a:t>
+            </a:r>
+            <a:r>
+              <a:rPr lang="en-US" altLang="zh-TW" sz="2600" dirty="0">
+                <a:latin typeface="Times New Roman" panose="02020603050405020304" pitchFamily="18" charset="0"/>
+                <a:ea typeface="標楷體" panose="03000509000000000000" pitchFamily="65" charset="-120"/>
+                <a:cs typeface="王漢宗顏楷體"/>
+                <a:sym typeface="王漢宗顏楷體"/>
+              </a:rPr>
+              <a:t>DOM Tree</a:t>
+            </a:r>
+            <a:r>
+              <a:rPr lang="zh-TW" altLang="en-US" sz="2600" dirty="0">
+                <a:latin typeface="Times New Roman" panose="02020603050405020304" pitchFamily="18" charset="0"/>
+                <a:ea typeface="標楷體" panose="03000509000000000000" pitchFamily="65" charset="-120"/>
+                <a:cs typeface="王漢宗顏楷體"/>
+                <a:sym typeface="王漢宗顏楷體"/>
+              </a:rPr>
+              <a:t>和</a:t>
+            </a:r>
+            <a:r>
+              <a:rPr lang="en-US" altLang="zh-TW" sz="2600" dirty="0">
+                <a:latin typeface="Times New Roman" panose="02020603050405020304" pitchFamily="18" charset="0"/>
+                <a:ea typeface="標楷體" panose="03000509000000000000" pitchFamily="65" charset="-120"/>
+                <a:cs typeface="王漢宗顏楷體"/>
+                <a:sym typeface="王漢宗顏楷體"/>
+              </a:rPr>
+              <a:t>CSSOM Tree</a:t>
+            </a:r>
+            <a:r>
+              <a:rPr lang="zh-TW" altLang="en-US" sz="2600" dirty="0">
+                <a:latin typeface="Times New Roman" panose="02020603050405020304" pitchFamily="18" charset="0"/>
+                <a:ea typeface="標楷體" panose="03000509000000000000" pitchFamily="65" charset="-120"/>
+                <a:cs typeface="王漢宗顏楷體"/>
+                <a:sym typeface="王漢宗顏楷體"/>
+              </a:rPr>
+              <a:t>。</a:t>
+            </a:r>
+            <a:endParaRPr lang="en-US" altLang="zh-TW" sz="2600" dirty="0">
+              <a:latin typeface="Times New Roman" panose="02020603050405020304" pitchFamily="18" charset="0"/>
+              <a:ea typeface="標楷體" panose="03000509000000000000" pitchFamily="65" charset="-120"/>
+              <a:cs typeface="王漢宗顏楷體"/>
+              <a:sym typeface="王漢宗顏楷體"/>
+            </a:endParaRPr>
+          </a:p>
+          <a:p>
+            <a:pPr marL="457200" indent="-457200" algn="l">
+              <a:lnSpc>
+                <a:spcPts val="4480"/>
+              </a:lnSpc>
+              <a:spcBef>
+                <a:spcPct val="0"/>
+              </a:spcBef>
+              <a:buFont typeface="Wingdings" panose="05000000000000000000" pitchFamily="2" charset="2"/>
+              <a:buChar char="v"/>
+            </a:pPr>
+            <a:r>
+              <a:rPr lang="zh-TW" altLang="en-US" sz="2600" dirty="0">
+                <a:latin typeface="Times New Roman" panose="02020603050405020304" pitchFamily="18" charset="0"/>
+                <a:ea typeface="標楷體" panose="03000509000000000000" pitchFamily="65" charset="-120"/>
+                <a:cs typeface="王漢宗顏楷體"/>
+                <a:sym typeface="王漢宗顏楷體"/>
+              </a:rPr>
+              <a:t>瀏覽器透過</a:t>
+            </a:r>
+            <a:r>
+              <a:rPr lang="en-US" altLang="zh-TW" sz="2600" dirty="0">
+                <a:latin typeface="Times New Roman" panose="02020603050405020304" pitchFamily="18" charset="0"/>
+                <a:ea typeface="標楷體" panose="03000509000000000000" pitchFamily="65" charset="-120"/>
+                <a:cs typeface="王漢宗顏楷體"/>
+                <a:sym typeface="王漢宗顏楷體"/>
+              </a:rPr>
+              <a:t>Render Tree</a:t>
+            </a:r>
+            <a:r>
+              <a:rPr lang="zh-TW" altLang="en-US" sz="2600" dirty="0">
+                <a:latin typeface="Times New Roman" panose="02020603050405020304" pitchFamily="18" charset="0"/>
+                <a:ea typeface="標楷體" panose="03000509000000000000" pitchFamily="65" charset="-120"/>
+                <a:cs typeface="王漢宗顏楷體"/>
+                <a:sym typeface="王漢宗顏楷體"/>
+              </a:rPr>
+              <a:t>計算出每個節點對應到頁面上的實際位置、形狀與大小等資訊，輸出一個</a:t>
+            </a:r>
+            <a:r>
+              <a:rPr lang="en-US" altLang="zh-TW" sz="2600" dirty="0">
+                <a:latin typeface="Times New Roman" panose="02020603050405020304" pitchFamily="18" charset="0"/>
+                <a:ea typeface="標楷體" panose="03000509000000000000" pitchFamily="65" charset="-120"/>
+                <a:cs typeface="王漢宗顏楷體"/>
+                <a:sym typeface="王漢宗顏楷體"/>
+              </a:rPr>
+              <a:t>Layout</a:t>
+            </a:r>
+            <a:r>
+              <a:rPr lang="zh-TW" altLang="en-US" sz="2600" dirty="0">
+                <a:latin typeface="Times New Roman" panose="02020603050405020304" pitchFamily="18" charset="0"/>
+                <a:ea typeface="標楷體" panose="03000509000000000000" pitchFamily="65" charset="-120"/>
+                <a:cs typeface="王漢宗顏楷體"/>
+                <a:sym typeface="王漢宗顏楷體"/>
+              </a:rPr>
+              <a:t>的資料模型。</a:t>
+            </a:r>
+            <a:endParaRPr lang="en-US" altLang="zh-TW" sz="2600" dirty="0">
+              <a:latin typeface="Times New Roman" panose="02020603050405020304" pitchFamily="18" charset="0"/>
+              <a:ea typeface="標楷體" panose="03000509000000000000" pitchFamily="65" charset="-120"/>
+              <a:cs typeface="王漢宗顏楷體"/>
+              <a:sym typeface="王漢宗顏楷體"/>
+            </a:endParaRPr>
+          </a:p>
+          <a:p>
+            <a:pPr marL="457200" indent="-457200" algn="l">
+              <a:lnSpc>
+                <a:spcPts val="4480"/>
+              </a:lnSpc>
+              <a:spcBef>
+                <a:spcPct val="0"/>
+              </a:spcBef>
+              <a:buFont typeface="Wingdings" panose="05000000000000000000" pitchFamily="2" charset="2"/>
+              <a:buChar char="v"/>
+            </a:pPr>
+            <a:r>
+              <a:rPr lang="zh-TW" altLang="en-US" sz="2600" dirty="0">
+                <a:latin typeface="Times New Roman" panose="02020603050405020304" pitchFamily="18" charset="0"/>
+                <a:ea typeface="標楷體" panose="03000509000000000000" pitchFamily="65" charset="-120"/>
+                <a:cs typeface="王漢宗顏楷體"/>
+                <a:sym typeface="王漢宗顏楷體"/>
+              </a:rPr>
+              <a:t>瀏覽器透過這個</a:t>
+            </a:r>
+            <a:r>
+              <a:rPr lang="en-US" altLang="zh-TW" sz="2600" dirty="0">
+                <a:latin typeface="Times New Roman" panose="02020603050405020304" pitchFamily="18" charset="0"/>
+                <a:ea typeface="標楷體" panose="03000509000000000000" pitchFamily="65" charset="-120"/>
+                <a:cs typeface="王漢宗顏楷體"/>
+                <a:sym typeface="王漢宗顏楷體"/>
+              </a:rPr>
+              <a:t>Layout</a:t>
+            </a:r>
+            <a:r>
+              <a:rPr lang="zh-TW" altLang="en-US" sz="2600" dirty="0">
+                <a:latin typeface="Times New Roman" panose="02020603050405020304" pitchFamily="18" charset="0"/>
+                <a:ea typeface="標楷體" panose="03000509000000000000" pitchFamily="65" charset="-120"/>
+                <a:cs typeface="王漢宗顏楷體"/>
+                <a:sym typeface="王漢宗顏楷體"/>
+              </a:rPr>
+              <a:t>渲染在頁面上。</a:t>
+            </a:r>
+            <a:endParaRPr lang="en-US" altLang="zh-TW" sz="2600" dirty="0">
+              <a:latin typeface="Times New Roman" panose="02020603050405020304" pitchFamily="18" charset="0"/>
+              <a:ea typeface="標楷體" panose="03000509000000000000" pitchFamily="65" charset="-120"/>
+              <a:cs typeface="王漢宗顏楷體"/>
+              <a:sym typeface="王漢宗顏楷體"/>
+            </a:endParaRPr>
+          </a:p>
+        </p:txBody>
+      </p:sp>
+      <p:grpSp>
+        <p:nvGrpSpPr>
+          <p:cNvPr id="28" name="Group 2">
+            <a:extLst>
+              <a:ext uri="{FF2B5EF4-FFF2-40B4-BE49-F238E27FC236}">
+                <a16:creationId xmlns:a16="http://schemas.microsoft.com/office/drawing/2014/main" id="{C571510F-4237-4159-A25E-D023AAABD06D}"/>
+              </a:ext>
+            </a:extLst>
+          </p:cNvPr>
+          <p:cNvGrpSpPr/>
+          <p:nvPr/>
+        </p:nvGrpSpPr>
+        <p:grpSpPr>
+          <a:xfrm>
+            <a:off x="0" y="0"/>
+            <a:ext cx="18288000" cy="1691609"/>
+            <a:chOff x="0" y="0"/>
+            <a:chExt cx="4816593" cy="543967"/>
+          </a:xfrm>
+        </p:grpSpPr>
+        <p:sp>
+          <p:nvSpPr>
+            <p:cNvPr id="29" name="Freeform 3">
+              <a:extLst>
+                <a:ext uri="{FF2B5EF4-FFF2-40B4-BE49-F238E27FC236}">
+                  <a16:creationId xmlns:a16="http://schemas.microsoft.com/office/drawing/2014/main" id="{8558C2F7-92C9-4ED9-A7F6-36896AE39BAD}"/>
+                </a:ext>
+              </a:extLst>
+            </p:cNvPr>
+            <p:cNvSpPr/>
+            <p:nvPr/>
+          </p:nvSpPr>
+          <p:spPr>
+            <a:xfrm>
+              <a:off x="0" y="0"/>
+              <a:ext cx="4816592" cy="543967"/>
+            </a:xfrm>
+            <a:custGeom>
+              <a:avLst/>
+              <a:gdLst/>
+              <a:ahLst/>
+              <a:cxnLst/>
+              <a:rect l="l" t="t" r="r" b="b"/>
+              <a:pathLst>
+                <a:path w="4816592" h="543967">
+                  <a:moveTo>
+                    <a:pt x="0" y="0"/>
+                  </a:moveTo>
+                  <a:lnTo>
+                    <a:pt x="4816592" y="0"/>
+                  </a:lnTo>
+                  <a:lnTo>
+                    <a:pt x="4816592" y="543967"/>
+                  </a:lnTo>
+                  <a:lnTo>
+                    <a:pt x="0" y="543967"/>
+                  </a:lnTo>
+                  <a:close/>
+                </a:path>
+              </a:pathLst>
+            </a:custGeom>
+            <a:gradFill rotWithShape="1">
+              <a:gsLst>
+                <a:gs pos="0">
+                  <a:srgbClr val="B81B22">
+                    <a:alpha val="100000"/>
+                  </a:srgbClr>
+                </a:gs>
+                <a:gs pos="25000">
+                  <a:srgbClr val="B81B22">
+                    <a:alpha val="99500"/>
+                  </a:srgbClr>
+                </a:gs>
+                <a:gs pos="50000">
+                  <a:srgbClr val="E82A34">
+                    <a:alpha val="100000"/>
+                  </a:srgbClr>
+                </a:gs>
+                <a:gs pos="75000">
+                  <a:srgbClr val="F89DA1">
+                    <a:alpha val="100000"/>
+                  </a:srgbClr>
+                </a:gs>
+                <a:gs pos="100000">
+                  <a:srgbClr val="FFFFFF">
+                    <a:alpha val="99500"/>
+                  </a:srgbClr>
+                </a:gs>
+              </a:gsLst>
+              <a:lin ang="0"/>
+            </a:gradFill>
+          </p:spPr>
+        </p:sp>
+        <p:sp>
+          <p:nvSpPr>
+            <p:cNvPr id="30" name="TextBox 4">
+              <a:extLst>
+                <a:ext uri="{FF2B5EF4-FFF2-40B4-BE49-F238E27FC236}">
+                  <a16:creationId xmlns:a16="http://schemas.microsoft.com/office/drawing/2014/main" id="{CC107A00-22F6-47C1-AAF1-49AC9E4F1FE8}"/>
+                </a:ext>
+              </a:extLst>
+            </p:cNvPr>
+            <p:cNvSpPr txBox="1"/>
+            <p:nvPr/>
+          </p:nvSpPr>
+          <p:spPr>
+            <a:xfrm>
+              <a:off x="0" y="-47625"/>
+              <a:ext cx="4816593" cy="591592"/>
+            </a:xfrm>
+            <a:prstGeom prst="rect">
+              <a:avLst/>
+            </a:prstGeom>
+          </p:spPr>
+          <p:txBody>
+            <a:bodyPr lIns="50800" tIns="50800" rIns="50800" bIns="50800" rtlCol="0" anchor="ctr"/>
+            <a:lstStyle/>
+            <a:p>
+              <a:pPr algn="ctr">
+                <a:lnSpc>
+                  <a:spcPts val="2659"/>
+                </a:lnSpc>
+              </a:pPr>
+              <a:endParaRPr>
+                <a:latin typeface="標楷體" panose="03000509000000000000" pitchFamily="65" charset="-120"/>
+                <a:ea typeface="標楷體" panose="03000509000000000000" pitchFamily="65" charset="-120"/>
+              </a:endParaRPr>
+            </a:p>
+          </p:txBody>
+        </p:sp>
+      </p:grpSp>
+      <p:sp>
+        <p:nvSpPr>
+          <p:cNvPr id="34" name="TextBox 8">
+            <a:extLst>
+              <a:ext uri="{FF2B5EF4-FFF2-40B4-BE49-F238E27FC236}">
+                <a16:creationId xmlns:a16="http://schemas.microsoft.com/office/drawing/2014/main" id="{6A6E9B8B-C857-4E5F-B514-20784942772F}"/>
+              </a:ext>
+            </a:extLst>
+          </p:cNvPr>
+          <p:cNvSpPr txBox="1"/>
+          <p:nvPr/>
+        </p:nvSpPr>
+        <p:spPr>
+          <a:xfrm>
             <a:off x="152400" y="79855"/>
             <a:ext cx="9571413" cy="1321516"/>
           </a:xfrm>
@@ -13693,6 +15777,2828 @@
     <p:extLst>
       <p:ext uri="{BB962C8B-B14F-4D97-AF65-F5344CB8AC3E}">
         <p14:creationId xmlns:p14="http://schemas.microsoft.com/office/powerpoint/2010/main" val="2039986249"/>
+      </p:ext>
+    </p:extLst>
+  </p:cSld>
+  <p:clrMapOvr>
+    <a:masterClrMapping/>
+  </p:clrMapOvr>
+</p:sld>
+</file>
+
+<file path=ppt/slides/slide30.xml><?xml version="1.0" encoding="utf-8"?>
+<p:sld xmlns:a="http://schemas.openxmlformats.org/drawingml/2006/main" xmlns:r="http://schemas.openxmlformats.org/officeDocument/2006/relationships" xmlns:p="http://schemas.openxmlformats.org/presentationml/2006/main">
+  <p:cSld>
+    <p:spTree>
+      <p:nvGrpSpPr>
+        <p:cNvPr id="1" name=""/>
+        <p:cNvGrpSpPr/>
+        <p:nvPr/>
+      </p:nvGrpSpPr>
+      <p:grpSpPr>
+        <a:xfrm>
+          <a:off x="0" y="0"/>
+          <a:ext cx="0" cy="0"/>
+          <a:chOff x="0" y="0"/>
+          <a:chExt cx="0" cy="0"/>
+        </a:xfrm>
+      </p:grpSpPr>
+      <p:sp>
+        <p:nvSpPr>
+          <p:cNvPr id="27" name="TextBox 10">
+            <a:extLst>
+              <a:ext uri="{FF2B5EF4-FFF2-40B4-BE49-F238E27FC236}">
+                <a16:creationId xmlns:a16="http://schemas.microsoft.com/office/drawing/2014/main" id="{2A659F81-1ED8-4106-8C45-6A01D7DBC583}"/>
+              </a:ext>
+            </a:extLst>
+          </p:cNvPr>
+          <p:cNvSpPr txBox="1"/>
+          <p:nvPr/>
+        </p:nvSpPr>
+        <p:spPr>
+          <a:xfrm>
+            <a:off x="152400" y="1691609"/>
+            <a:ext cx="15621000" cy="1666354"/>
+          </a:xfrm>
+          <a:prstGeom prst="rect">
+            <a:avLst/>
+          </a:prstGeom>
+        </p:spPr>
+        <p:txBody>
+          <a:bodyPr wrap="square" lIns="0" tIns="0" rIns="0" bIns="0" rtlCol="0" anchor="t">
+            <a:spAutoFit/>
+          </a:bodyPr>
+          <a:lstStyle/>
+          <a:p>
+            <a:pPr algn="l">
+              <a:lnSpc>
+                <a:spcPts val="4480"/>
+              </a:lnSpc>
+              <a:spcBef>
+                <a:spcPct val="0"/>
+              </a:spcBef>
+            </a:pPr>
+            <a:r>
+              <a:rPr lang="en-US" altLang="zh-TW" sz="2600" dirty="0">
+                <a:latin typeface="Times New Roman" panose="02020603050405020304" pitchFamily="18" charset="0"/>
+                <a:ea typeface="標楷體" panose="03000509000000000000" pitchFamily="65" charset="-120"/>
+                <a:cs typeface="王漢宗顏楷體"/>
+                <a:sym typeface="王漢宗顏楷體"/>
+              </a:rPr>
+              <a:t>【</a:t>
+            </a:r>
+            <a:r>
+              <a:rPr lang="zh-TW" altLang="en-US" sz="2600" dirty="0">
+                <a:latin typeface="Times New Roman" panose="02020603050405020304" pitchFamily="18" charset="0"/>
+                <a:ea typeface="標楷體" panose="03000509000000000000" pitchFamily="65" charset="-120"/>
+                <a:cs typeface="王漢宗顏楷體"/>
+                <a:sym typeface="王漢宗顏楷體"/>
+              </a:rPr>
+              <a:t>呼叫函數</a:t>
+            </a:r>
+            <a:r>
+              <a:rPr lang="en-US" altLang="zh-TW" sz="2600" dirty="0">
+                <a:latin typeface="Times New Roman" panose="02020603050405020304" pitchFamily="18" charset="0"/>
+                <a:ea typeface="標楷體" panose="03000509000000000000" pitchFamily="65" charset="-120"/>
+                <a:cs typeface="王漢宗顏楷體"/>
+                <a:sym typeface="王漢宗顏楷體"/>
+              </a:rPr>
+              <a:t>(call function)】</a:t>
+            </a:r>
+          </a:p>
+          <a:p>
+            <a:pPr marL="457200" indent="-457200" algn="l">
+              <a:lnSpc>
+                <a:spcPts val="4480"/>
+              </a:lnSpc>
+              <a:spcBef>
+                <a:spcPct val="0"/>
+              </a:spcBef>
+              <a:buFont typeface="Wingdings" panose="05000000000000000000" pitchFamily="2" charset="2"/>
+              <a:buChar char="v"/>
+            </a:pPr>
+            <a:r>
+              <a:rPr lang="en-US" altLang="zh-TW" sz="2600" dirty="0">
+                <a:latin typeface="Times New Roman" panose="02020603050405020304" pitchFamily="18" charset="0"/>
+                <a:ea typeface="標楷體" panose="03000509000000000000" pitchFamily="65" charset="-120"/>
+                <a:cs typeface="王漢宗顏楷體"/>
+                <a:sym typeface="王漢宗顏楷體"/>
+              </a:rPr>
+              <a:t>call</a:t>
+            </a:r>
+            <a:r>
+              <a:rPr lang="zh-TW" altLang="en-US" sz="2600" dirty="0">
+                <a:latin typeface="Times New Roman" panose="02020603050405020304" pitchFamily="18" charset="0"/>
+                <a:ea typeface="標楷體" panose="03000509000000000000" pitchFamily="65" charset="-120"/>
+                <a:cs typeface="王漢宗顏楷體"/>
+                <a:sym typeface="王漢宗顏楷體"/>
+              </a:rPr>
+              <a:t>是 </a:t>
+            </a:r>
+            <a:r>
+              <a:rPr lang="en-US" altLang="zh-TW" sz="2600" dirty="0">
+                <a:latin typeface="Times New Roman" panose="02020603050405020304" pitchFamily="18" charset="0"/>
+                <a:ea typeface="標楷體" panose="03000509000000000000" pitchFamily="65" charset="-120"/>
+                <a:cs typeface="王漢宗顏楷體"/>
+                <a:sym typeface="王漢宗顏楷體"/>
+              </a:rPr>
+              <a:t>JavaScript</a:t>
+            </a:r>
+            <a:r>
+              <a:rPr lang="zh-TW" altLang="en-US" sz="2600" dirty="0">
+                <a:latin typeface="Times New Roman" panose="02020603050405020304" pitchFamily="18" charset="0"/>
+                <a:ea typeface="標楷體" panose="03000509000000000000" pitchFamily="65" charset="-120"/>
+                <a:cs typeface="王漢宗顏楷體"/>
+                <a:sym typeface="王漢宗顏楷體"/>
+              </a:rPr>
+              <a:t>中的一個函式方法，用於改變函式內部的</a:t>
+            </a:r>
+            <a:r>
+              <a:rPr lang="en-US" altLang="zh-TW" sz="2600" dirty="0">
+                <a:latin typeface="Times New Roman" panose="02020603050405020304" pitchFamily="18" charset="0"/>
+                <a:ea typeface="標楷體" panose="03000509000000000000" pitchFamily="65" charset="-120"/>
+                <a:cs typeface="王漢宗顏楷體"/>
+                <a:sym typeface="王漢宗顏楷體"/>
+              </a:rPr>
+              <a:t>this</a:t>
+            </a:r>
+            <a:r>
+              <a:rPr lang="zh-TW" altLang="en-US" sz="2600" dirty="0">
+                <a:latin typeface="Times New Roman" panose="02020603050405020304" pitchFamily="18" charset="0"/>
+                <a:ea typeface="標楷體" panose="03000509000000000000" pitchFamily="65" charset="-120"/>
+                <a:cs typeface="王漢宗顏楷體"/>
+                <a:sym typeface="王漢宗顏楷體"/>
+              </a:rPr>
+              <a:t>指向，並立即執行該函式。</a:t>
+            </a:r>
+            <a:endParaRPr lang="en-US" altLang="zh-TW" sz="2600" dirty="0">
+              <a:latin typeface="Times New Roman" panose="02020603050405020304" pitchFamily="18" charset="0"/>
+              <a:ea typeface="標楷體" panose="03000509000000000000" pitchFamily="65" charset="-120"/>
+              <a:cs typeface="王漢宗顏楷體"/>
+              <a:sym typeface="王漢宗顏楷體"/>
+            </a:endParaRPr>
+          </a:p>
+          <a:p>
+            <a:pPr marL="457200" indent="-457200" algn="l">
+              <a:lnSpc>
+                <a:spcPts val="4480"/>
+              </a:lnSpc>
+              <a:spcBef>
+                <a:spcPct val="0"/>
+              </a:spcBef>
+              <a:buFont typeface="Wingdings" panose="05000000000000000000" pitchFamily="2" charset="2"/>
+              <a:buChar char="v"/>
+            </a:pPr>
+            <a:r>
+              <a:rPr lang="zh-TW" altLang="en-US" sz="2600" dirty="0">
+                <a:latin typeface="Times New Roman" panose="02020603050405020304" pitchFamily="18" charset="0"/>
+                <a:ea typeface="標楷體" panose="03000509000000000000" pitchFamily="65" charset="-120"/>
+                <a:cs typeface="王漢宗顏楷體"/>
+                <a:sym typeface="王漢宗顏楷體"/>
+              </a:rPr>
+              <a:t>與</a:t>
+            </a:r>
+            <a:r>
+              <a:rPr lang="en-US" altLang="zh-TW" sz="2600" dirty="0">
+                <a:latin typeface="Times New Roman" panose="02020603050405020304" pitchFamily="18" charset="0"/>
+                <a:ea typeface="標楷體" panose="03000509000000000000" pitchFamily="65" charset="-120"/>
+                <a:cs typeface="王漢宗顏楷體"/>
+                <a:sym typeface="王漢宗顏楷體"/>
+              </a:rPr>
+              <a:t>bind</a:t>
+            </a:r>
+            <a:r>
+              <a:rPr lang="zh-TW" altLang="en-US" sz="2600" dirty="0">
+                <a:latin typeface="Times New Roman" panose="02020603050405020304" pitchFamily="18" charset="0"/>
+                <a:ea typeface="標楷體" panose="03000509000000000000" pitchFamily="65" charset="-120"/>
+                <a:cs typeface="王漢宗顏楷體"/>
+                <a:sym typeface="王漢宗顏楷體"/>
+              </a:rPr>
+              <a:t>不同的是，</a:t>
+            </a:r>
+            <a:r>
+              <a:rPr lang="en-US" altLang="zh-TW" sz="2600" dirty="0">
+                <a:latin typeface="Times New Roman" panose="02020603050405020304" pitchFamily="18" charset="0"/>
+                <a:ea typeface="標楷體" panose="03000509000000000000" pitchFamily="65" charset="-120"/>
+                <a:cs typeface="王漢宗顏楷體"/>
+                <a:sym typeface="王漢宗顏楷體"/>
+              </a:rPr>
+              <a:t>call</a:t>
+            </a:r>
+            <a:r>
+              <a:rPr lang="zh-TW" altLang="en-US" sz="2600" dirty="0">
+                <a:latin typeface="Times New Roman" panose="02020603050405020304" pitchFamily="18" charset="0"/>
+                <a:ea typeface="標楷體" panose="03000509000000000000" pitchFamily="65" charset="-120"/>
+                <a:cs typeface="王漢宗顏楷體"/>
+                <a:sym typeface="王漢宗顏楷體"/>
+              </a:rPr>
+              <a:t>不會返回一個新的函式，而是直接執行。</a:t>
+            </a:r>
+            <a:endParaRPr lang="en-US" altLang="zh-TW" sz="2600" dirty="0">
+              <a:latin typeface="Times New Roman" panose="02020603050405020304" pitchFamily="18" charset="0"/>
+              <a:ea typeface="標楷體" panose="03000509000000000000" pitchFamily="65" charset="-120"/>
+              <a:cs typeface="王漢宗顏楷體"/>
+              <a:sym typeface="王漢宗顏楷體"/>
+            </a:endParaRPr>
+          </a:p>
+        </p:txBody>
+      </p:sp>
+      <p:grpSp>
+        <p:nvGrpSpPr>
+          <p:cNvPr id="28" name="Group 2">
+            <a:extLst>
+              <a:ext uri="{FF2B5EF4-FFF2-40B4-BE49-F238E27FC236}">
+                <a16:creationId xmlns:a16="http://schemas.microsoft.com/office/drawing/2014/main" id="{C571510F-4237-4159-A25E-D023AAABD06D}"/>
+              </a:ext>
+            </a:extLst>
+          </p:cNvPr>
+          <p:cNvGrpSpPr/>
+          <p:nvPr/>
+        </p:nvGrpSpPr>
+        <p:grpSpPr>
+          <a:xfrm>
+            <a:off x="0" y="0"/>
+            <a:ext cx="18288000" cy="1691609"/>
+            <a:chOff x="0" y="0"/>
+            <a:chExt cx="4816593" cy="543967"/>
+          </a:xfrm>
+        </p:grpSpPr>
+        <p:sp>
+          <p:nvSpPr>
+            <p:cNvPr id="29" name="Freeform 3">
+              <a:extLst>
+                <a:ext uri="{FF2B5EF4-FFF2-40B4-BE49-F238E27FC236}">
+                  <a16:creationId xmlns:a16="http://schemas.microsoft.com/office/drawing/2014/main" id="{8558C2F7-92C9-4ED9-A7F6-36896AE39BAD}"/>
+                </a:ext>
+              </a:extLst>
+            </p:cNvPr>
+            <p:cNvSpPr/>
+            <p:nvPr/>
+          </p:nvSpPr>
+          <p:spPr>
+            <a:xfrm>
+              <a:off x="0" y="0"/>
+              <a:ext cx="4816592" cy="543967"/>
+            </a:xfrm>
+            <a:custGeom>
+              <a:avLst/>
+              <a:gdLst/>
+              <a:ahLst/>
+              <a:cxnLst/>
+              <a:rect l="l" t="t" r="r" b="b"/>
+              <a:pathLst>
+                <a:path w="4816592" h="543967">
+                  <a:moveTo>
+                    <a:pt x="0" y="0"/>
+                  </a:moveTo>
+                  <a:lnTo>
+                    <a:pt x="4816592" y="0"/>
+                  </a:lnTo>
+                  <a:lnTo>
+                    <a:pt x="4816592" y="543967"/>
+                  </a:lnTo>
+                  <a:lnTo>
+                    <a:pt x="0" y="543967"/>
+                  </a:lnTo>
+                  <a:close/>
+                </a:path>
+              </a:pathLst>
+            </a:custGeom>
+            <a:gradFill rotWithShape="1">
+              <a:gsLst>
+                <a:gs pos="0">
+                  <a:srgbClr val="B81B22">
+                    <a:alpha val="100000"/>
+                  </a:srgbClr>
+                </a:gs>
+                <a:gs pos="25000">
+                  <a:srgbClr val="B81B22">
+                    <a:alpha val="99500"/>
+                  </a:srgbClr>
+                </a:gs>
+                <a:gs pos="50000">
+                  <a:srgbClr val="E82A34">
+                    <a:alpha val="100000"/>
+                  </a:srgbClr>
+                </a:gs>
+                <a:gs pos="75000">
+                  <a:srgbClr val="F89DA1">
+                    <a:alpha val="100000"/>
+                  </a:srgbClr>
+                </a:gs>
+                <a:gs pos="100000">
+                  <a:srgbClr val="FFFFFF">
+                    <a:alpha val="99500"/>
+                  </a:srgbClr>
+                </a:gs>
+              </a:gsLst>
+              <a:lin ang="0"/>
+            </a:gradFill>
+          </p:spPr>
+        </p:sp>
+        <p:sp>
+          <p:nvSpPr>
+            <p:cNvPr id="30" name="TextBox 4">
+              <a:extLst>
+                <a:ext uri="{FF2B5EF4-FFF2-40B4-BE49-F238E27FC236}">
+                  <a16:creationId xmlns:a16="http://schemas.microsoft.com/office/drawing/2014/main" id="{CC107A00-22F6-47C1-AAF1-49AC9E4F1FE8}"/>
+                </a:ext>
+              </a:extLst>
+            </p:cNvPr>
+            <p:cNvSpPr txBox="1"/>
+            <p:nvPr/>
+          </p:nvSpPr>
+          <p:spPr>
+            <a:xfrm>
+              <a:off x="0" y="-47625"/>
+              <a:ext cx="4816593" cy="591592"/>
+            </a:xfrm>
+            <a:prstGeom prst="rect">
+              <a:avLst/>
+            </a:prstGeom>
+          </p:spPr>
+          <p:txBody>
+            <a:bodyPr lIns="50800" tIns="50800" rIns="50800" bIns="50800" rtlCol="0" anchor="ctr"/>
+            <a:lstStyle/>
+            <a:p>
+              <a:pPr algn="ctr">
+                <a:lnSpc>
+                  <a:spcPts val="2659"/>
+                </a:lnSpc>
+              </a:pPr>
+              <a:endParaRPr>
+                <a:latin typeface="標楷體" panose="03000509000000000000" pitchFamily="65" charset="-120"/>
+                <a:ea typeface="標楷體" panose="03000509000000000000" pitchFamily="65" charset="-120"/>
+              </a:endParaRPr>
+            </a:p>
+          </p:txBody>
+        </p:sp>
+      </p:grpSp>
+      <p:sp>
+        <p:nvSpPr>
+          <p:cNvPr id="34" name="TextBox 8">
+            <a:extLst>
+              <a:ext uri="{FF2B5EF4-FFF2-40B4-BE49-F238E27FC236}">
+                <a16:creationId xmlns:a16="http://schemas.microsoft.com/office/drawing/2014/main" id="{6A6E9B8B-C857-4E5F-B514-20784942772F}"/>
+              </a:ext>
+            </a:extLst>
+          </p:cNvPr>
+          <p:cNvSpPr txBox="1"/>
+          <p:nvPr/>
+        </p:nvSpPr>
+        <p:spPr>
+          <a:xfrm>
+            <a:off x="304800" y="110995"/>
+            <a:ext cx="12801600" cy="1321516"/>
+          </a:xfrm>
+          <a:prstGeom prst="rect">
+            <a:avLst/>
+          </a:prstGeom>
+        </p:spPr>
+        <p:txBody>
+          <a:bodyPr wrap="square" lIns="0" tIns="0" rIns="0" bIns="0" rtlCol="0" anchor="t">
+            <a:spAutoFit/>
+          </a:bodyPr>
+          <a:lstStyle/>
+          <a:p>
+            <a:pPr algn="l">
+              <a:lnSpc>
+                <a:spcPts val="11200"/>
+              </a:lnSpc>
+              <a:spcBef>
+                <a:spcPct val="0"/>
+              </a:spcBef>
+            </a:pPr>
+            <a:r>
+              <a:rPr lang="zh-TW" altLang="en-US" sz="8000" dirty="0">
+                <a:solidFill>
+                  <a:srgbClr val="FFFFFF"/>
+                </a:solidFill>
+                <a:latin typeface="Times New Roman" panose="02020603050405020304" pitchFamily="18" charset="0"/>
+                <a:ea typeface="標楷體" panose="03000509000000000000" pitchFamily="65" charset="-120"/>
+                <a:cs typeface="Times New Roman" panose="02020603050405020304" pitchFamily="18" charset="0"/>
+                <a:sym typeface="王漢宗顏楷體"/>
+              </a:rPr>
+              <a:t>顯式綁定</a:t>
+            </a:r>
+            <a:r>
+              <a:rPr lang="en-US" altLang="zh-TW" sz="8000" dirty="0">
+                <a:solidFill>
+                  <a:srgbClr val="FFFFFF"/>
+                </a:solidFill>
+                <a:latin typeface="Times New Roman" panose="02020603050405020304" pitchFamily="18" charset="0"/>
+                <a:ea typeface="標楷體" panose="03000509000000000000" pitchFamily="65" charset="-120"/>
+                <a:cs typeface="Times New Roman" panose="02020603050405020304" pitchFamily="18" charset="0"/>
+                <a:sym typeface="王漢宗顏楷體"/>
+              </a:rPr>
+              <a:t>(Explicit binding)</a:t>
+            </a:r>
+          </a:p>
+        </p:txBody>
+      </p:sp>
+      <p:pic>
+        <p:nvPicPr>
+          <p:cNvPr id="3" name="圖片 2">
+            <a:extLst>
+              <a:ext uri="{FF2B5EF4-FFF2-40B4-BE49-F238E27FC236}">
+                <a16:creationId xmlns:a16="http://schemas.microsoft.com/office/drawing/2014/main" id="{7F25860D-C166-497C-AB7D-2950DE050862}"/>
+              </a:ext>
+            </a:extLst>
+          </p:cNvPr>
+          <p:cNvPicPr>
+            <a:picLocks noChangeAspect="1"/>
+          </p:cNvPicPr>
+          <p:nvPr/>
+        </p:nvPicPr>
+        <p:blipFill>
+          <a:blip r:embed="rId2"/>
+          <a:stretch>
+            <a:fillRect/>
+          </a:stretch>
+        </p:blipFill>
+        <p:spPr>
+          <a:xfrm>
+            <a:off x="152400" y="3505655"/>
+            <a:ext cx="10513144" cy="2065082"/>
+          </a:xfrm>
+          <a:prstGeom prst="rect">
+            <a:avLst/>
+          </a:prstGeom>
+        </p:spPr>
+      </p:pic>
+      <p:pic>
+        <p:nvPicPr>
+          <p:cNvPr id="7" name="圖片 6">
+            <a:extLst>
+              <a:ext uri="{FF2B5EF4-FFF2-40B4-BE49-F238E27FC236}">
+                <a16:creationId xmlns:a16="http://schemas.microsoft.com/office/drawing/2014/main" id="{1900D23A-C80B-435D-B0C7-7D25724E70DA}"/>
+              </a:ext>
+            </a:extLst>
+          </p:cNvPr>
+          <p:cNvPicPr>
+            <a:picLocks noChangeAspect="1"/>
+          </p:cNvPicPr>
+          <p:nvPr/>
+        </p:nvPicPr>
+        <p:blipFill>
+          <a:blip r:embed="rId3"/>
+          <a:stretch>
+            <a:fillRect/>
+          </a:stretch>
+        </p:blipFill>
+        <p:spPr>
+          <a:xfrm>
+            <a:off x="152400" y="5642229"/>
+            <a:ext cx="8954610" cy="4533776"/>
+          </a:xfrm>
+          <a:prstGeom prst="rect">
+            <a:avLst/>
+          </a:prstGeom>
+        </p:spPr>
+      </p:pic>
+      <p:pic>
+        <p:nvPicPr>
+          <p:cNvPr id="11" name="圖片 10">
+            <a:extLst>
+              <a:ext uri="{FF2B5EF4-FFF2-40B4-BE49-F238E27FC236}">
+                <a16:creationId xmlns:a16="http://schemas.microsoft.com/office/drawing/2014/main" id="{CBFAACE7-9668-4CC3-8897-62262012C04A}"/>
+              </a:ext>
+            </a:extLst>
+          </p:cNvPr>
+          <p:cNvPicPr>
+            <a:picLocks noChangeAspect="1"/>
+          </p:cNvPicPr>
+          <p:nvPr/>
+        </p:nvPicPr>
+        <p:blipFill>
+          <a:blip r:embed="rId4"/>
+          <a:stretch>
+            <a:fillRect/>
+          </a:stretch>
+        </p:blipFill>
+        <p:spPr>
+          <a:xfrm>
+            <a:off x="9677400" y="5642229"/>
+            <a:ext cx="8175422" cy="4533776"/>
+          </a:xfrm>
+          <a:prstGeom prst="rect">
+            <a:avLst/>
+          </a:prstGeom>
+        </p:spPr>
+      </p:pic>
+    </p:spTree>
+    <p:extLst>
+      <p:ext uri="{BB962C8B-B14F-4D97-AF65-F5344CB8AC3E}">
+        <p14:creationId xmlns:p14="http://schemas.microsoft.com/office/powerpoint/2010/main" val="3944815561"/>
+      </p:ext>
+    </p:extLst>
+  </p:cSld>
+  <p:clrMapOvr>
+    <a:masterClrMapping/>
+  </p:clrMapOvr>
+</p:sld>
+</file>
+
+<file path=ppt/slides/slide31.xml><?xml version="1.0" encoding="utf-8"?>
+<p:sld xmlns:a="http://schemas.openxmlformats.org/drawingml/2006/main" xmlns:r="http://schemas.openxmlformats.org/officeDocument/2006/relationships" xmlns:p="http://schemas.openxmlformats.org/presentationml/2006/main">
+  <p:cSld>
+    <p:spTree>
+      <p:nvGrpSpPr>
+        <p:cNvPr id="1" name=""/>
+        <p:cNvGrpSpPr/>
+        <p:nvPr/>
+      </p:nvGrpSpPr>
+      <p:grpSpPr>
+        <a:xfrm>
+          <a:off x="0" y="0"/>
+          <a:ext cx="0" cy="0"/>
+          <a:chOff x="0" y="0"/>
+          <a:chExt cx="0" cy="0"/>
+        </a:xfrm>
+      </p:grpSpPr>
+      <p:sp>
+        <p:nvSpPr>
+          <p:cNvPr id="27" name="TextBox 10">
+            <a:extLst>
+              <a:ext uri="{FF2B5EF4-FFF2-40B4-BE49-F238E27FC236}">
+                <a16:creationId xmlns:a16="http://schemas.microsoft.com/office/drawing/2014/main" id="{2A659F81-1ED8-4106-8C45-6A01D7DBC583}"/>
+              </a:ext>
+            </a:extLst>
+          </p:cNvPr>
+          <p:cNvSpPr txBox="1"/>
+          <p:nvPr/>
+        </p:nvSpPr>
+        <p:spPr>
+          <a:xfrm>
+            <a:off x="152400" y="1691609"/>
+            <a:ext cx="15621000" cy="1665136"/>
+          </a:xfrm>
+          <a:prstGeom prst="rect">
+            <a:avLst/>
+          </a:prstGeom>
+        </p:spPr>
+        <p:txBody>
+          <a:bodyPr wrap="square" lIns="0" tIns="0" rIns="0" bIns="0" rtlCol="0" anchor="t">
+            <a:spAutoFit/>
+          </a:bodyPr>
+          <a:lstStyle/>
+          <a:p>
+            <a:pPr algn="l">
+              <a:lnSpc>
+                <a:spcPts val="4480"/>
+              </a:lnSpc>
+              <a:spcBef>
+                <a:spcPct val="0"/>
+              </a:spcBef>
+            </a:pPr>
+            <a:r>
+              <a:rPr lang="en-US" altLang="zh-TW" sz="2600" dirty="0">
+                <a:latin typeface="Times New Roman" panose="02020603050405020304" pitchFamily="18" charset="0"/>
+                <a:ea typeface="標楷體" panose="03000509000000000000" pitchFamily="65" charset="-120"/>
+                <a:cs typeface="王漢宗顏楷體"/>
+                <a:sym typeface="王漢宗顏楷體"/>
+              </a:rPr>
+              <a:t>【</a:t>
+            </a:r>
+            <a:r>
+              <a:rPr lang="zh-TW" altLang="en-US" sz="2600" dirty="0">
+                <a:latin typeface="Times New Roman" panose="02020603050405020304" pitchFamily="18" charset="0"/>
+                <a:ea typeface="標楷體" panose="03000509000000000000" pitchFamily="65" charset="-120"/>
+                <a:cs typeface="王漢宗顏楷體"/>
+                <a:sym typeface="王漢宗顏楷體"/>
+              </a:rPr>
+              <a:t>呼叫函數</a:t>
+            </a:r>
+            <a:r>
+              <a:rPr lang="en-US" altLang="zh-TW" sz="2600" dirty="0">
+                <a:latin typeface="Times New Roman" panose="02020603050405020304" pitchFamily="18" charset="0"/>
+                <a:ea typeface="標楷體" panose="03000509000000000000" pitchFamily="65" charset="-120"/>
+                <a:cs typeface="王漢宗顏楷體"/>
+                <a:sym typeface="王漢宗顏楷體"/>
+              </a:rPr>
+              <a:t>(apply function)】</a:t>
+            </a:r>
+          </a:p>
+          <a:p>
+            <a:pPr marL="457200" indent="-457200" algn="l">
+              <a:lnSpc>
+                <a:spcPts val="4480"/>
+              </a:lnSpc>
+              <a:spcBef>
+                <a:spcPct val="0"/>
+              </a:spcBef>
+              <a:buFont typeface="Wingdings" panose="05000000000000000000" pitchFamily="2" charset="2"/>
+              <a:buChar char="v"/>
+            </a:pPr>
+            <a:r>
+              <a:rPr lang="zh-TW" altLang="en-US" sz="2600" dirty="0">
+                <a:latin typeface="Times New Roman" panose="02020603050405020304" pitchFamily="18" charset="0"/>
+                <a:ea typeface="標楷體" panose="03000509000000000000" pitchFamily="65" charset="-120"/>
+                <a:cs typeface="王漢宗顏楷體"/>
+                <a:sym typeface="王漢宗顏楷體"/>
+              </a:rPr>
+              <a:t>跟</a:t>
+            </a:r>
+            <a:r>
+              <a:rPr lang="en-US" altLang="zh-TW" sz="2600" dirty="0">
+                <a:latin typeface="Times New Roman" panose="02020603050405020304" pitchFamily="18" charset="0"/>
+                <a:ea typeface="標楷體" panose="03000509000000000000" pitchFamily="65" charset="-120"/>
+                <a:cs typeface="王漢宗顏楷體"/>
+                <a:sym typeface="王漢宗顏楷體"/>
+              </a:rPr>
+              <a:t>call</a:t>
+            </a:r>
+            <a:r>
+              <a:rPr lang="zh-TW" altLang="en-US" sz="2600" dirty="0">
+                <a:latin typeface="Times New Roman" panose="02020603050405020304" pitchFamily="18" charset="0"/>
+                <a:ea typeface="標楷體" panose="03000509000000000000" pitchFamily="65" charset="-120"/>
+                <a:cs typeface="王漢宗顏楷體"/>
+                <a:sym typeface="王漢宗顏楷體"/>
+              </a:rPr>
+              <a:t>依樣，差別是後面的參數要放到陣列裡。</a:t>
+            </a:r>
+            <a:endParaRPr lang="en-US" altLang="zh-TW" sz="2600" dirty="0">
+              <a:latin typeface="Times New Roman" panose="02020603050405020304" pitchFamily="18" charset="0"/>
+              <a:ea typeface="標楷體" panose="03000509000000000000" pitchFamily="65" charset="-120"/>
+              <a:cs typeface="王漢宗顏楷體"/>
+              <a:sym typeface="王漢宗顏楷體"/>
+            </a:endParaRPr>
+          </a:p>
+          <a:p>
+            <a:pPr marL="457200" indent="-457200" algn="l">
+              <a:lnSpc>
+                <a:spcPts val="4480"/>
+              </a:lnSpc>
+              <a:spcBef>
+                <a:spcPct val="0"/>
+              </a:spcBef>
+              <a:buFont typeface="Wingdings" panose="05000000000000000000" pitchFamily="2" charset="2"/>
+              <a:buChar char="v"/>
+            </a:pPr>
+            <a:r>
+              <a:rPr lang="zh-TW" altLang="en-US" sz="2600" dirty="0">
+                <a:latin typeface="Times New Roman" panose="02020603050405020304" pitchFamily="18" charset="0"/>
+                <a:ea typeface="標楷體" panose="03000509000000000000" pitchFamily="65" charset="-120"/>
+                <a:cs typeface="王漢宗顏楷體"/>
+                <a:sym typeface="王漢宗顏楷體"/>
+              </a:rPr>
+              <a:t>函數名稱</a:t>
+            </a:r>
+            <a:r>
+              <a:rPr lang="en-US" altLang="zh-TW" sz="2600" dirty="0">
+                <a:latin typeface="Times New Roman" panose="02020603050405020304" pitchFamily="18" charset="0"/>
+                <a:ea typeface="標楷體" panose="03000509000000000000" pitchFamily="65" charset="-120"/>
+                <a:cs typeface="王漢宗顏楷體"/>
+                <a:sym typeface="王漢宗顏楷體"/>
+              </a:rPr>
+              <a:t>.apply(</a:t>
+            </a:r>
+            <a:r>
+              <a:rPr lang="zh-TW" altLang="en-US" sz="2600" dirty="0">
+                <a:latin typeface="Times New Roman" panose="02020603050405020304" pitchFamily="18" charset="0"/>
+                <a:ea typeface="標楷體" panose="03000509000000000000" pitchFamily="65" charset="-120"/>
+                <a:cs typeface="王漢宗顏楷體"/>
+                <a:sym typeface="王漢宗顏楷體"/>
+              </a:rPr>
+              <a:t>目標物件</a:t>
+            </a:r>
+            <a:r>
+              <a:rPr lang="en-US" altLang="zh-TW" sz="2600" dirty="0">
+                <a:latin typeface="Times New Roman" panose="02020603050405020304" pitchFamily="18" charset="0"/>
+                <a:ea typeface="標楷體" panose="03000509000000000000" pitchFamily="65" charset="-120"/>
+                <a:cs typeface="王漢宗顏楷體"/>
+                <a:sym typeface="王漢宗顏楷體"/>
+              </a:rPr>
+              <a:t>, [</a:t>
+            </a:r>
+            <a:r>
+              <a:rPr lang="zh-TW" altLang="en-US" sz="2600" dirty="0">
+                <a:latin typeface="Times New Roman" panose="02020603050405020304" pitchFamily="18" charset="0"/>
+                <a:ea typeface="標楷體" panose="03000509000000000000" pitchFamily="65" charset="-120"/>
+                <a:cs typeface="王漢宗顏楷體"/>
+                <a:sym typeface="王漢宗顏楷體"/>
+              </a:rPr>
+              <a:t>參數</a:t>
+            </a:r>
+            <a:r>
+              <a:rPr lang="en-US" altLang="zh-TW" sz="2600" dirty="0">
+                <a:latin typeface="Times New Roman" panose="02020603050405020304" pitchFamily="18" charset="0"/>
+                <a:ea typeface="標楷體" panose="03000509000000000000" pitchFamily="65" charset="-120"/>
+                <a:cs typeface="王漢宗顏楷體"/>
+                <a:sym typeface="王漢宗顏楷體"/>
+              </a:rPr>
+              <a:t>1, </a:t>
+            </a:r>
+            <a:r>
+              <a:rPr lang="zh-TW" altLang="en-US" sz="2600" dirty="0">
+                <a:latin typeface="Times New Roman" panose="02020603050405020304" pitchFamily="18" charset="0"/>
+                <a:ea typeface="標楷體" panose="03000509000000000000" pitchFamily="65" charset="-120"/>
+                <a:cs typeface="王漢宗顏楷體"/>
+                <a:sym typeface="王漢宗顏楷體"/>
+              </a:rPr>
+              <a:t>參數</a:t>
+            </a:r>
+            <a:r>
+              <a:rPr lang="en-US" altLang="zh-TW" sz="2600" dirty="0">
+                <a:latin typeface="Times New Roman" panose="02020603050405020304" pitchFamily="18" charset="0"/>
+                <a:ea typeface="標楷體" panose="03000509000000000000" pitchFamily="65" charset="-120"/>
+                <a:cs typeface="王漢宗顏楷體"/>
+                <a:sym typeface="王漢宗顏楷體"/>
+              </a:rPr>
+              <a:t>2, ...]);</a:t>
+            </a:r>
+          </a:p>
+        </p:txBody>
+      </p:sp>
+      <p:grpSp>
+        <p:nvGrpSpPr>
+          <p:cNvPr id="28" name="Group 2">
+            <a:extLst>
+              <a:ext uri="{FF2B5EF4-FFF2-40B4-BE49-F238E27FC236}">
+                <a16:creationId xmlns:a16="http://schemas.microsoft.com/office/drawing/2014/main" id="{C571510F-4237-4159-A25E-D023AAABD06D}"/>
+              </a:ext>
+            </a:extLst>
+          </p:cNvPr>
+          <p:cNvGrpSpPr/>
+          <p:nvPr/>
+        </p:nvGrpSpPr>
+        <p:grpSpPr>
+          <a:xfrm>
+            <a:off x="0" y="0"/>
+            <a:ext cx="18288000" cy="1691609"/>
+            <a:chOff x="0" y="0"/>
+            <a:chExt cx="4816593" cy="543967"/>
+          </a:xfrm>
+        </p:grpSpPr>
+        <p:sp>
+          <p:nvSpPr>
+            <p:cNvPr id="29" name="Freeform 3">
+              <a:extLst>
+                <a:ext uri="{FF2B5EF4-FFF2-40B4-BE49-F238E27FC236}">
+                  <a16:creationId xmlns:a16="http://schemas.microsoft.com/office/drawing/2014/main" id="{8558C2F7-92C9-4ED9-A7F6-36896AE39BAD}"/>
+                </a:ext>
+              </a:extLst>
+            </p:cNvPr>
+            <p:cNvSpPr/>
+            <p:nvPr/>
+          </p:nvSpPr>
+          <p:spPr>
+            <a:xfrm>
+              <a:off x="0" y="0"/>
+              <a:ext cx="4816592" cy="543967"/>
+            </a:xfrm>
+            <a:custGeom>
+              <a:avLst/>
+              <a:gdLst/>
+              <a:ahLst/>
+              <a:cxnLst/>
+              <a:rect l="l" t="t" r="r" b="b"/>
+              <a:pathLst>
+                <a:path w="4816592" h="543967">
+                  <a:moveTo>
+                    <a:pt x="0" y="0"/>
+                  </a:moveTo>
+                  <a:lnTo>
+                    <a:pt x="4816592" y="0"/>
+                  </a:lnTo>
+                  <a:lnTo>
+                    <a:pt x="4816592" y="543967"/>
+                  </a:lnTo>
+                  <a:lnTo>
+                    <a:pt x="0" y="543967"/>
+                  </a:lnTo>
+                  <a:close/>
+                </a:path>
+              </a:pathLst>
+            </a:custGeom>
+            <a:gradFill rotWithShape="1">
+              <a:gsLst>
+                <a:gs pos="0">
+                  <a:srgbClr val="B81B22">
+                    <a:alpha val="100000"/>
+                  </a:srgbClr>
+                </a:gs>
+                <a:gs pos="25000">
+                  <a:srgbClr val="B81B22">
+                    <a:alpha val="99500"/>
+                  </a:srgbClr>
+                </a:gs>
+                <a:gs pos="50000">
+                  <a:srgbClr val="E82A34">
+                    <a:alpha val="100000"/>
+                  </a:srgbClr>
+                </a:gs>
+                <a:gs pos="75000">
+                  <a:srgbClr val="F89DA1">
+                    <a:alpha val="100000"/>
+                  </a:srgbClr>
+                </a:gs>
+                <a:gs pos="100000">
+                  <a:srgbClr val="FFFFFF">
+                    <a:alpha val="99500"/>
+                  </a:srgbClr>
+                </a:gs>
+              </a:gsLst>
+              <a:lin ang="0"/>
+            </a:gradFill>
+          </p:spPr>
+        </p:sp>
+        <p:sp>
+          <p:nvSpPr>
+            <p:cNvPr id="30" name="TextBox 4">
+              <a:extLst>
+                <a:ext uri="{FF2B5EF4-FFF2-40B4-BE49-F238E27FC236}">
+                  <a16:creationId xmlns:a16="http://schemas.microsoft.com/office/drawing/2014/main" id="{CC107A00-22F6-47C1-AAF1-49AC9E4F1FE8}"/>
+                </a:ext>
+              </a:extLst>
+            </p:cNvPr>
+            <p:cNvSpPr txBox="1"/>
+            <p:nvPr/>
+          </p:nvSpPr>
+          <p:spPr>
+            <a:xfrm>
+              <a:off x="0" y="-47625"/>
+              <a:ext cx="4816593" cy="591592"/>
+            </a:xfrm>
+            <a:prstGeom prst="rect">
+              <a:avLst/>
+            </a:prstGeom>
+          </p:spPr>
+          <p:txBody>
+            <a:bodyPr lIns="50800" tIns="50800" rIns="50800" bIns="50800" rtlCol="0" anchor="ctr"/>
+            <a:lstStyle/>
+            <a:p>
+              <a:pPr algn="ctr">
+                <a:lnSpc>
+                  <a:spcPts val="2659"/>
+                </a:lnSpc>
+              </a:pPr>
+              <a:endParaRPr>
+                <a:latin typeface="標楷體" panose="03000509000000000000" pitchFamily="65" charset="-120"/>
+                <a:ea typeface="標楷體" panose="03000509000000000000" pitchFamily="65" charset="-120"/>
+              </a:endParaRPr>
+            </a:p>
+          </p:txBody>
+        </p:sp>
+      </p:grpSp>
+      <p:sp>
+        <p:nvSpPr>
+          <p:cNvPr id="34" name="TextBox 8">
+            <a:extLst>
+              <a:ext uri="{FF2B5EF4-FFF2-40B4-BE49-F238E27FC236}">
+                <a16:creationId xmlns:a16="http://schemas.microsoft.com/office/drawing/2014/main" id="{6A6E9B8B-C857-4E5F-B514-20784942772F}"/>
+              </a:ext>
+            </a:extLst>
+          </p:cNvPr>
+          <p:cNvSpPr txBox="1"/>
+          <p:nvPr/>
+        </p:nvSpPr>
+        <p:spPr>
+          <a:xfrm>
+            <a:off x="304800" y="110995"/>
+            <a:ext cx="12801600" cy="1321516"/>
+          </a:xfrm>
+          <a:prstGeom prst="rect">
+            <a:avLst/>
+          </a:prstGeom>
+        </p:spPr>
+        <p:txBody>
+          <a:bodyPr wrap="square" lIns="0" tIns="0" rIns="0" bIns="0" rtlCol="0" anchor="t">
+            <a:spAutoFit/>
+          </a:bodyPr>
+          <a:lstStyle/>
+          <a:p>
+            <a:pPr algn="l">
+              <a:lnSpc>
+                <a:spcPts val="11200"/>
+              </a:lnSpc>
+              <a:spcBef>
+                <a:spcPct val="0"/>
+              </a:spcBef>
+            </a:pPr>
+            <a:r>
+              <a:rPr lang="zh-TW" altLang="en-US" sz="8000" dirty="0">
+                <a:solidFill>
+                  <a:srgbClr val="FFFFFF"/>
+                </a:solidFill>
+                <a:latin typeface="Times New Roman" panose="02020603050405020304" pitchFamily="18" charset="0"/>
+                <a:ea typeface="標楷體" panose="03000509000000000000" pitchFamily="65" charset="-120"/>
+                <a:cs typeface="Times New Roman" panose="02020603050405020304" pitchFamily="18" charset="0"/>
+                <a:sym typeface="王漢宗顏楷體"/>
+              </a:rPr>
+              <a:t>顯式綁定</a:t>
+            </a:r>
+            <a:r>
+              <a:rPr lang="en-US" altLang="zh-TW" sz="8000" dirty="0">
+                <a:solidFill>
+                  <a:srgbClr val="FFFFFF"/>
+                </a:solidFill>
+                <a:latin typeface="Times New Roman" panose="02020603050405020304" pitchFamily="18" charset="0"/>
+                <a:ea typeface="標楷體" panose="03000509000000000000" pitchFamily="65" charset="-120"/>
+                <a:cs typeface="Times New Roman" panose="02020603050405020304" pitchFamily="18" charset="0"/>
+                <a:sym typeface="王漢宗顏楷體"/>
+              </a:rPr>
+              <a:t>(Explicit binding)</a:t>
+            </a:r>
+          </a:p>
+        </p:txBody>
+      </p:sp>
+      <p:pic>
+        <p:nvPicPr>
+          <p:cNvPr id="4" name="圖片 3">
+            <a:extLst>
+              <a:ext uri="{FF2B5EF4-FFF2-40B4-BE49-F238E27FC236}">
+                <a16:creationId xmlns:a16="http://schemas.microsoft.com/office/drawing/2014/main" id="{65BA25FB-9CC7-47E7-AE77-613121F96EAE}"/>
+              </a:ext>
+            </a:extLst>
+          </p:cNvPr>
+          <p:cNvPicPr>
+            <a:picLocks noChangeAspect="1"/>
+          </p:cNvPicPr>
+          <p:nvPr/>
+        </p:nvPicPr>
+        <p:blipFill>
+          <a:blip r:embed="rId2"/>
+          <a:stretch>
+            <a:fillRect/>
+          </a:stretch>
+        </p:blipFill>
+        <p:spPr>
+          <a:xfrm>
+            <a:off x="7543800" y="1777204"/>
+            <a:ext cx="10591800" cy="1787646"/>
+          </a:xfrm>
+          <a:prstGeom prst="rect">
+            <a:avLst/>
+          </a:prstGeom>
+        </p:spPr>
+      </p:pic>
+      <p:pic>
+        <p:nvPicPr>
+          <p:cNvPr id="6" name="圖片 5">
+            <a:extLst>
+              <a:ext uri="{FF2B5EF4-FFF2-40B4-BE49-F238E27FC236}">
+                <a16:creationId xmlns:a16="http://schemas.microsoft.com/office/drawing/2014/main" id="{804ED7A1-94FC-414C-9EFF-E5A04FA18EA4}"/>
+              </a:ext>
+            </a:extLst>
+          </p:cNvPr>
+          <p:cNvPicPr>
+            <a:picLocks noChangeAspect="1"/>
+          </p:cNvPicPr>
+          <p:nvPr/>
+        </p:nvPicPr>
+        <p:blipFill>
+          <a:blip r:embed="rId3"/>
+          <a:stretch>
+            <a:fillRect/>
+          </a:stretch>
+        </p:blipFill>
+        <p:spPr>
+          <a:xfrm>
+            <a:off x="7543801" y="3650445"/>
+            <a:ext cx="10591800" cy="1605802"/>
+          </a:xfrm>
+          <a:prstGeom prst="rect">
+            <a:avLst/>
+          </a:prstGeom>
+        </p:spPr>
+      </p:pic>
+      <p:pic>
+        <p:nvPicPr>
+          <p:cNvPr id="9" name="圖片 8">
+            <a:extLst>
+              <a:ext uri="{FF2B5EF4-FFF2-40B4-BE49-F238E27FC236}">
+                <a16:creationId xmlns:a16="http://schemas.microsoft.com/office/drawing/2014/main" id="{FD295E29-2C6A-4F3F-9E83-44CBFB247BC2}"/>
+              </a:ext>
+            </a:extLst>
+          </p:cNvPr>
+          <p:cNvPicPr>
+            <a:picLocks noChangeAspect="1"/>
+          </p:cNvPicPr>
+          <p:nvPr/>
+        </p:nvPicPr>
+        <p:blipFill>
+          <a:blip r:embed="rId4"/>
+          <a:stretch>
+            <a:fillRect/>
+          </a:stretch>
+        </p:blipFill>
+        <p:spPr>
+          <a:xfrm>
+            <a:off x="7569200" y="5315581"/>
+            <a:ext cx="9448800" cy="4926296"/>
+          </a:xfrm>
+          <a:prstGeom prst="rect">
+            <a:avLst/>
+          </a:prstGeom>
+        </p:spPr>
+      </p:pic>
+    </p:spTree>
+    <p:extLst>
+      <p:ext uri="{BB962C8B-B14F-4D97-AF65-F5344CB8AC3E}">
+        <p14:creationId xmlns:p14="http://schemas.microsoft.com/office/powerpoint/2010/main" val="990627097"/>
+      </p:ext>
+    </p:extLst>
+  </p:cSld>
+  <p:clrMapOvr>
+    <a:masterClrMapping/>
+  </p:clrMapOvr>
+</p:sld>
+</file>
+
+<file path=ppt/slides/slide32.xml><?xml version="1.0" encoding="utf-8"?>
+<p:sld xmlns:a="http://schemas.openxmlformats.org/drawingml/2006/main" xmlns:r="http://schemas.openxmlformats.org/officeDocument/2006/relationships" xmlns:p="http://schemas.openxmlformats.org/presentationml/2006/main">
+  <p:cSld>
+    <p:spTree>
+      <p:nvGrpSpPr>
+        <p:cNvPr id="1" name=""/>
+        <p:cNvGrpSpPr/>
+        <p:nvPr/>
+      </p:nvGrpSpPr>
+      <p:grpSpPr>
+        <a:xfrm>
+          <a:off x="0" y="0"/>
+          <a:ext cx="0" cy="0"/>
+          <a:chOff x="0" y="0"/>
+          <a:chExt cx="0" cy="0"/>
+        </a:xfrm>
+      </p:grpSpPr>
+      <p:sp>
+        <p:nvSpPr>
+          <p:cNvPr id="27" name="TextBox 10">
+            <a:extLst>
+              <a:ext uri="{FF2B5EF4-FFF2-40B4-BE49-F238E27FC236}">
+                <a16:creationId xmlns:a16="http://schemas.microsoft.com/office/drawing/2014/main" id="{2A659F81-1ED8-4106-8C45-6A01D7DBC583}"/>
+              </a:ext>
+            </a:extLst>
+          </p:cNvPr>
+          <p:cNvSpPr txBox="1"/>
+          <p:nvPr/>
+        </p:nvSpPr>
+        <p:spPr>
+          <a:xfrm>
+            <a:off x="206912" y="1785472"/>
+            <a:ext cx="13509088" cy="2242217"/>
+          </a:xfrm>
+          <a:prstGeom prst="rect">
+            <a:avLst/>
+          </a:prstGeom>
+        </p:spPr>
+        <p:txBody>
+          <a:bodyPr wrap="square" lIns="0" tIns="0" rIns="0" bIns="0" rtlCol="0" anchor="t">
+            <a:spAutoFit/>
+          </a:bodyPr>
+          <a:lstStyle/>
+          <a:p>
+            <a:pPr marL="457200" indent="-457200" algn="l">
+              <a:lnSpc>
+                <a:spcPts val="4480"/>
+              </a:lnSpc>
+              <a:spcBef>
+                <a:spcPct val="0"/>
+              </a:spcBef>
+              <a:buFont typeface="Wingdings" panose="05000000000000000000" pitchFamily="2" charset="2"/>
+              <a:buChar char="v"/>
+            </a:pPr>
+            <a:r>
+              <a:rPr lang="en-US" altLang="zh-TW" sz="2600" dirty="0">
+                <a:latin typeface="Times New Roman" panose="02020603050405020304" pitchFamily="18" charset="0"/>
+                <a:ea typeface="標楷體" panose="03000509000000000000" pitchFamily="65" charset="-120"/>
+                <a:cs typeface="王漢宗顏楷體"/>
+                <a:sym typeface="王漢宗顏楷體"/>
+              </a:rPr>
+              <a:t>ES Modules </a:t>
+            </a:r>
+            <a:r>
+              <a:rPr lang="zh-TW" altLang="en-US" sz="2600" dirty="0">
+                <a:latin typeface="Times New Roman" panose="02020603050405020304" pitchFamily="18" charset="0"/>
+                <a:ea typeface="標楷體" panose="03000509000000000000" pitchFamily="65" charset="-120"/>
+                <a:cs typeface="王漢宗顏楷體"/>
+                <a:sym typeface="王漢宗顏楷體"/>
+              </a:rPr>
+              <a:t>是 </a:t>
+            </a:r>
+            <a:r>
+              <a:rPr lang="en-US" altLang="zh-TW" sz="2600" dirty="0">
+                <a:latin typeface="Times New Roman" panose="02020603050405020304" pitchFamily="18" charset="0"/>
+                <a:ea typeface="標楷體" panose="03000509000000000000" pitchFamily="65" charset="-120"/>
+                <a:cs typeface="王漢宗顏楷體"/>
+                <a:sym typeface="王漢宗顏楷體"/>
+              </a:rPr>
+              <a:t>ES6 </a:t>
+            </a:r>
+            <a:r>
+              <a:rPr lang="zh-TW" altLang="en-US" sz="2600" dirty="0">
+                <a:latin typeface="Times New Roman" panose="02020603050405020304" pitchFamily="18" charset="0"/>
+                <a:ea typeface="標楷體" panose="03000509000000000000" pitchFamily="65" charset="-120"/>
+                <a:cs typeface="王漢宗顏楷體"/>
+                <a:sym typeface="王漢宗顏楷體"/>
+              </a:rPr>
+              <a:t>中引入的一個標準，解決了以前使用 </a:t>
+            </a:r>
+            <a:r>
+              <a:rPr lang="en-US" altLang="zh-TW" sz="2600" dirty="0">
+                <a:latin typeface="Times New Roman" panose="02020603050405020304" pitchFamily="18" charset="0"/>
+                <a:ea typeface="標楷體" panose="03000509000000000000" pitchFamily="65" charset="-120"/>
+                <a:cs typeface="王漢宗顏楷體"/>
+                <a:sym typeface="王漢宗顏楷體"/>
+              </a:rPr>
+              <a:t>require </a:t>
+            </a:r>
+            <a:r>
+              <a:rPr lang="zh-TW" altLang="en-US" sz="2600" dirty="0">
+                <a:latin typeface="Times New Roman" panose="02020603050405020304" pitchFamily="18" charset="0"/>
+                <a:ea typeface="標楷體" panose="03000509000000000000" pitchFamily="65" charset="-120"/>
+                <a:cs typeface="王漢宗顏楷體"/>
+                <a:sym typeface="王漢宗顏楷體"/>
+              </a:rPr>
+              <a:t>或全域變數的缺點。</a:t>
+            </a:r>
+            <a:endParaRPr lang="en-US" altLang="zh-TW" sz="2600" dirty="0">
+              <a:latin typeface="Times New Roman" panose="02020603050405020304" pitchFamily="18" charset="0"/>
+              <a:ea typeface="標楷體" panose="03000509000000000000" pitchFamily="65" charset="-120"/>
+              <a:cs typeface="王漢宗顏楷體"/>
+              <a:sym typeface="王漢宗顏楷體"/>
+            </a:endParaRPr>
+          </a:p>
+          <a:p>
+            <a:pPr marL="457200" indent="-457200" algn="l">
+              <a:lnSpc>
+                <a:spcPts val="4480"/>
+              </a:lnSpc>
+              <a:spcBef>
+                <a:spcPct val="0"/>
+              </a:spcBef>
+              <a:buFont typeface="Wingdings" panose="05000000000000000000" pitchFamily="2" charset="2"/>
+              <a:buChar char="v"/>
+            </a:pPr>
+            <a:r>
+              <a:rPr lang="zh-TW" altLang="en-US" sz="2600" dirty="0">
+                <a:latin typeface="Times New Roman" panose="02020603050405020304" pitchFamily="18" charset="0"/>
+                <a:ea typeface="標楷體" panose="03000509000000000000" pitchFamily="65" charset="-120"/>
+                <a:cs typeface="王漢宗顏楷體"/>
+                <a:sym typeface="王漢宗顏楷體"/>
+              </a:rPr>
+              <a:t>使用 </a:t>
+            </a:r>
+            <a:r>
+              <a:rPr lang="en-US" altLang="zh-TW" sz="2600" dirty="0">
+                <a:latin typeface="Times New Roman" panose="02020603050405020304" pitchFamily="18" charset="0"/>
+                <a:ea typeface="標楷體" panose="03000509000000000000" pitchFamily="65" charset="-120"/>
+                <a:cs typeface="王漢宗顏楷體"/>
+                <a:sym typeface="王漢宗顏楷體"/>
+              </a:rPr>
+              <a:t>require (</a:t>
+            </a:r>
+            <a:r>
+              <a:rPr lang="en-US" altLang="zh-TW" sz="2600" dirty="0" err="1">
+                <a:latin typeface="Times New Roman" panose="02020603050405020304" pitchFamily="18" charset="0"/>
+                <a:ea typeface="標楷體" panose="03000509000000000000" pitchFamily="65" charset="-120"/>
+                <a:cs typeface="王漢宗顏楷體"/>
+                <a:sym typeface="王漢宗顏楷體"/>
+              </a:rPr>
+              <a:t>CommonJS</a:t>
+            </a:r>
+            <a:r>
+              <a:rPr lang="en-US" altLang="zh-TW" sz="2600" dirty="0">
+                <a:latin typeface="Times New Roman" panose="02020603050405020304" pitchFamily="18" charset="0"/>
+                <a:ea typeface="標楷體" panose="03000509000000000000" pitchFamily="65" charset="-120"/>
+                <a:cs typeface="王漢宗顏楷體"/>
+                <a:sym typeface="王漢宗顏楷體"/>
+              </a:rPr>
+              <a:t>) </a:t>
+            </a:r>
+            <a:r>
+              <a:rPr lang="zh-TW" altLang="en-US" sz="2600" dirty="0">
+                <a:latin typeface="Times New Roman" panose="02020603050405020304" pitchFamily="18" charset="0"/>
+                <a:ea typeface="標楷體" panose="03000509000000000000" pitchFamily="65" charset="-120"/>
+                <a:cs typeface="王漢宗顏楷體"/>
+                <a:sym typeface="王漢宗顏楷體"/>
+              </a:rPr>
+              <a:t>的缺點</a:t>
+            </a:r>
+            <a:endParaRPr lang="en-US" altLang="zh-TW" sz="2600" dirty="0">
+              <a:latin typeface="Times New Roman" panose="02020603050405020304" pitchFamily="18" charset="0"/>
+              <a:ea typeface="標楷體" panose="03000509000000000000" pitchFamily="65" charset="-120"/>
+              <a:cs typeface="王漢宗顏楷體"/>
+              <a:sym typeface="王漢宗顏楷體"/>
+            </a:endParaRPr>
+          </a:p>
+          <a:p>
+            <a:pPr marL="914400" lvl="1" indent="-457200">
+              <a:lnSpc>
+                <a:spcPts val="4480"/>
+              </a:lnSpc>
+              <a:spcBef>
+                <a:spcPct val="0"/>
+              </a:spcBef>
+              <a:buFont typeface="Wingdings" panose="05000000000000000000" pitchFamily="2" charset="2"/>
+              <a:buChar char="v"/>
+            </a:pPr>
+            <a:r>
+              <a:rPr lang="en-US" altLang="zh-TW" sz="2600" dirty="0">
+                <a:latin typeface="Times New Roman" panose="02020603050405020304" pitchFamily="18" charset="0"/>
+                <a:ea typeface="標楷體" panose="03000509000000000000" pitchFamily="65" charset="-120"/>
+                <a:cs typeface="王漢宗顏楷體"/>
+                <a:sym typeface="王漢宗顏楷體"/>
+              </a:rPr>
+              <a:t>require </a:t>
+            </a:r>
+            <a:r>
+              <a:rPr lang="zh-TW" altLang="en-US" sz="2600" dirty="0">
+                <a:latin typeface="Times New Roman" panose="02020603050405020304" pitchFamily="18" charset="0"/>
+                <a:ea typeface="標楷體" panose="03000509000000000000" pitchFamily="65" charset="-120"/>
+                <a:cs typeface="王漢宗顏楷體"/>
+                <a:sym typeface="王漢宗顏楷體"/>
+              </a:rPr>
+              <a:t>是同步的，這意味著它會阻塞程式碼執行。</a:t>
+            </a:r>
+            <a:endParaRPr lang="en-US" altLang="zh-TW" sz="2600" dirty="0">
+              <a:latin typeface="Times New Roman" panose="02020603050405020304" pitchFamily="18" charset="0"/>
+              <a:ea typeface="標楷體" panose="03000509000000000000" pitchFamily="65" charset="-120"/>
+              <a:cs typeface="王漢宗顏楷體"/>
+              <a:sym typeface="王漢宗顏楷體"/>
+            </a:endParaRPr>
+          </a:p>
+          <a:p>
+            <a:pPr marL="914400" lvl="1" indent="-457200">
+              <a:lnSpc>
+                <a:spcPts val="4480"/>
+              </a:lnSpc>
+              <a:spcBef>
+                <a:spcPct val="0"/>
+              </a:spcBef>
+              <a:buFont typeface="Wingdings" panose="05000000000000000000" pitchFamily="2" charset="2"/>
+              <a:buChar char="v"/>
+            </a:pPr>
+            <a:r>
+              <a:rPr lang="en-US" altLang="zh-TW" sz="2600" dirty="0">
+                <a:latin typeface="Times New Roman" panose="02020603050405020304" pitchFamily="18" charset="0"/>
+                <a:ea typeface="標楷體" panose="03000509000000000000" pitchFamily="65" charset="-120"/>
+                <a:cs typeface="王漢宗顏楷體"/>
+                <a:sym typeface="王漢宗顏楷體"/>
+              </a:rPr>
+              <a:t>require </a:t>
+            </a:r>
+            <a:r>
+              <a:rPr lang="zh-TW" altLang="en-US" sz="2600" dirty="0">
+                <a:latin typeface="Times New Roman" panose="02020603050405020304" pitchFamily="18" charset="0"/>
+                <a:ea typeface="標楷體" panose="03000509000000000000" pitchFamily="65" charset="-120"/>
+                <a:cs typeface="王漢宗顏楷體"/>
+                <a:sym typeface="王漢宗顏楷體"/>
+              </a:rPr>
+              <a:t>是 </a:t>
+            </a:r>
+            <a:r>
+              <a:rPr lang="en-US" altLang="zh-TW" sz="2600" dirty="0" err="1">
+                <a:latin typeface="Times New Roman" panose="02020603050405020304" pitchFamily="18" charset="0"/>
+                <a:ea typeface="標楷體" panose="03000509000000000000" pitchFamily="65" charset="-120"/>
+                <a:cs typeface="王漢宗顏楷體"/>
+                <a:sym typeface="王漢宗顏楷體"/>
+              </a:rPr>
+              <a:t>CommonJS</a:t>
+            </a:r>
+            <a:r>
+              <a:rPr lang="en-US" altLang="zh-TW" sz="2600" dirty="0">
+                <a:latin typeface="Times New Roman" panose="02020603050405020304" pitchFamily="18" charset="0"/>
+                <a:ea typeface="標楷體" panose="03000509000000000000" pitchFamily="65" charset="-120"/>
+                <a:cs typeface="王漢宗顏楷體"/>
+                <a:sym typeface="王漢宗顏楷體"/>
+              </a:rPr>
+              <a:t> </a:t>
+            </a:r>
+            <a:r>
+              <a:rPr lang="zh-TW" altLang="en-US" sz="2600" dirty="0">
+                <a:latin typeface="Times New Roman" panose="02020603050405020304" pitchFamily="18" charset="0"/>
+                <a:ea typeface="標楷體" panose="03000509000000000000" pitchFamily="65" charset="-120"/>
+                <a:cs typeface="王漢宗顏楷體"/>
+                <a:sym typeface="王漢宗顏楷體"/>
+              </a:rPr>
+              <a:t>的一部分，設計時主要針對 </a:t>
+            </a:r>
+            <a:r>
+              <a:rPr lang="en-US" altLang="zh-TW" sz="2600" dirty="0">
+                <a:latin typeface="Times New Roman" panose="02020603050405020304" pitchFamily="18" charset="0"/>
+                <a:ea typeface="標楷體" panose="03000509000000000000" pitchFamily="65" charset="-120"/>
+                <a:cs typeface="王漢宗顏楷體"/>
+                <a:sym typeface="王漢宗顏楷體"/>
+              </a:rPr>
+              <a:t>Node.js </a:t>
+            </a:r>
+            <a:r>
+              <a:rPr lang="zh-TW" altLang="en-US" sz="2600" dirty="0">
+                <a:latin typeface="Times New Roman" panose="02020603050405020304" pitchFamily="18" charset="0"/>
+                <a:ea typeface="標楷體" panose="03000509000000000000" pitchFamily="65" charset="-120"/>
+                <a:cs typeface="王漢宗顏楷體"/>
+                <a:sym typeface="王漢宗顏楷體"/>
+              </a:rPr>
+              <a:t>環境，與瀏覽器不兼容。</a:t>
+            </a:r>
+            <a:endParaRPr lang="en-US" altLang="zh-TW" sz="2600" dirty="0">
+              <a:latin typeface="Times New Roman" panose="02020603050405020304" pitchFamily="18" charset="0"/>
+              <a:ea typeface="標楷體" panose="03000509000000000000" pitchFamily="65" charset="-120"/>
+              <a:cs typeface="王漢宗顏楷體"/>
+              <a:sym typeface="王漢宗顏楷體"/>
+            </a:endParaRPr>
+          </a:p>
+        </p:txBody>
+      </p:sp>
+      <p:grpSp>
+        <p:nvGrpSpPr>
+          <p:cNvPr id="28" name="Group 2">
+            <a:extLst>
+              <a:ext uri="{FF2B5EF4-FFF2-40B4-BE49-F238E27FC236}">
+                <a16:creationId xmlns:a16="http://schemas.microsoft.com/office/drawing/2014/main" id="{C571510F-4237-4159-A25E-D023AAABD06D}"/>
+              </a:ext>
+            </a:extLst>
+          </p:cNvPr>
+          <p:cNvGrpSpPr/>
+          <p:nvPr/>
+        </p:nvGrpSpPr>
+        <p:grpSpPr>
+          <a:xfrm>
+            <a:off x="0" y="0"/>
+            <a:ext cx="18288000" cy="1691609"/>
+            <a:chOff x="0" y="0"/>
+            <a:chExt cx="4816593" cy="543967"/>
+          </a:xfrm>
+        </p:grpSpPr>
+        <p:sp>
+          <p:nvSpPr>
+            <p:cNvPr id="29" name="Freeform 3">
+              <a:extLst>
+                <a:ext uri="{FF2B5EF4-FFF2-40B4-BE49-F238E27FC236}">
+                  <a16:creationId xmlns:a16="http://schemas.microsoft.com/office/drawing/2014/main" id="{8558C2F7-92C9-4ED9-A7F6-36896AE39BAD}"/>
+                </a:ext>
+              </a:extLst>
+            </p:cNvPr>
+            <p:cNvSpPr/>
+            <p:nvPr/>
+          </p:nvSpPr>
+          <p:spPr>
+            <a:xfrm>
+              <a:off x="0" y="0"/>
+              <a:ext cx="4816592" cy="543967"/>
+            </a:xfrm>
+            <a:custGeom>
+              <a:avLst/>
+              <a:gdLst/>
+              <a:ahLst/>
+              <a:cxnLst/>
+              <a:rect l="l" t="t" r="r" b="b"/>
+              <a:pathLst>
+                <a:path w="4816592" h="543967">
+                  <a:moveTo>
+                    <a:pt x="0" y="0"/>
+                  </a:moveTo>
+                  <a:lnTo>
+                    <a:pt x="4816592" y="0"/>
+                  </a:lnTo>
+                  <a:lnTo>
+                    <a:pt x="4816592" y="543967"/>
+                  </a:lnTo>
+                  <a:lnTo>
+                    <a:pt x="0" y="543967"/>
+                  </a:lnTo>
+                  <a:close/>
+                </a:path>
+              </a:pathLst>
+            </a:custGeom>
+            <a:gradFill rotWithShape="1">
+              <a:gsLst>
+                <a:gs pos="0">
+                  <a:srgbClr val="B81B22">
+                    <a:alpha val="100000"/>
+                  </a:srgbClr>
+                </a:gs>
+                <a:gs pos="25000">
+                  <a:srgbClr val="B81B22">
+                    <a:alpha val="99500"/>
+                  </a:srgbClr>
+                </a:gs>
+                <a:gs pos="50000">
+                  <a:srgbClr val="E82A34">
+                    <a:alpha val="100000"/>
+                  </a:srgbClr>
+                </a:gs>
+                <a:gs pos="75000">
+                  <a:srgbClr val="F89DA1">
+                    <a:alpha val="100000"/>
+                  </a:srgbClr>
+                </a:gs>
+                <a:gs pos="100000">
+                  <a:srgbClr val="FFFFFF">
+                    <a:alpha val="99500"/>
+                  </a:srgbClr>
+                </a:gs>
+              </a:gsLst>
+              <a:lin ang="0"/>
+            </a:gradFill>
+          </p:spPr>
+        </p:sp>
+        <p:sp>
+          <p:nvSpPr>
+            <p:cNvPr id="30" name="TextBox 4">
+              <a:extLst>
+                <a:ext uri="{FF2B5EF4-FFF2-40B4-BE49-F238E27FC236}">
+                  <a16:creationId xmlns:a16="http://schemas.microsoft.com/office/drawing/2014/main" id="{CC107A00-22F6-47C1-AAF1-49AC9E4F1FE8}"/>
+                </a:ext>
+              </a:extLst>
+            </p:cNvPr>
+            <p:cNvSpPr txBox="1"/>
+            <p:nvPr/>
+          </p:nvSpPr>
+          <p:spPr>
+            <a:xfrm>
+              <a:off x="0" y="-47625"/>
+              <a:ext cx="4816593" cy="591592"/>
+            </a:xfrm>
+            <a:prstGeom prst="rect">
+              <a:avLst/>
+            </a:prstGeom>
+          </p:spPr>
+          <p:txBody>
+            <a:bodyPr lIns="50800" tIns="50800" rIns="50800" bIns="50800" rtlCol="0" anchor="ctr"/>
+            <a:lstStyle/>
+            <a:p>
+              <a:pPr algn="ctr">
+                <a:lnSpc>
+                  <a:spcPts val="2659"/>
+                </a:lnSpc>
+              </a:pPr>
+              <a:endParaRPr>
+                <a:latin typeface="標楷體" panose="03000509000000000000" pitchFamily="65" charset="-120"/>
+                <a:ea typeface="標楷體" panose="03000509000000000000" pitchFamily="65" charset="-120"/>
+              </a:endParaRPr>
+            </a:p>
+          </p:txBody>
+        </p:sp>
+      </p:grpSp>
+      <p:sp>
+        <p:nvSpPr>
+          <p:cNvPr id="34" name="TextBox 8">
+            <a:extLst>
+              <a:ext uri="{FF2B5EF4-FFF2-40B4-BE49-F238E27FC236}">
+                <a16:creationId xmlns:a16="http://schemas.microsoft.com/office/drawing/2014/main" id="{6A6E9B8B-C857-4E5F-B514-20784942772F}"/>
+              </a:ext>
+            </a:extLst>
+          </p:cNvPr>
+          <p:cNvSpPr txBox="1"/>
+          <p:nvPr/>
+        </p:nvSpPr>
+        <p:spPr>
+          <a:xfrm>
+            <a:off x="304800" y="110995"/>
+            <a:ext cx="9982200" cy="1321516"/>
+          </a:xfrm>
+          <a:prstGeom prst="rect">
+            <a:avLst/>
+          </a:prstGeom>
+        </p:spPr>
+        <p:txBody>
+          <a:bodyPr wrap="square" lIns="0" tIns="0" rIns="0" bIns="0" rtlCol="0" anchor="t">
+            <a:spAutoFit/>
+          </a:bodyPr>
+          <a:lstStyle/>
+          <a:p>
+            <a:pPr algn="l">
+              <a:lnSpc>
+                <a:spcPts val="11200"/>
+              </a:lnSpc>
+              <a:spcBef>
+                <a:spcPct val="0"/>
+              </a:spcBef>
+            </a:pPr>
+            <a:r>
+              <a:rPr lang="en-US" altLang="zh-TW" sz="8000" dirty="0">
+                <a:solidFill>
+                  <a:srgbClr val="FFFFFF"/>
+                </a:solidFill>
+                <a:latin typeface="Times New Roman" panose="02020603050405020304" pitchFamily="18" charset="0"/>
+                <a:ea typeface="標楷體" panose="03000509000000000000" pitchFamily="65" charset="-120"/>
+                <a:cs typeface="Times New Roman" panose="02020603050405020304" pitchFamily="18" charset="0"/>
+                <a:sym typeface="王漢宗顏楷體"/>
+              </a:rPr>
+              <a:t>ES Modules (ESM)</a:t>
+            </a:r>
+          </a:p>
+        </p:txBody>
+      </p:sp>
+      <p:pic>
+        <p:nvPicPr>
+          <p:cNvPr id="1026" name="Picture 2">
+            <a:extLst>
+              <a:ext uri="{FF2B5EF4-FFF2-40B4-BE49-F238E27FC236}">
+                <a16:creationId xmlns:a16="http://schemas.microsoft.com/office/drawing/2014/main" id="{0AF3C65F-986E-4811-A56F-3F50ECE84FB0}"/>
+              </a:ext>
+            </a:extLst>
+          </p:cNvPr>
+          <p:cNvPicPr>
+            <a:picLocks noChangeAspect="1" noChangeArrowheads="1"/>
+          </p:cNvPicPr>
+          <p:nvPr/>
+        </p:nvPicPr>
+        <p:blipFill rotWithShape="1">
+          <a:blip r:embed="rId2">
+            <a:extLst>
+              <a:ext uri="{28A0092B-C50C-407E-A947-70E740481C1C}">
+                <a14:useLocalDpi xmlns:a14="http://schemas.microsoft.com/office/drawing/2010/main" val="0"/>
+              </a:ext>
+            </a:extLst>
+          </a:blip>
+          <a:srcRect t="13278"/>
+          <a:stretch/>
+        </p:blipFill>
+        <p:spPr bwMode="auto">
+          <a:xfrm>
+            <a:off x="8534400" y="5364388"/>
+            <a:ext cx="8364484" cy="2142374"/>
+          </a:xfrm>
+          <a:prstGeom prst="rect">
+            <a:avLst/>
+          </a:prstGeom>
+          <a:noFill/>
+          <a:effectLst>
+            <a:outerShdw blurRad="50800" dist="38100" dir="2700000" algn="tl" rotWithShape="0">
+              <a:prstClr val="black">
+                <a:alpha val="40000"/>
+              </a:prstClr>
+            </a:outerShdw>
+          </a:effectLst>
+          <a:extLst>
+            <a:ext uri="{909E8E84-426E-40DD-AFC4-6F175D3DCCD1}">
+              <a14:hiddenFill xmlns:a14="http://schemas.microsoft.com/office/drawing/2010/main">
+                <a:solidFill>
+                  <a:srgbClr val="FFFFFF"/>
+                </a:solidFill>
+              </a14:hiddenFill>
+            </a:ext>
+          </a:extLst>
+        </p:spPr>
+      </p:pic>
+      <p:pic>
+        <p:nvPicPr>
+          <p:cNvPr id="3" name="圖片 2">
+            <a:extLst>
+              <a:ext uri="{FF2B5EF4-FFF2-40B4-BE49-F238E27FC236}">
+                <a16:creationId xmlns:a16="http://schemas.microsoft.com/office/drawing/2014/main" id="{3A858BEE-49B4-4BEF-8B4D-93F61FA4F671}"/>
+              </a:ext>
+            </a:extLst>
+          </p:cNvPr>
+          <p:cNvPicPr>
+            <a:picLocks noChangeAspect="1"/>
+          </p:cNvPicPr>
+          <p:nvPr/>
+        </p:nvPicPr>
+        <p:blipFill>
+          <a:blip r:embed="rId3"/>
+          <a:stretch>
+            <a:fillRect/>
+          </a:stretch>
+        </p:blipFill>
+        <p:spPr>
+          <a:xfrm>
+            <a:off x="285750" y="5476589"/>
+            <a:ext cx="7734300" cy="2068273"/>
+          </a:xfrm>
+          <a:prstGeom prst="rect">
+            <a:avLst/>
+          </a:prstGeom>
+        </p:spPr>
+      </p:pic>
+      <p:pic>
+        <p:nvPicPr>
+          <p:cNvPr id="5" name="圖片 4">
+            <a:extLst>
+              <a:ext uri="{FF2B5EF4-FFF2-40B4-BE49-F238E27FC236}">
+                <a16:creationId xmlns:a16="http://schemas.microsoft.com/office/drawing/2014/main" id="{E5FF31EB-33B2-4A8C-9D52-5C788C02BB84}"/>
+              </a:ext>
+            </a:extLst>
+          </p:cNvPr>
+          <p:cNvPicPr>
+            <a:picLocks noChangeAspect="1"/>
+          </p:cNvPicPr>
+          <p:nvPr/>
+        </p:nvPicPr>
+        <p:blipFill>
+          <a:blip r:embed="rId4"/>
+          <a:stretch>
+            <a:fillRect/>
+          </a:stretch>
+        </p:blipFill>
+        <p:spPr>
+          <a:xfrm>
+            <a:off x="206912" y="7797800"/>
+            <a:ext cx="10501315" cy="2286000"/>
+          </a:xfrm>
+          <a:prstGeom prst="rect">
+            <a:avLst/>
+          </a:prstGeom>
+        </p:spPr>
+      </p:pic>
+    </p:spTree>
+    <p:extLst>
+      <p:ext uri="{BB962C8B-B14F-4D97-AF65-F5344CB8AC3E}">
+        <p14:creationId xmlns:p14="http://schemas.microsoft.com/office/powerpoint/2010/main" val="2021666128"/>
+      </p:ext>
+    </p:extLst>
+  </p:cSld>
+  <p:clrMapOvr>
+    <a:masterClrMapping/>
+  </p:clrMapOvr>
+</p:sld>
+</file>
+
+<file path=ppt/slides/slide33.xml><?xml version="1.0" encoding="utf-8"?>
+<p:sld xmlns:a="http://schemas.openxmlformats.org/drawingml/2006/main" xmlns:r="http://schemas.openxmlformats.org/officeDocument/2006/relationships" xmlns:p="http://schemas.openxmlformats.org/presentationml/2006/main">
+  <p:cSld>
+    <p:spTree>
+      <p:nvGrpSpPr>
+        <p:cNvPr id="1" name=""/>
+        <p:cNvGrpSpPr/>
+        <p:nvPr/>
+      </p:nvGrpSpPr>
+      <p:grpSpPr>
+        <a:xfrm>
+          <a:off x="0" y="0"/>
+          <a:ext cx="0" cy="0"/>
+          <a:chOff x="0" y="0"/>
+          <a:chExt cx="0" cy="0"/>
+        </a:xfrm>
+      </p:grpSpPr>
+      <p:sp>
+        <p:nvSpPr>
+          <p:cNvPr id="27" name="TextBox 10">
+            <a:extLst>
+              <a:ext uri="{FF2B5EF4-FFF2-40B4-BE49-F238E27FC236}">
+                <a16:creationId xmlns:a16="http://schemas.microsoft.com/office/drawing/2014/main" id="{2A659F81-1ED8-4106-8C45-6A01D7DBC583}"/>
+              </a:ext>
+            </a:extLst>
+          </p:cNvPr>
+          <p:cNvSpPr txBox="1"/>
+          <p:nvPr/>
+        </p:nvSpPr>
+        <p:spPr>
+          <a:xfrm>
+            <a:off x="206912" y="1785472"/>
+            <a:ext cx="8141284" cy="1088055"/>
+          </a:xfrm>
+          <a:prstGeom prst="rect">
+            <a:avLst/>
+          </a:prstGeom>
+        </p:spPr>
+        <p:txBody>
+          <a:bodyPr wrap="square" lIns="0" tIns="0" rIns="0" bIns="0" rtlCol="0" anchor="t">
+            <a:spAutoFit/>
+          </a:bodyPr>
+          <a:lstStyle/>
+          <a:p>
+            <a:pPr marL="457200" indent="-457200" algn="l">
+              <a:lnSpc>
+                <a:spcPts val="4480"/>
+              </a:lnSpc>
+              <a:spcBef>
+                <a:spcPct val="0"/>
+              </a:spcBef>
+              <a:buFont typeface="Wingdings" panose="05000000000000000000" pitchFamily="2" charset="2"/>
+              <a:buChar char="v"/>
+            </a:pPr>
+            <a:r>
+              <a:rPr lang="zh-TW" altLang="en-US" sz="2600" dirty="0">
+                <a:latin typeface="Times New Roman" panose="02020603050405020304" pitchFamily="18" charset="0"/>
+                <a:ea typeface="標楷體" panose="03000509000000000000" pitchFamily="65" charset="-120"/>
+                <a:cs typeface="王漢宗顏楷體"/>
+                <a:sym typeface="王漢宗顏楷體"/>
+              </a:rPr>
+              <a:t>設定超連結顏色：</a:t>
+            </a:r>
+            <a:r>
+              <a:rPr lang="en-US" altLang="zh-TW" sz="2600" dirty="0">
+                <a:latin typeface="Times New Roman" panose="02020603050405020304" pitchFamily="18" charset="0"/>
+                <a:ea typeface="標楷體" panose="03000509000000000000" pitchFamily="65" charset="-120"/>
+                <a:cs typeface="王漢宗顏楷體"/>
+                <a:sym typeface="王漢宗顏楷體"/>
+              </a:rPr>
+              <a:t>link-underline-</a:t>
+            </a:r>
+            <a:r>
+              <a:rPr lang="zh-TW" altLang="en-US" sz="2600" dirty="0">
+                <a:latin typeface="Times New Roman" panose="02020603050405020304" pitchFamily="18" charset="0"/>
+                <a:ea typeface="標楷體" panose="03000509000000000000" pitchFamily="65" charset="-120"/>
+                <a:cs typeface="王漢宗顏楷體"/>
+                <a:sym typeface="王漢宗顏楷體"/>
+              </a:rPr>
+              <a:t>顏色</a:t>
+            </a:r>
+            <a:endParaRPr lang="en-US" altLang="zh-TW" sz="2600" dirty="0">
+              <a:latin typeface="Times New Roman" panose="02020603050405020304" pitchFamily="18" charset="0"/>
+              <a:ea typeface="標楷體" panose="03000509000000000000" pitchFamily="65" charset="-120"/>
+              <a:cs typeface="王漢宗顏楷體"/>
+              <a:sym typeface="王漢宗顏楷體"/>
+            </a:endParaRPr>
+          </a:p>
+          <a:p>
+            <a:pPr marL="457200" indent="-457200" algn="l">
+              <a:lnSpc>
+                <a:spcPts val="4480"/>
+              </a:lnSpc>
+              <a:spcBef>
+                <a:spcPct val="0"/>
+              </a:spcBef>
+              <a:buFont typeface="Wingdings" panose="05000000000000000000" pitchFamily="2" charset="2"/>
+              <a:buChar char="v"/>
+            </a:pPr>
+            <a:r>
+              <a:rPr lang="zh-TW" altLang="en-US" sz="2600" dirty="0">
+                <a:latin typeface="Times New Roman" panose="02020603050405020304" pitchFamily="18" charset="0"/>
+                <a:ea typeface="標楷體" panose="03000509000000000000" pitchFamily="65" charset="-120"/>
+                <a:cs typeface="王漢宗顏楷體"/>
+                <a:sym typeface="王漢宗顏楷體"/>
+              </a:rPr>
+              <a:t>設定超連結透明度</a:t>
+            </a:r>
+            <a:endParaRPr lang="en-US" altLang="zh-TW" sz="2600" dirty="0">
+              <a:latin typeface="Times New Roman" panose="02020603050405020304" pitchFamily="18" charset="0"/>
+              <a:ea typeface="標楷體" panose="03000509000000000000" pitchFamily="65" charset="-120"/>
+              <a:cs typeface="王漢宗顏楷體"/>
+              <a:sym typeface="王漢宗顏楷體"/>
+            </a:endParaRPr>
+          </a:p>
+        </p:txBody>
+      </p:sp>
+      <p:grpSp>
+        <p:nvGrpSpPr>
+          <p:cNvPr id="28" name="Group 2">
+            <a:extLst>
+              <a:ext uri="{FF2B5EF4-FFF2-40B4-BE49-F238E27FC236}">
+                <a16:creationId xmlns:a16="http://schemas.microsoft.com/office/drawing/2014/main" id="{C571510F-4237-4159-A25E-D023AAABD06D}"/>
+              </a:ext>
+            </a:extLst>
+          </p:cNvPr>
+          <p:cNvGrpSpPr/>
+          <p:nvPr/>
+        </p:nvGrpSpPr>
+        <p:grpSpPr>
+          <a:xfrm>
+            <a:off x="0" y="0"/>
+            <a:ext cx="18288000" cy="1691609"/>
+            <a:chOff x="0" y="0"/>
+            <a:chExt cx="4816593" cy="543967"/>
+          </a:xfrm>
+        </p:grpSpPr>
+        <p:sp>
+          <p:nvSpPr>
+            <p:cNvPr id="29" name="Freeform 3">
+              <a:extLst>
+                <a:ext uri="{FF2B5EF4-FFF2-40B4-BE49-F238E27FC236}">
+                  <a16:creationId xmlns:a16="http://schemas.microsoft.com/office/drawing/2014/main" id="{8558C2F7-92C9-4ED9-A7F6-36896AE39BAD}"/>
+                </a:ext>
+              </a:extLst>
+            </p:cNvPr>
+            <p:cNvSpPr/>
+            <p:nvPr/>
+          </p:nvSpPr>
+          <p:spPr>
+            <a:xfrm>
+              <a:off x="0" y="0"/>
+              <a:ext cx="4816592" cy="543967"/>
+            </a:xfrm>
+            <a:custGeom>
+              <a:avLst/>
+              <a:gdLst/>
+              <a:ahLst/>
+              <a:cxnLst/>
+              <a:rect l="l" t="t" r="r" b="b"/>
+              <a:pathLst>
+                <a:path w="4816592" h="543967">
+                  <a:moveTo>
+                    <a:pt x="0" y="0"/>
+                  </a:moveTo>
+                  <a:lnTo>
+                    <a:pt x="4816592" y="0"/>
+                  </a:lnTo>
+                  <a:lnTo>
+                    <a:pt x="4816592" y="543967"/>
+                  </a:lnTo>
+                  <a:lnTo>
+                    <a:pt x="0" y="543967"/>
+                  </a:lnTo>
+                  <a:close/>
+                </a:path>
+              </a:pathLst>
+            </a:custGeom>
+            <a:gradFill rotWithShape="1">
+              <a:gsLst>
+                <a:gs pos="0">
+                  <a:srgbClr val="B81B22">
+                    <a:alpha val="100000"/>
+                  </a:srgbClr>
+                </a:gs>
+                <a:gs pos="25000">
+                  <a:srgbClr val="B81B22">
+                    <a:alpha val="99500"/>
+                  </a:srgbClr>
+                </a:gs>
+                <a:gs pos="50000">
+                  <a:srgbClr val="E82A34">
+                    <a:alpha val="100000"/>
+                  </a:srgbClr>
+                </a:gs>
+                <a:gs pos="75000">
+                  <a:srgbClr val="F89DA1">
+                    <a:alpha val="100000"/>
+                  </a:srgbClr>
+                </a:gs>
+                <a:gs pos="100000">
+                  <a:srgbClr val="FFFFFF">
+                    <a:alpha val="99500"/>
+                  </a:srgbClr>
+                </a:gs>
+              </a:gsLst>
+              <a:lin ang="0"/>
+            </a:gradFill>
+          </p:spPr>
+        </p:sp>
+        <p:sp>
+          <p:nvSpPr>
+            <p:cNvPr id="30" name="TextBox 4">
+              <a:extLst>
+                <a:ext uri="{FF2B5EF4-FFF2-40B4-BE49-F238E27FC236}">
+                  <a16:creationId xmlns:a16="http://schemas.microsoft.com/office/drawing/2014/main" id="{CC107A00-22F6-47C1-AAF1-49AC9E4F1FE8}"/>
+                </a:ext>
+              </a:extLst>
+            </p:cNvPr>
+            <p:cNvSpPr txBox="1"/>
+            <p:nvPr/>
+          </p:nvSpPr>
+          <p:spPr>
+            <a:xfrm>
+              <a:off x="0" y="-47625"/>
+              <a:ext cx="4816593" cy="591592"/>
+            </a:xfrm>
+            <a:prstGeom prst="rect">
+              <a:avLst/>
+            </a:prstGeom>
+          </p:spPr>
+          <p:txBody>
+            <a:bodyPr lIns="50800" tIns="50800" rIns="50800" bIns="50800" rtlCol="0" anchor="ctr"/>
+            <a:lstStyle/>
+            <a:p>
+              <a:pPr algn="ctr">
+                <a:lnSpc>
+                  <a:spcPts val="2659"/>
+                </a:lnSpc>
+              </a:pPr>
+              <a:endParaRPr>
+                <a:latin typeface="標楷體" panose="03000509000000000000" pitchFamily="65" charset="-120"/>
+                <a:ea typeface="標楷體" panose="03000509000000000000" pitchFamily="65" charset="-120"/>
+              </a:endParaRPr>
+            </a:p>
+          </p:txBody>
+        </p:sp>
+      </p:grpSp>
+      <p:sp>
+        <p:nvSpPr>
+          <p:cNvPr id="34" name="TextBox 8">
+            <a:extLst>
+              <a:ext uri="{FF2B5EF4-FFF2-40B4-BE49-F238E27FC236}">
+                <a16:creationId xmlns:a16="http://schemas.microsoft.com/office/drawing/2014/main" id="{6A6E9B8B-C857-4E5F-B514-20784942772F}"/>
+              </a:ext>
+            </a:extLst>
+          </p:cNvPr>
+          <p:cNvSpPr txBox="1"/>
+          <p:nvPr/>
+        </p:nvSpPr>
+        <p:spPr>
+          <a:xfrm>
+            <a:off x="304800" y="110995"/>
+            <a:ext cx="9571413" cy="1321516"/>
+          </a:xfrm>
+          <a:prstGeom prst="rect">
+            <a:avLst/>
+          </a:prstGeom>
+        </p:spPr>
+        <p:txBody>
+          <a:bodyPr wrap="square" lIns="0" tIns="0" rIns="0" bIns="0" rtlCol="0" anchor="t">
+            <a:spAutoFit/>
+          </a:bodyPr>
+          <a:lstStyle/>
+          <a:p>
+            <a:pPr algn="l">
+              <a:lnSpc>
+                <a:spcPts val="11200"/>
+              </a:lnSpc>
+              <a:spcBef>
+                <a:spcPct val="0"/>
+              </a:spcBef>
+            </a:pPr>
+            <a:r>
+              <a:rPr lang="zh-TW" altLang="en-US" sz="8000" dirty="0">
+                <a:solidFill>
+                  <a:srgbClr val="FFFFFF"/>
+                </a:solidFill>
+                <a:latin typeface="Times New Roman" panose="02020603050405020304" pitchFamily="18" charset="0"/>
+                <a:ea typeface="標楷體" panose="03000509000000000000" pitchFamily="65" charset="-120"/>
+                <a:cs typeface="Times New Roman" panose="02020603050405020304" pitchFamily="18" charset="0"/>
+                <a:sym typeface="王漢宗顏楷體"/>
+              </a:rPr>
+              <a:t>超連結</a:t>
+            </a:r>
+            <a:endParaRPr lang="en-US" altLang="zh-TW" sz="8000" dirty="0">
+              <a:solidFill>
+                <a:srgbClr val="FFFFFF"/>
+              </a:solidFill>
+              <a:latin typeface="Times New Roman" panose="02020603050405020304" pitchFamily="18" charset="0"/>
+              <a:ea typeface="標楷體" panose="03000509000000000000" pitchFamily="65" charset="-120"/>
+              <a:cs typeface="Times New Roman" panose="02020603050405020304" pitchFamily="18" charset="0"/>
+              <a:sym typeface="王漢宗顏楷體"/>
+            </a:endParaRPr>
+          </a:p>
+        </p:txBody>
+      </p:sp>
+      <p:sp>
+        <p:nvSpPr>
+          <p:cNvPr id="7" name="文字方塊 6">
+            <a:extLst>
+              <a:ext uri="{FF2B5EF4-FFF2-40B4-BE49-F238E27FC236}">
+                <a16:creationId xmlns:a16="http://schemas.microsoft.com/office/drawing/2014/main" id="{F9B82ED9-4011-42B0-BD0E-2DBD1823CC7E}"/>
+              </a:ext>
+            </a:extLst>
+          </p:cNvPr>
+          <p:cNvSpPr txBox="1"/>
+          <p:nvPr/>
+        </p:nvSpPr>
+        <p:spPr>
+          <a:xfrm>
+            <a:off x="16708957" y="9685054"/>
+            <a:ext cx="1277873" cy="400110"/>
+          </a:xfrm>
+          <a:prstGeom prst="rect">
+            <a:avLst/>
+          </a:prstGeom>
+          <a:noFill/>
+        </p:spPr>
+        <p:txBody>
+          <a:bodyPr wrap="square">
+            <a:spAutoFit/>
+          </a:bodyPr>
+          <a:lstStyle/>
+          <a:p>
+            <a:r>
+              <a:rPr lang="en-US" altLang="zh-TW" sz="2000" dirty="0">
+                <a:latin typeface="Times New Roman" panose="02020603050405020304" pitchFamily="18" charset="0"/>
+                <a:ea typeface="標楷體" panose="03000509000000000000" pitchFamily="65" charset="-120"/>
+              </a:rPr>
+              <a:t>(</a:t>
+            </a:r>
+            <a:r>
+              <a:rPr lang="en-US" altLang="zh-TW" sz="2000" dirty="0">
+                <a:latin typeface="Times New Roman" panose="02020603050405020304" pitchFamily="18" charset="0"/>
+                <a:ea typeface="標楷體" panose="03000509000000000000" pitchFamily="65" charset="-120"/>
+                <a:cs typeface="王漢宗顏楷體"/>
+                <a:sym typeface="王漢宗顏楷體"/>
+              </a:rPr>
+              <a:t>Currying</a:t>
+            </a:r>
+            <a:r>
+              <a:rPr lang="en-US" altLang="zh-TW" sz="2000" dirty="0">
+                <a:latin typeface="Times New Roman" panose="02020603050405020304" pitchFamily="18" charset="0"/>
+                <a:ea typeface="標楷體" panose="03000509000000000000" pitchFamily="65" charset="-120"/>
+              </a:rPr>
+              <a:t>)</a:t>
+            </a:r>
+          </a:p>
+        </p:txBody>
+      </p:sp>
+      <p:sp>
+        <p:nvSpPr>
+          <p:cNvPr id="8" name="矩形 7">
+            <a:extLst>
+              <a:ext uri="{FF2B5EF4-FFF2-40B4-BE49-F238E27FC236}">
+                <a16:creationId xmlns:a16="http://schemas.microsoft.com/office/drawing/2014/main" id="{6F39B56E-64D4-4C56-A146-116CC87F9DBE}"/>
+              </a:ext>
+            </a:extLst>
+          </p:cNvPr>
+          <p:cNvSpPr/>
+          <p:nvPr/>
+        </p:nvSpPr>
+        <p:spPr>
+          <a:xfrm flipV="1">
+            <a:off x="8242300" y="5853917"/>
+            <a:ext cx="2209800" cy="1243445"/>
+          </a:xfrm>
+          <a:prstGeom prst="rect">
+            <a:avLst/>
+          </a:prstGeom>
+          <a:solidFill>
+            <a:srgbClr val="FFD580"/>
+          </a:solidFill>
+          <a:ln/>
+          <a:effectLst>
+            <a:outerShdw blurRad="50800" dist="38100" dir="2700000" algn="tl" rotWithShape="0">
+              <a:prstClr val="black">
+                <a:alpha val="40000"/>
+              </a:prstClr>
+            </a:outerShdw>
+          </a:effectLst>
+        </p:spPr>
+        <p:style>
+          <a:lnRef idx="1">
+            <a:schemeClr val="accent5"/>
+          </a:lnRef>
+          <a:fillRef idx="2">
+            <a:schemeClr val="accent5"/>
+          </a:fillRef>
+          <a:effectRef idx="1">
+            <a:schemeClr val="accent5"/>
+          </a:effectRef>
+          <a:fontRef idx="minor">
+            <a:schemeClr val="dk1"/>
+          </a:fontRef>
+        </p:style>
+        <p:txBody>
+          <a:bodyPr rtlCol="0" anchor="ctr"/>
+          <a:lstStyle/>
+          <a:p>
+            <a:pPr algn="ctr"/>
+            <a:endParaRPr lang="zh-TW" altLang="en-US"/>
+          </a:p>
+        </p:txBody>
+      </p:sp>
+      <p:sp>
+        <p:nvSpPr>
+          <p:cNvPr id="9" name="矩形 8">
+            <a:extLst>
+              <a:ext uri="{FF2B5EF4-FFF2-40B4-BE49-F238E27FC236}">
+                <a16:creationId xmlns:a16="http://schemas.microsoft.com/office/drawing/2014/main" id="{272304FC-8E8D-4A20-A14E-F3C98FE1FA75}"/>
+              </a:ext>
+            </a:extLst>
+          </p:cNvPr>
+          <p:cNvSpPr/>
+          <p:nvPr/>
+        </p:nvSpPr>
+        <p:spPr>
+          <a:xfrm flipV="1">
+            <a:off x="5001738" y="8828105"/>
+            <a:ext cx="2209800" cy="1243445"/>
+          </a:xfrm>
+          <a:prstGeom prst="rect">
+            <a:avLst/>
+          </a:prstGeom>
+          <a:solidFill>
+            <a:srgbClr val="ADD9ED"/>
+          </a:solidFill>
+          <a:ln/>
+          <a:effectLst>
+            <a:outerShdw blurRad="50800" dist="38100" dir="2700000" algn="tl" rotWithShape="0">
+              <a:prstClr val="black">
+                <a:alpha val="40000"/>
+              </a:prstClr>
+            </a:outerShdw>
+          </a:effectLst>
+        </p:spPr>
+        <p:style>
+          <a:lnRef idx="1">
+            <a:schemeClr val="accent5"/>
+          </a:lnRef>
+          <a:fillRef idx="2">
+            <a:schemeClr val="accent5"/>
+          </a:fillRef>
+          <a:effectRef idx="1">
+            <a:schemeClr val="accent5"/>
+          </a:effectRef>
+          <a:fontRef idx="minor">
+            <a:schemeClr val="dk1"/>
+          </a:fontRef>
+        </p:style>
+        <p:txBody>
+          <a:bodyPr rtlCol="0" anchor="ctr"/>
+          <a:lstStyle/>
+          <a:p>
+            <a:pPr algn="ctr"/>
+            <a:endParaRPr lang="zh-TW" altLang="en-US"/>
+          </a:p>
+        </p:txBody>
+      </p:sp>
+      <p:sp>
+        <p:nvSpPr>
+          <p:cNvPr id="10" name="矩形 9">
+            <a:extLst>
+              <a:ext uri="{FF2B5EF4-FFF2-40B4-BE49-F238E27FC236}">
+                <a16:creationId xmlns:a16="http://schemas.microsoft.com/office/drawing/2014/main" id="{F38F827C-6AA4-433A-9947-AC0B2582CDD1}"/>
+              </a:ext>
+            </a:extLst>
+          </p:cNvPr>
+          <p:cNvSpPr/>
+          <p:nvPr/>
+        </p:nvSpPr>
+        <p:spPr>
+          <a:xfrm flipV="1">
+            <a:off x="4859153" y="5646041"/>
+            <a:ext cx="2209800" cy="1243445"/>
+          </a:xfrm>
+          <a:prstGeom prst="rect">
+            <a:avLst/>
+          </a:prstGeom>
+          <a:solidFill>
+            <a:srgbClr val="FCDFC0"/>
+          </a:solidFill>
+          <a:ln/>
+          <a:effectLst>
+            <a:outerShdw blurRad="50800" dist="38100" dir="2700000" algn="tl" rotWithShape="0">
+              <a:prstClr val="black">
+                <a:alpha val="40000"/>
+              </a:prstClr>
+            </a:outerShdw>
+          </a:effectLst>
+        </p:spPr>
+        <p:style>
+          <a:lnRef idx="1">
+            <a:schemeClr val="accent5"/>
+          </a:lnRef>
+          <a:fillRef idx="2">
+            <a:schemeClr val="accent5"/>
+          </a:fillRef>
+          <a:effectRef idx="1">
+            <a:schemeClr val="accent5"/>
+          </a:effectRef>
+          <a:fontRef idx="minor">
+            <a:schemeClr val="dk1"/>
+          </a:fontRef>
+        </p:style>
+        <p:txBody>
+          <a:bodyPr rtlCol="0" anchor="ctr"/>
+          <a:lstStyle/>
+          <a:p>
+            <a:pPr algn="ctr"/>
+            <a:endParaRPr lang="zh-TW" altLang="en-US"/>
+          </a:p>
+        </p:txBody>
+      </p:sp>
+      <p:sp>
+        <p:nvSpPr>
+          <p:cNvPr id="11" name="矩形 10">
+            <a:extLst>
+              <a:ext uri="{FF2B5EF4-FFF2-40B4-BE49-F238E27FC236}">
+                <a16:creationId xmlns:a16="http://schemas.microsoft.com/office/drawing/2014/main" id="{564319A8-99E4-4497-98F6-258B9E7315A0}"/>
+              </a:ext>
+            </a:extLst>
+          </p:cNvPr>
+          <p:cNvSpPr/>
+          <p:nvPr/>
+        </p:nvSpPr>
+        <p:spPr>
+          <a:xfrm flipV="1">
+            <a:off x="1195779" y="8927117"/>
+            <a:ext cx="2209800" cy="1243445"/>
+          </a:xfrm>
+          <a:prstGeom prst="rect">
+            <a:avLst/>
+          </a:prstGeom>
+          <a:solidFill>
+            <a:srgbClr val="B1D5F7"/>
+          </a:solidFill>
+          <a:ln/>
+          <a:effectLst>
+            <a:outerShdw blurRad="50800" dist="38100" dir="2700000" algn="tl" rotWithShape="0">
+              <a:prstClr val="black">
+                <a:alpha val="40000"/>
+              </a:prstClr>
+            </a:outerShdw>
+          </a:effectLst>
+        </p:spPr>
+        <p:style>
+          <a:lnRef idx="1">
+            <a:schemeClr val="accent5"/>
+          </a:lnRef>
+          <a:fillRef idx="2">
+            <a:schemeClr val="accent5"/>
+          </a:fillRef>
+          <a:effectRef idx="1">
+            <a:schemeClr val="accent5"/>
+          </a:effectRef>
+          <a:fontRef idx="minor">
+            <a:schemeClr val="dk1"/>
+          </a:fontRef>
+        </p:style>
+        <p:txBody>
+          <a:bodyPr rtlCol="0" anchor="ctr"/>
+          <a:lstStyle/>
+          <a:p>
+            <a:pPr algn="ctr"/>
+            <a:endParaRPr lang="zh-TW" altLang="en-US"/>
+          </a:p>
+        </p:txBody>
+      </p:sp>
+      <p:sp>
+        <p:nvSpPr>
+          <p:cNvPr id="12" name="矩形 11">
+            <a:extLst>
+              <a:ext uri="{FF2B5EF4-FFF2-40B4-BE49-F238E27FC236}">
+                <a16:creationId xmlns:a16="http://schemas.microsoft.com/office/drawing/2014/main" id="{0CCCE3EA-4A7F-4F53-8DC9-C9EEBE3B072F}"/>
+              </a:ext>
+            </a:extLst>
+          </p:cNvPr>
+          <p:cNvSpPr/>
+          <p:nvPr/>
+        </p:nvSpPr>
+        <p:spPr>
+          <a:xfrm flipV="1">
+            <a:off x="8610600" y="8932560"/>
+            <a:ext cx="2209800" cy="1243445"/>
+          </a:xfrm>
+          <a:prstGeom prst="rect">
+            <a:avLst/>
+          </a:prstGeom>
+          <a:solidFill>
+            <a:srgbClr val="64A9F6"/>
+          </a:solidFill>
+          <a:ln/>
+          <a:effectLst>
+            <a:outerShdw blurRad="50800" dist="38100" dir="2700000" algn="tl" rotWithShape="0">
+              <a:prstClr val="black">
+                <a:alpha val="40000"/>
+              </a:prstClr>
+            </a:outerShdw>
+          </a:effectLst>
+        </p:spPr>
+        <p:style>
+          <a:lnRef idx="1">
+            <a:schemeClr val="accent5"/>
+          </a:lnRef>
+          <a:fillRef idx="2">
+            <a:schemeClr val="accent5"/>
+          </a:fillRef>
+          <a:effectRef idx="1">
+            <a:schemeClr val="accent5"/>
+          </a:effectRef>
+          <a:fontRef idx="minor">
+            <a:schemeClr val="dk1"/>
+          </a:fontRef>
+        </p:style>
+        <p:txBody>
+          <a:bodyPr rtlCol="0" anchor="ctr"/>
+          <a:lstStyle/>
+          <a:p>
+            <a:pPr algn="ctr"/>
+            <a:endParaRPr lang="zh-TW" altLang="en-US"/>
+          </a:p>
+        </p:txBody>
+      </p:sp>
+      <p:sp>
+        <p:nvSpPr>
+          <p:cNvPr id="13" name="矩形 12">
+            <a:extLst>
+              <a:ext uri="{FF2B5EF4-FFF2-40B4-BE49-F238E27FC236}">
+                <a16:creationId xmlns:a16="http://schemas.microsoft.com/office/drawing/2014/main" id="{298074B3-6956-4A34-A791-EC3C848B18A2}"/>
+              </a:ext>
+            </a:extLst>
+          </p:cNvPr>
+          <p:cNvSpPr/>
+          <p:nvPr/>
+        </p:nvSpPr>
+        <p:spPr>
+          <a:xfrm flipV="1">
+            <a:off x="1371600" y="4170177"/>
+            <a:ext cx="2209800" cy="1243445"/>
+          </a:xfrm>
+          <a:prstGeom prst="rect">
+            <a:avLst/>
+          </a:prstGeom>
+          <a:solidFill>
+            <a:srgbClr val="FCEADB"/>
+          </a:solidFill>
+          <a:ln/>
+          <a:effectLst>
+            <a:outerShdw blurRad="50800" dist="38100" dir="2700000" algn="tl" rotWithShape="0">
+              <a:prstClr val="black">
+                <a:alpha val="40000"/>
+              </a:prstClr>
+            </a:outerShdw>
+          </a:effectLst>
+        </p:spPr>
+        <p:style>
+          <a:lnRef idx="1">
+            <a:schemeClr val="accent5"/>
+          </a:lnRef>
+          <a:fillRef idx="2">
+            <a:schemeClr val="accent5"/>
+          </a:fillRef>
+          <a:effectRef idx="1">
+            <a:schemeClr val="accent5"/>
+          </a:effectRef>
+          <a:fontRef idx="minor">
+            <a:schemeClr val="dk1"/>
+          </a:fontRef>
+        </p:style>
+        <p:txBody>
+          <a:bodyPr rtlCol="0" anchor="ctr"/>
+          <a:lstStyle/>
+          <a:p>
+            <a:pPr algn="ctr"/>
+            <a:endParaRPr lang="zh-TW" altLang="en-US"/>
+          </a:p>
+        </p:txBody>
+      </p:sp>
+      <p:sp>
+        <p:nvSpPr>
+          <p:cNvPr id="14" name="矩形 13">
+            <a:extLst>
+              <a:ext uri="{FF2B5EF4-FFF2-40B4-BE49-F238E27FC236}">
+                <a16:creationId xmlns:a16="http://schemas.microsoft.com/office/drawing/2014/main" id="{1478961F-99FF-40F8-88DE-D3B4D60C22DE}"/>
+              </a:ext>
+            </a:extLst>
+          </p:cNvPr>
+          <p:cNvSpPr/>
+          <p:nvPr/>
+        </p:nvSpPr>
+        <p:spPr>
+          <a:xfrm flipV="1">
+            <a:off x="1409700" y="7266294"/>
+            <a:ext cx="2209800" cy="1243445"/>
+          </a:xfrm>
+          <a:prstGeom prst="rect">
+            <a:avLst/>
+          </a:prstGeom>
+          <a:solidFill>
+            <a:srgbClr val="E2F0D7"/>
+          </a:solidFill>
+          <a:ln/>
+          <a:effectLst>
+            <a:outerShdw blurRad="50800" dist="38100" dir="2700000" algn="tl" rotWithShape="0">
+              <a:prstClr val="black">
+                <a:alpha val="40000"/>
+              </a:prstClr>
+            </a:outerShdw>
+          </a:effectLst>
+        </p:spPr>
+        <p:style>
+          <a:lnRef idx="1">
+            <a:schemeClr val="accent5"/>
+          </a:lnRef>
+          <a:fillRef idx="2">
+            <a:schemeClr val="accent5"/>
+          </a:fillRef>
+          <a:effectRef idx="1">
+            <a:schemeClr val="accent5"/>
+          </a:effectRef>
+          <a:fontRef idx="minor">
+            <a:schemeClr val="dk1"/>
+          </a:fontRef>
+        </p:style>
+        <p:txBody>
+          <a:bodyPr rtlCol="0" anchor="ctr"/>
+          <a:lstStyle/>
+          <a:p>
+            <a:pPr algn="ctr"/>
+            <a:endParaRPr lang="zh-TW" altLang="en-US"/>
+          </a:p>
+        </p:txBody>
+      </p:sp>
+      <p:sp>
+        <p:nvSpPr>
+          <p:cNvPr id="15" name="矩形 14">
+            <a:extLst>
+              <a:ext uri="{FF2B5EF4-FFF2-40B4-BE49-F238E27FC236}">
+                <a16:creationId xmlns:a16="http://schemas.microsoft.com/office/drawing/2014/main" id="{4BC0AF2B-BD8F-4E73-815F-B89D1182CEC0}"/>
+              </a:ext>
+            </a:extLst>
+          </p:cNvPr>
+          <p:cNvSpPr/>
+          <p:nvPr/>
+        </p:nvSpPr>
+        <p:spPr>
+          <a:xfrm flipV="1">
+            <a:off x="8267700" y="7363905"/>
+            <a:ext cx="2209800" cy="1243445"/>
+          </a:xfrm>
+          <a:prstGeom prst="rect">
+            <a:avLst/>
+          </a:prstGeom>
+          <a:solidFill>
+            <a:srgbClr val="93D352"/>
+          </a:solidFill>
+          <a:ln/>
+          <a:effectLst>
+            <a:outerShdw blurRad="50800" dist="38100" dir="2700000" algn="tl" rotWithShape="0">
+              <a:prstClr val="black">
+                <a:alpha val="40000"/>
+              </a:prstClr>
+            </a:outerShdw>
+          </a:effectLst>
+        </p:spPr>
+        <p:style>
+          <a:lnRef idx="1">
+            <a:schemeClr val="accent5"/>
+          </a:lnRef>
+          <a:fillRef idx="2">
+            <a:schemeClr val="accent5"/>
+          </a:fillRef>
+          <a:effectRef idx="1">
+            <a:schemeClr val="accent5"/>
+          </a:effectRef>
+          <a:fontRef idx="minor">
+            <a:schemeClr val="dk1"/>
+          </a:fontRef>
+        </p:style>
+        <p:txBody>
+          <a:bodyPr rtlCol="0" anchor="ctr"/>
+          <a:lstStyle/>
+          <a:p>
+            <a:pPr algn="ctr"/>
+            <a:endParaRPr lang="zh-TW" altLang="en-US"/>
+          </a:p>
+        </p:txBody>
+      </p:sp>
+      <p:sp>
+        <p:nvSpPr>
+          <p:cNvPr id="16" name="矩形 15">
+            <a:extLst>
+              <a:ext uri="{FF2B5EF4-FFF2-40B4-BE49-F238E27FC236}">
+                <a16:creationId xmlns:a16="http://schemas.microsoft.com/office/drawing/2014/main" id="{7A0F2592-5E01-44CE-99C5-9F1C11110CEC}"/>
+              </a:ext>
+            </a:extLst>
+          </p:cNvPr>
+          <p:cNvSpPr/>
+          <p:nvPr/>
+        </p:nvSpPr>
+        <p:spPr>
+          <a:xfrm flipV="1">
+            <a:off x="4969741" y="7145672"/>
+            <a:ext cx="2209800" cy="1243445"/>
+          </a:xfrm>
+          <a:prstGeom prst="rect">
+            <a:avLst/>
+          </a:prstGeom>
+          <a:solidFill>
+            <a:srgbClr val="A2D3B0"/>
+          </a:solidFill>
+          <a:ln/>
+          <a:effectLst>
+            <a:outerShdw blurRad="50800" dist="38100" dir="2700000" algn="tl" rotWithShape="0">
+              <a:prstClr val="black">
+                <a:alpha val="40000"/>
+              </a:prstClr>
+            </a:outerShdw>
+          </a:effectLst>
+        </p:spPr>
+        <p:style>
+          <a:lnRef idx="1">
+            <a:schemeClr val="accent5"/>
+          </a:lnRef>
+          <a:fillRef idx="2">
+            <a:schemeClr val="accent5"/>
+          </a:fillRef>
+          <a:effectRef idx="1">
+            <a:schemeClr val="accent5"/>
+          </a:effectRef>
+          <a:fontRef idx="minor">
+            <a:schemeClr val="dk1"/>
+          </a:fontRef>
+        </p:style>
+        <p:txBody>
+          <a:bodyPr rtlCol="0" anchor="ctr"/>
+          <a:lstStyle/>
+          <a:p>
+            <a:pPr algn="ctr"/>
+            <a:endParaRPr lang="zh-TW" altLang="en-US"/>
+          </a:p>
+        </p:txBody>
+      </p:sp>
+      <p:sp>
+        <p:nvSpPr>
+          <p:cNvPr id="17" name="矩形 16">
+            <a:extLst>
+              <a:ext uri="{FF2B5EF4-FFF2-40B4-BE49-F238E27FC236}">
+                <a16:creationId xmlns:a16="http://schemas.microsoft.com/office/drawing/2014/main" id="{03F8089B-EF5E-41D6-ACDD-7715DA8C7FB3}"/>
+              </a:ext>
+            </a:extLst>
+          </p:cNvPr>
+          <p:cNvSpPr/>
+          <p:nvPr/>
+        </p:nvSpPr>
+        <p:spPr>
+          <a:xfrm flipV="1">
+            <a:off x="10447565" y="4159082"/>
+            <a:ext cx="2209800" cy="1243445"/>
+          </a:xfrm>
+          <a:prstGeom prst="rect">
+            <a:avLst/>
+          </a:prstGeom>
+          <a:solidFill>
+            <a:srgbClr val="FCC4FB"/>
+          </a:solidFill>
+          <a:ln/>
+          <a:effectLst>
+            <a:outerShdw blurRad="50800" dist="38100" dir="2700000" algn="tl" rotWithShape="0">
+              <a:prstClr val="black">
+                <a:alpha val="40000"/>
+              </a:prstClr>
+            </a:outerShdw>
+          </a:effectLst>
+        </p:spPr>
+        <p:style>
+          <a:lnRef idx="1">
+            <a:schemeClr val="accent5"/>
+          </a:lnRef>
+          <a:fillRef idx="2">
+            <a:schemeClr val="accent5"/>
+          </a:fillRef>
+          <a:effectRef idx="1">
+            <a:schemeClr val="accent5"/>
+          </a:effectRef>
+          <a:fontRef idx="minor">
+            <a:schemeClr val="dk1"/>
+          </a:fontRef>
+        </p:style>
+        <p:txBody>
+          <a:bodyPr rtlCol="0" anchor="ctr"/>
+          <a:lstStyle/>
+          <a:p>
+            <a:pPr algn="ctr"/>
+            <a:endParaRPr lang="zh-TW" altLang="en-US"/>
+          </a:p>
+        </p:txBody>
+      </p:sp>
+      <p:sp>
+        <p:nvSpPr>
+          <p:cNvPr id="18" name="矩形 17">
+            <a:extLst>
+              <a:ext uri="{FF2B5EF4-FFF2-40B4-BE49-F238E27FC236}">
+                <a16:creationId xmlns:a16="http://schemas.microsoft.com/office/drawing/2014/main" id="{742C962F-3A88-47FC-ADB5-4513064CDFF1}"/>
+              </a:ext>
+            </a:extLst>
+          </p:cNvPr>
+          <p:cNvSpPr/>
+          <p:nvPr/>
+        </p:nvSpPr>
+        <p:spPr>
+          <a:xfrm flipV="1">
+            <a:off x="10972800" y="7315722"/>
+            <a:ext cx="2209800" cy="1243445"/>
+          </a:xfrm>
+          <a:prstGeom prst="rect">
+            <a:avLst/>
+          </a:prstGeom>
+          <a:solidFill>
+            <a:srgbClr val="9F9DC8"/>
+          </a:solidFill>
+          <a:ln/>
+          <a:effectLst>
+            <a:outerShdw blurRad="50800" dist="38100" dir="2700000" algn="tl" rotWithShape="0">
+              <a:prstClr val="black">
+                <a:alpha val="40000"/>
+              </a:prstClr>
+            </a:outerShdw>
+          </a:effectLst>
+        </p:spPr>
+        <p:style>
+          <a:lnRef idx="1">
+            <a:schemeClr val="accent5"/>
+          </a:lnRef>
+          <a:fillRef idx="2">
+            <a:schemeClr val="accent5"/>
+          </a:fillRef>
+          <a:effectRef idx="1">
+            <a:schemeClr val="accent5"/>
+          </a:effectRef>
+          <a:fontRef idx="minor">
+            <a:schemeClr val="dk1"/>
+          </a:fontRef>
+        </p:style>
+        <p:txBody>
+          <a:bodyPr rtlCol="0" anchor="ctr"/>
+          <a:lstStyle/>
+          <a:p>
+            <a:pPr algn="ctr"/>
+            <a:endParaRPr lang="zh-TW" altLang="en-US"/>
+          </a:p>
+        </p:txBody>
+      </p:sp>
+      <p:sp>
+        <p:nvSpPr>
+          <p:cNvPr id="19" name="矩形 18">
+            <a:extLst>
+              <a:ext uri="{FF2B5EF4-FFF2-40B4-BE49-F238E27FC236}">
+                <a16:creationId xmlns:a16="http://schemas.microsoft.com/office/drawing/2014/main" id="{725AAB06-95DC-4413-9437-41F081897704}"/>
+              </a:ext>
+            </a:extLst>
+          </p:cNvPr>
+          <p:cNvSpPr/>
+          <p:nvPr/>
+        </p:nvSpPr>
+        <p:spPr>
+          <a:xfrm flipV="1">
+            <a:off x="10668000" y="5729631"/>
+            <a:ext cx="2209800" cy="1243445"/>
+          </a:xfrm>
+          <a:prstGeom prst="rect">
+            <a:avLst/>
+          </a:prstGeom>
+          <a:solidFill>
+            <a:srgbClr val="C9C1E1"/>
+          </a:solidFill>
+          <a:ln/>
+          <a:effectLst>
+            <a:outerShdw blurRad="50800" dist="38100" dir="2700000" algn="tl" rotWithShape="0">
+              <a:prstClr val="black">
+                <a:alpha val="40000"/>
+              </a:prstClr>
+            </a:outerShdw>
+          </a:effectLst>
+        </p:spPr>
+        <p:style>
+          <a:lnRef idx="1">
+            <a:schemeClr val="accent5"/>
+          </a:lnRef>
+          <a:fillRef idx="2">
+            <a:schemeClr val="accent5"/>
+          </a:fillRef>
+          <a:effectRef idx="1">
+            <a:schemeClr val="accent5"/>
+          </a:effectRef>
+          <a:fontRef idx="minor">
+            <a:schemeClr val="dk1"/>
+          </a:fontRef>
+        </p:style>
+        <p:txBody>
+          <a:bodyPr rtlCol="0" anchor="ctr"/>
+          <a:lstStyle/>
+          <a:p>
+            <a:pPr algn="ctr"/>
+            <a:endParaRPr lang="zh-TW" altLang="en-US"/>
+          </a:p>
+        </p:txBody>
+      </p:sp>
+      <p:sp>
+        <p:nvSpPr>
+          <p:cNvPr id="20" name="矩形 19">
+            <a:extLst>
+              <a:ext uri="{FF2B5EF4-FFF2-40B4-BE49-F238E27FC236}">
+                <a16:creationId xmlns:a16="http://schemas.microsoft.com/office/drawing/2014/main" id="{62C35985-74F9-4B47-974B-4C4EE7FCD837}"/>
+              </a:ext>
+            </a:extLst>
+          </p:cNvPr>
+          <p:cNvSpPr/>
+          <p:nvPr/>
+        </p:nvSpPr>
+        <p:spPr>
+          <a:xfrm flipV="1">
+            <a:off x="4468091" y="4170177"/>
+            <a:ext cx="2209800" cy="1243445"/>
+          </a:xfrm>
+          <a:prstGeom prst="rect">
+            <a:avLst/>
+          </a:prstGeom>
+          <a:solidFill>
+            <a:srgbClr val="FFD5C4"/>
+          </a:solidFill>
+          <a:ln/>
+          <a:effectLst>
+            <a:outerShdw blurRad="50800" dist="38100" dir="2700000" algn="tl" rotWithShape="0">
+              <a:prstClr val="black">
+                <a:alpha val="40000"/>
+              </a:prstClr>
+            </a:outerShdw>
+          </a:effectLst>
+        </p:spPr>
+        <p:style>
+          <a:lnRef idx="1">
+            <a:schemeClr val="accent5"/>
+          </a:lnRef>
+          <a:fillRef idx="2">
+            <a:schemeClr val="accent5"/>
+          </a:fillRef>
+          <a:effectRef idx="1">
+            <a:schemeClr val="accent5"/>
+          </a:effectRef>
+          <a:fontRef idx="minor">
+            <a:schemeClr val="dk1"/>
+          </a:fontRef>
+        </p:style>
+        <p:txBody>
+          <a:bodyPr rtlCol="0" anchor="ctr"/>
+          <a:lstStyle/>
+          <a:p>
+            <a:pPr algn="ctr"/>
+            <a:endParaRPr lang="zh-TW" altLang="en-US"/>
+          </a:p>
+        </p:txBody>
+      </p:sp>
+      <p:sp>
+        <p:nvSpPr>
+          <p:cNvPr id="21" name="矩形 20">
+            <a:extLst>
+              <a:ext uri="{FF2B5EF4-FFF2-40B4-BE49-F238E27FC236}">
+                <a16:creationId xmlns:a16="http://schemas.microsoft.com/office/drawing/2014/main" id="{FE9FB946-046A-4381-BC63-90EC96C663CD}"/>
+              </a:ext>
+            </a:extLst>
+          </p:cNvPr>
+          <p:cNvSpPr/>
+          <p:nvPr/>
+        </p:nvSpPr>
+        <p:spPr>
+          <a:xfrm flipV="1">
+            <a:off x="1640939" y="5646041"/>
+            <a:ext cx="2209800" cy="1243445"/>
+          </a:xfrm>
+          <a:prstGeom prst="rect">
+            <a:avLst/>
+          </a:prstGeom>
+          <a:solidFill>
+            <a:srgbClr val="FBECA2"/>
+          </a:solidFill>
+          <a:ln/>
+          <a:effectLst>
+            <a:outerShdw blurRad="50800" dist="38100" dir="2700000" algn="tl" rotWithShape="0">
+              <a:prstClr val="black">
+                <a:alpha val="40000"/>
+              </a:prstClr>
+            </a:outerShdw>
+          </a:effectLst>
+        </p:spPr>
+        <p:style>
+          <a:lnRef idx="1">
+            <a:schemeClr val="accent5"/>
+          </a:lnRef>
+          <a:fillRef idx="2">
+            <a:schemeClr val="accent5"/>
+          </a:fillRef>
+          <a:effectRef idx="1">
+            <a:schemeClr val="accent5"/>
+          </a:effectRef>
+          <a:fontRef idx="minor">
+            <a:schemeClr val="dk1"/>
+          </a:fontRef>
+        </p:style>
+        <p:txBody>
+          <a:bodyPr rtlCol="0" anchor="ctr"/>
+          <a:lstStyle/>
+          <a:p>
+            <a:pPr algn="ctr"/>
+            <a:endParaRPr lang="zh-TW" altLang="en-US"/>
+          </a:p>
+        </p:txBody>
+      </p:sp>
+      <p:sp>
+        <p:nvSpPr>
+          <p:cNvPr id="22" name="矩形 21">
+            <a:extLst>
+              <a:ext uri="{FF2B5EF4-FFF2-40B4-BE49-F238E27FC236}">
+                <a16:creationId xmlns:a16="http://schemas.microsoft.com/office/drawing/2014/main" id="{B529FE49-E154-4D96-BE00-2600026CDA6E}"/>
+              </a:ext>
+            </a:extLst>
+          </p:cNvPr>
+          <p:cNvSpPr/>
+          <p:nvPr/>
+        </p:nvSpPr>
+        <p:spPr>
+          <a:xfrm flipV="1">
+            <a:off x="7966363" y="4099839"/>
+            <a:ext cx="2209800" cy="1243445"/>
+          </a:xfrm>
+          <a:prstGeom prst="rect">
+            <a:avLst/>
+          </a:prstGeom>
+          <a:solidFill>
+            <a:srgbClr val="F6C0CE"/>
+          </a:solidFill>
+          <a:ln/>
+          <a:effectLst>
+            <a:outerShdw blurRad="50800" dist="38100" dir="2700000" algn="tl" rotWithShape="0">
+              <a:prstClr val="black">
+                <a:alpha val="40000"/>
+              </a:prstClr>
+            </a:outerShdw>
+          </a:effectLst>
+        </p:spPr>
+        <p:style>
+          <a:lnRef idx="1">
+            <a:schemeClr val="accent5"/>
+          </a:lnRef>
+          <a:fillRef idx="2">
+            <a:schemeClr val="accent5"/>
+          </a:fillRef>
+          <a:effectRef idx="1">
+            <a:schemeClr val="accent5"/>
+          </a:effectRef>
+          <a:fontRef idx="minor">
+            <a:schemeClr val="dk1"/>
+          </a:fontRef>
+        </p:style>
+        <p:txBody>
+          <a:bodyPr rtlCol="0" anchor="ctr"/>
+          <a:lstStyle/>
+          <a:p>
+            <a:pPr algn="ctr"/>
+            <a:endParaRPr lang="zh-TW" altLang="en-US"/>
+          </a:p>
+        </p:txBody>
+      </p:sp>
+    </p:spTree>
+    <p:extLst>
+      <p:ext uri="{BB962C8B-B14F-4D97-AF65-F5344CB8AC3E}">
+        <p14:creationId xmlns:p14="http://schemas.microsoft.com/office/powerpoint/2010/main" val="1819327646"/>
       </p:ext>
     </p:extLst>
   </p:cSld>
